--- a/slides/ModuleG_FederatedLearning_EN.pptx
+++ b/slides/ModuleG_FederatedLearning_EN.pptx
@@ -6,7 +6,7 @@
   </p:sldMasterIdLst>
   <p:sldIdLst>
     <p:sldId id="256" r:id="rId7"/>
-    <p:sldId id="257" r:id="rId8"/>
+    <p:sldId id="257" r:id="rId9"/>
     <p:sldId id="258" r:id="rId10"/>
     <p:sldId id="259" r:id="rId11"/>
     <p:sldId id="260" r:id="rId12"/>
@@ -533,7 +533,31 @@
           <a:lstStyle/>
           <a:p>
             <a:r>
-              <a:t>[ADV] 75 min</a:t>
+              <a:t>Welcome. In this module we will work through Module G — Federated Learning on the Edge.</a:t>
+            </a:r>
+          </a:p>
+          <a:p/>
+          <a:p>
+            <a:r>
+              <a:t>Ch.19 · Advanced · VM {{VM_IP}}</a:t>
+            </a:r>
+          </a:p>
+          <a:p/>
+          <a:p>
+            <a:r>
+              <a:t>The session alternates theory from the book with live exercises on the Stack4Things lab VM. Replace the placeholder IP with the address of the machine you are using.</a:t>
+            </a:r>
+          </a:p>
+          <a:p/>
+          <a:p>
+            <a:r>
+              <a:t>Advanced · Ch.19 — Federated Learning · requires Module D (3 Active boards).</a:t>
+            </a:r>
+          </a:p>
+          <a:p/>
+          <a:p>
+            <a:r>
+              <a:t>When you're ready, advance to the first section.</a:t>
             </a:r>
           </a:p>
         </p:txBody>
@@ -603,7 +627,31 @@
           <a:lstStyle/>
           <a:p>
             <a:r>
-              <a:t>[ADV] 75 min</a:t>
+              <a:t>In this slide we cover Privacy and regulatory framing (Ch.19). This material is covered in Ch.19 · regulatory compliance · privacy-preserving FL footnote.</a:t>
+            </a:r>
+          </a:p>
+          <a:p/>
+          <a:p>
+            <a:r>
+              <a:t>First, regarding gdpr article 25, data protection by design — FL keeps raw data at edge by default. Next, regarding dpdp (india), hipaa (us healthcare), restrict cross-border raw data transfer.</a:t>
+            </a:r>
+          </a:p>
+          <a:p/>
+          <a:p>
+            <a:r>
+              <a:t>By contrast, FL enables smarter systems while data stays on edge nodes under local jurisdiction. We should also consider that S4T provides deployment vehicle (IoTronic inject) — FL provides training methodology.</a:t>
+            </a:r>
+          </a:p>
+          <a:p/>
+          <a:p>
+            <a:r>
+              <a:t>Another key point is that regarding production extensions, differential privacy noise on updates, secure aggregation (crypto). Furthermore, regarding lab scope, demonstrate FL workflow — not production-grade privacy guarantees.</a:t>
+            </a:r>
+          </a:p>
+          <a:p/>
+          <a:p>
+            <a:r>
+              <a:t>I'll pause here for questions, then we'll continue.</a:t>
             </a:r>
           </a:p>
         </p:txBody>
@@ -673,7 +721,31 @@
           <a:lstStyle/>
           <a:p>
             <a:r>
-              <a:t>[ADV] 75 min</a:t>
+              <a:t>In this slide we cover FL challenges and open issues (Ch.19). This material is covered in Ch.19 § Challenges and open issues · FedProx · secure aggregation footnote.</a:t>
+            </a:r>
+          </a:p>
+          <a:p/>
+          <a:p>
+            <a:r>
+              <a:t>First, regarding system heterogeneity, boards differ in CPU, RAM, bandwidth — stragglers delay aggregation rounds. Next, regarding client availability, intermittent connectivity reduces effective participants per round.</a:t>
+            </a:r>
+          </a:p>
+          <a:p/>
+          <a:p>
+            <a:r>
+              <a:t>By contrast, regarding model heterogeneity, incompatible architectures complicate weight merging and convergence. We should also consider that regarding statistical heterogeneity (non-iid), skewed local data degrades global model accuracy.</a:t>
+            </a:r>
+          </a:p>
+          <a:p/>
+          <a:p>
+            <a:r>
+              <a:t>Another key point is that regarding model update security, poisoning and backdoor attacks via malicious local training data. Furthermore, Mitigations include FedProx, secure aggregation, differential privacy — research beyond lab scope.</a:t>
+            </a:r>
+          </a:p>
+          <a:p/>
+          <a:p>
+            <a:r>
+              <a:t>I'll pause here for questions, then we'll continue.</a:t>
             </a:r>
           </a:p>
         </p:txBody>
@@ -743,7 +815,31 @@
           <a:lstStyle/>
           <a:p>
             <a:r>
-              <a:t>[ADV] 75 min</a:t>
+              <a:t>In this slide we cover FL platform landscape (Ch.19). This material is covered in Ch.19 § Core requirements · tools and frameworks.</a:t>
+            </a:r>
+          </a:p>
+          <a:p/>
+          <a:p>
+            <a:r>
+              <a:t>First, regarding open source, tensorFlow Federated, Flower (lab choice), PySyft, LEAF benchmarks, FedML. Next, regarding enterprise, NVIDIA FLARE, IBM FL — production orchestration and compliance tooling.</a:t>
+            </a:r>
+          </a:p>
+          <a:p/>
+          <a:p>
+            <a:r>
+              <a:t>By contrast, Flower chosen in ch19 repo for lightweight Python server + edge client plugin integration. We should also consider that Platform choice depends on scale, privacy requirements, and edge hardware constraints.</a:t>
+            </a:r>
+          </a:p>
+          <a:p/>
+          <a:p>
+            <a:r>
+              <a:t>Another key point is that regarding s4t contribution, same IoTronic inject lifecycle deploys FL client Workers on real boards. Furthermore, Google/Apple on-device FL cited in book as industry validation of federated approach.</a:t>
+            </a:r>
+          </a:p>
+          <a:p/>
+          <a:p>
+            <a:r>
+              <a:t>I'll pause here for questions, then we'll continue.</a:t>
             </a:r>
           </a:p>
         </p:txBody>
@@ -813,7 +909,7 @@
           <a:lstStyle/>
           <a:p>
             <a:r>
-              <a:t>[ADV] 75 min</a:t>
+              <a:t>Please look at the diagram on screen: FL architecture — 3 edge clients. Describe the main boxes and arrows. Relate each element to a Docker service or API you have already seen. In particular, note the following: Flower server on VM host + 3 LR clients on :1474/:1475/:1476 (Module D). Take a few seconds to orient before we continue.</a:t>
             </a:r>
           </a:p>
         </p:txBody>
@@ -883,7 +979,7 @@
           <a:lstStyle/>
           <a:p>
             <a:r>
-              <a:t>[ADV] 75 min</a:t>
+              <a:t>Please look at the sequence diagram on screen: UML sequence — Federated Learning round (Module G). Trace the diagram from left to right. Name each actor, the protocol used, and the message that crosses the cloud–edge boundary. In particular, note the following: Broadcast weights → local train → upload gradients → FedAvg. Take a few seconds to orient before we continue.</a:t>
             </a:r>
           </a:p>
         </p:txBody>
@@ -953,7 +1049,36 @@
           <a:lstStyle/>
           <a:p>
             <a:r>
-              <a:t>[ADV] 75 min</a:t>
+              <a:t>On this slide, Module G — learning objectives.</a:t>
+            </a:r>
+          </a:p>
+          <a:p/>
+          <a:p>
+            <a:r>
+              <a:t>First, Explain FL motivation, FedAvg, and horizontal cross-silo taxonomy (Ch.19). Next, Deploy Flower aggregation server on VM host.</a:t>
+            </a:r>
+          </a:p>
+          <a:p/>
+          <a:p>
+            <a:r>
+              <a:t>By contrast, Inject FL async client plugin on 3 Active boards with distinct CSV datasets. We should also consider that Pass validate-lab-fl.sh — bridge Ch.19 AI methodology with Ch.13–14 S4T stack.</a:t>
+            </a:r>
+          </a:p>
+          <a:p/>
+          <a:p>
+            <a:r>
+              <a:t>If these objectives are clear, we can proceed.</a:t>
+            </a:r>
+          </a:p>
+          <a:p/>
+          <a:p>
+            <a:r>
+              <a:t>Instructor cues:</a:t>
+            </a:r>
+          </a:p>
+          <a:p>
+            <a:r>
+              <a:t>• Observe ≥2 aggregation rounds complete (FL_ROUNDS=2 classroom pacing)</a:t>
             </a:r>
           </a:p>
         </p:txBody>
@@ -1023,7 +1148,37 @@
           <a:lstStyle/>
           <a:p>
             <a:r>
-              <a:t>[ADV] 75 min</a:t>
+              <a:t>In this demonstration, What the FL demo proves — demo goals.</a:t>
+            </a:r>
+          </a:p>
+          <a:p/>
+          <a:p>
+            <a:r>
+              <a:t>First, Edge boards participate in distributed ML without sharing raw CSV data across boards. Next, IoTronic deploys identical FL client plugin code to heterogeneous Active boards.</a:t>
+            </a:r>
+          </a:p>
+          <a:p/>
+          <a:p>
+            <a:r>
+              <a:t>By contrast, Aggregation improves global model accuracy over successive rounds (FL_ROUNDS=2 in class). We should also consider that Bridges Ch.19 AI methodology with Ch.13–14 S4T operational stack (inject + Start).</a:t>
+            </a:r>
+          </a:p>
+          <a:p/>
+          <a:p>
+            <a:r>
+              <a:t>Another key point is that Students can classify lab setup as horizontal cross-silo FL from Ch.19 taxonomy. Furthermore, Flower server log shows round completion — tangible evidence of federated aggregation.</a:t>
+            </a:r>
+          </a:p>
+          <a:p/>
+          <a:p>
+            <a:r>
+              <a:t>Check that your screen matches what we showed before moving on.</a:t>
+            </a:r>
+          </a:p>
+          <a:p/>
+          <a:p>
+            <a:r>
+              <a:t>Session timing — Module G — 60-minute timeline:</a:t>
             </a:r>
           </a:p>
         </p:txBody>
@@ -1093,7 +1248,36 @@
           <a:lstStyle/>
           <a:p>
             <a:r>
-              <a:t>[ADV] 75 min</a:t>
+              <a:t>On this slide, Prerequisites &amp; resource constraints.</a:t>
+            </a:r>
+          </a:p>
+          <a:p/>
+          <a:p>
+            <a:r>
+              <a:t>First, Module D complete — 3 Active boards on {{VM_IP}}:1474/:1475/:1476. Next, regarding repo, training/repos/ch19 (server.py, client.py, heart_*.csv).</a:t>
+            </a:r>
+          </a:p>
+          <a:p/>
+          <a:p>
+            <a:r>
+              <a:t>By contrast, Do NOT run simultaneously with Module H K3s — RAM gate: free -h ≥ 2 GB during FL. We should also consider that Horizon admin / s4t · LR dashboards me / arancino on all three instances.</a:t>
+            </a:r>
+          </a:p>
+          <a:p/>
+          <a:p>
+            <a:r>
+              <a:t>If these objectives are clear, we can proceed.</a:t>
+            </a:r>
+          </a:p>
+          <a:p/>
+          <a:p>
+            <a:r>
+              <a:t>Instructor cues:</a:t>
+            </a:r>
+          </a:p>
+          <a:p>
+            <a:r>
+              <a:t>• Classroom pacing: FL_ROUNDS=2 — keeps session within 60 minutes</a:t>
             </a:r>
           </a:p>
         </p:txBody>
@@ -1163,7 +1347,13 @@
           <a:lstStyle/>
           <a:p>
             <a:r>
-              <a:t>[ADV] 6 min</a:t>
+              <a:t>We now begin a new section: Lab: Flower server setup. Install dependencies + start aggregation. In the next slides, listen for whether we are in theory mode or hands-on mode, and open your terminal when the slides turn to lab work.</a:t>
+            </a:r>
+          </a:p>
+          <a:p/>
+          <a:p>
+            <a:r>
+              <a:t>Instructor timing (title): Hands-on — Flower server setup</a:t>
             </a:r>
           </a:p>
         </p:txBody>
@@ -1233,7 +1423,31 @@
           <a:lstStyle/>
           <a:p>
             <a:r>
-              <a:t>[ADV] 75 min</a:t>
+              <a:t>Now we move to the hands-on part: Install Flower and ML dependencies. Open your lab VM and follow along.</a:t>
+            </a:r>
+          </a:p>
+          <a:p/>
+          <a:p>
+            <a:r>
+              <a:t>Please run the following command on your VM: pip install flwr torch pandas scikit-learn. Wait until you see a sensible result before continuing. Next, regarding # or use helper, training/experiments/federated-learning/start-server.sh.</a:t>
+            </a:r>
+          </a:p>
+          <a:p/>
+          <a:p>
+            <a:r>
+              <a:t>By contrast, regarding verify, python3 -c "import flwr; print(flwr.__version__)".</a:t>
+            </a:r>
+          </a:p>
+          <a:p/>
+          <a:p>
+            <a:r>
+              <a:t>Raise your hand if you're stuck — we'll wait until most of you are done.</a:t>
+            </a:r>
+          </a:p>
+          <a:p/>
+          <a:p>
+            <a:r>
+              <a:t>Instructor timing (title): Step 1 — Install Flower and ML dependencies</a:t>
             </a:r>
           </a:p>
         </p:txBody>
@@ -1303,7 +1517,7 @@
           <a:lstStyle/>
           <a:p>
             <a:r>
-              <a:t>[ADV] 75 min</a:t>
+              <a:t>We now begin a new section: Federated Learning theory. Ch.19 — motivation, architecture, taxonomy. In the next slides, listen for whether we are in theory mode or hands-on mode, and open your terminal when the slides turn to lab work.</a:t>
             </a:r>
           </a:p>
         </p:txBody>
@@ -1373,7 +1587,42 @@
           <a:lstStyle/>
           <a:p>
             <a:r>
-              <a:t>[ADV] 6 min</a:t>
+              <a:t>In this slide we cover Flower server configuration (Ch.19). This material is covered in Ch.19 · server.py listing · Flower ServerConfig.</a:t>
+            </a:r>
+          </a:p>
+          <a:p/>
+          <a:p>
+            <a:r>
+              <a:t>First, regarding server.py in ch19 repo, configures FedAvg strategy and number of rounds. Next, FL_ROUNDS env var controls aggregation iterations — set to 2 for classroom demo.</a:t>
+            </a:r>
+          </a:p>
+          <a:p/>
+          <a:p>
+            <a:r>
+              <a:t>By contrast, Server binds all interfaces on port 8080 — must be reachable from LR Docker containers. We should also consider that LR containers reach VM host via docker bridge gateway IP or host network mode.</a:t>
+            </a:r>
+          </a:p>
+          <a:p/>
+          <a:p>
+            <a:r>
+              <a:t>Another key point is that regarding minimum clients, 3 (matches 3 boards from Module D) — server waits for all before round.</a:t>
+            </a:r>
+          </a:p>
+          <a:p/>
+          <a:p>
+            <a:r>
+              <a:t>I'll pause here for questions, then we'll continue.</a:t>
+            </a:r>
+          </a:p>
+          <a:p/>
+          <a:p>
+            <a:r>
+              <a:t>Instructor cues:</a:t>
+            </a:r>
+          </a:p>
+          <a:p>
+            <a:r>
+              <a:t>• Server log prints per-round aggregated metrics — instructor projects for class visibility</a:t>
             </a:r>
           </a:p>
         </p:txBody>
@@ -1443,7 +1692,31 @@
           <a:lstStyle/>
           <a:p>
             <a:r>
-              <a:t>[ADV] 75 min</a:t>
+              <a:t>Now we move to the hands-on part: Start Flower aggregation server. Open your lab VM and follow along.</a:t>
+            </a:r>
+          </a:p>
+          <a:p/>
+          <a:p>
+            <a:r>
+              <a:t>Please run the following command on your VM: cd training/repos/ch19. Wait until you see a sensible result before continuing. Please run the following command on your VM: FL_ROUNDS=2 python3 server.py. Wait until you see a sensible result before continuing.</a:t>
+            </a:r>
+          </a:p>
+          <a:p/>
+          <a:p>
+            <a:r>
+              <a:t>By contrast, Keep terminal open — server must run while client plugins connect. We should also consider that regarding expected, waiting for clients message, then round 1/2 aggregation output.</a:t>
+            </a:r>
+          </a:p>
+          <a:p/>
+          <a:p>
+            <a:r>
+              <a:t>Raise your hand if you're stuck — we'll wait until most of you are done.</a:t>
+            </a:r>
+          </a:p>
+          <a:p/>
+          <a:p>
+            <a:r>
+              <a:t>Instructor timing (title): Step 2 — Start Flower aggregation server</a:t>
             </a:r>
           </a:p>
         </p:txBody>
@@ -1513,7 +1786,13 @@
           <a:lstStyle/>
           <a:p>
             <a:r>
-              <a:t>[ADV] 6 min</a:t>
+              <a:t>We now begin a new section: Lab: deploy FL client plugins. One async plugin per board. In the next slides, listen for whether we are in theory mode or hands-on mode, and open your terminal when the slides turn to lab work.</a:t>
+            </a:r>
+          </a:p>
+          <a:p/>
+          <a:p>
+            <a:r>
+              <a:t>Instructor timing (title): Hands-on — deploy FL client plugins</a:t>
             </a:r>
           </a:p>
         </p:txBody>
@@ -1583,7 +1862,31 @@
           <a:lstStyle/>
           <a:p>
             <a:r>
-              <a:t>[ADV] 75 min</a:t>
+              <a:t>Now we move to the hands-on part: Create and inject FL client plugin. Open your lab VM and follow along.</a:t>
+            </a:r>
+          </a:p>
+          <a:p/>
+          <a:p>
+            <a:r>
+              <a:t>First, Horizon, then Plugins, then Create async plugin from ch19 client.py template. Next, Create three plugin instances OR one plugin injected on three boards.</a:t>
+            </a:r>
+          </a:p>
+          <a:p/>
+          <a:p>
+            <a:r>
+              <a:t>By contrast, regarding configure dataset path, heart_1.csv on alpha, heart_2.csv on beta, heart_3.csv on gamma. We should also consider that regarding server address in plugin params, {{VM_IP}}:8080 (Flower server on VM host).</a:t>
+            </a:r>
+          </a:p>
+          <a:p/>
+          <a:p>
+            <a:r>
+              <a:t>Raise your hand if you're stuck — we'll wait until most of you are done.</a:t>
+            </a:r>
+          </a:p>
+          <a:p/>
+          <a:p>
+            <a:r>
+              <a:t>Instructor timing (title): Step 3 — Create and inject FL client plugin</a:t>
             </a:r>
           </a:p>
         </p:txBody>
@@ -1653,7 +1956,7 @@
           <a:lstStyle/>
           <a:p>
             <a:r>
-              <a:t>[ADV] 75 min</a:t>
+              <a:t>Please look at the screenshot on screen: Horizon IoT — Plugins dashboard (FL client deploy). Walk the class through what they see in the interface. Connect each panel and button to a component we already deployed in the stack. In particular, note the following: Three async plugins — Callable=OFF → use Start action · login admin / s4t. Take a few seconds to orient before we continue.</a:t>
             </a:r>
           </a:p>
         </p:txBody>
@@ -1723,7 +2026,7 @@
           <a:lstStyle/>
           <a:p>
             <a:r>
-              <a:t>[ADV] 6 min</a:t>
+              <a:t>Please look at the diagram on screen: Multi-board topology for FL clients. Describe the main boxes and arrows. Relate each element to a Docker service or API you have already seen. In particular, note the following: 3 LR clients :1474/:1475/:1476 → single Flower server {{VM_IP}}:8080. Take a few seconds to orient before we continue.</a:t>
             </a:r>
           </a:p>
         </p:txBody>
@@ -1793,7 +2096,31 @@
           <a:lstStyle/>
           <a:p>
             <a:r>
-              <a:t>[ADV] 75 min</a:t>
+              <a:t>Now we move to the hands-on part: Start FL clients on all three boards. Open your lab VM and follow along.</a:t>
+            </a:r>
+          </a:p>
+          <a:p/>
+          <a:p>
+            <a:r>
+              <a:t>First, regarding while flower server is running, plugins, then FL client, then Start on board-alpha. Next, Start on board-beta · Start on board-gamma.</a:t>
+            </a:r>
+          </a:p>
+          <a:p/>
+          <a:p>
+            <a:r>
+              <a:t>By contrast, regarding watch server terminal, clients connect, then round 1 begins, then aggregation, then round 2. We should also consider that regarding each lr log, docker logs lightning-rod-2 — local training progress messages.</a:t>
+            </a:r>
+          </a:p>
+          <a:p/>
+          <a:p>
+            <a:r>
+              <a:t>Raise your hand if you're stuck — we'll wait until most of you are done.</a:t>
+            </a:r>
+          </a:p>
+          <a:p/>
+          <a:p>
+            <a:r>
+              <a:t>Instructor timing (title): Step 4 — Start FL clients on all three boards</a:t>
             </a:r>
           </a:p>
         </p:txBody>
@@ -1863,7 +2190,31 @@
           <a:lstStyle/>
           <a:p>
             <a:r>
-              <a:t>[ADV] 75 min</a:t>
+              <a:t>In this slide we cover Client plugin execution flow (Ch.19). This material is covered in Ch.19 · client.py Worker class · async plugin pattern.</a:t>
+            </a:r>
+          </a:p>
+          <a:p/>
+          <a:p>
+            <a:r>
+              <a:t>First, Start action launches async Worker — connects to Flower server via gRPC/TCP. Next, Worker loads local CSV — initializes model with global weights from server.</a:t>
+            </a:r>
+          </a:p>
+          <a:p/>
+          <a:p>
+            <a:r>
+              <a:t>By contrast, regarding local training, N local epochs on board CPU — sends weight delta to server. We should also consider that Server aggregates all 3 client updates — broadcasts new global weights.</a:t>
+            </a:r>
+          </a:p>
+          <a:p/>
+          <a:p>
+            <a:r>
+              <a:t>Another key point is that regarding round 2, clients receive updated global model — repeat local training. Furthermore, regarding stop, interrupt plugin on each board after rounds complete — clean shutdown.</a:t>
+            </a:r>
+          </a:p>
+          <a:p/>
+          <a:p>
+            <a:r>
+              <a:t>I'll pause here for questions, then we'll continue.</a:t>
             </a:r>
           </a:p>
         </p:txBody>
@@ -1933,7 +2284,31 @@
           <a:lstStyle/>
           <a:p>
             <a:r>
-              <a:t>[ADV] 75 min</a:t>
+              <a:t>In this slide we cover Troubleshooting FL connectivity (Ch.19 lab). This material is covered in training/experiments/federated-learning/ · validate-lab-fl.sh.</a:t>
+            </a:r>
+          </a:p>
+          <a:p/>
+          <a:p>
+            <a:r>
+              <a:t>First, regarding clients cannot connect, verify Flower server IP reachable from LR container network. Next, regarding use docker bridge gateway ip if {{vm_ip}}, 8080 not reachable from inside containers.</a:t>
+            </a:r>
+          </a:p>
+          <a:p/>
+          <a:p>
+            <a:r>
+              <a:t>By contrast, regarding server stuck waiting, ensure all 3 Start actions fired — minimum client count not met. We should also consider that regarding oom on board, reduce local epochs in client.py params — edge boards have limited RAM.</a:t>
+            </a:r>
+          </a:p>
+          <a:p/>
+          <a:p>
+            <a:r>
+              <a:t>Another key point is that regarding plugin error on start, check client.py syntax and flwr/torch installed in LR image. Furthermore, Validate-lab-fl.sh automates connectivity and round-completion checks.</a:t>
+            </a:r>
+          </a:p>
+          <a:p/>
+          <a:p>
+            <a:r>
+              <a:t>I'll pause here for questions, then we'll continue.</a:t>
             </a:r>
           </a:p>
         </p:txBody>
@@ -2003,7 +2378,31 @@
           <a:lstStyle/>
           <a:p>
             <a:r>
-              <a:t>[ADV] 75 min</a:t>
+              <a:t>In this slide we cover FL in the Cloud Continuum research context (Ch.19 + Ch.11). This material is covered in Ch.19 + Ch.11 Type 4 · SLICES RI FL experiment pattern.</a:t>
+            </a:r>
+          </a:p>
+          <a:p/>
+          <a:p>
+            <a:r>
+              <a:t>First, regarding ch.11 type 4 experiments, AI/ML workflows including federated learning at edge. Next, regarding slices ri multi-site fl, clients on different European sites, server on cloud slice.</a:t>
+            </a:r>
+          </a:p>
+          <a:p/>
+          <a:p>
+            <a:r>
+              <a:t>By contrast, S4T IoTronic inject scales FL client deployment — same pattern as Module D fleet ops. We should also consider that Crossplane Workflow CRD could declare FL experiment: server + N client plugins + datasets.</a:t>
+            </a:r>
+          </a:p>
+          <a:p/>
+          <a:p>
+            <a:r>
+              <a:t>Another key point is that Edge-board FL preserves data sovereignty requirements of SLICES partner institutions. Furthermore, Lab on {{VM_IP}} is minimal horizontal FL — production scales to cross-silo federation.</a:t>
+            </a:r>
+          </a:p>
+          <a:p/>
+          <a:p>
+            <a:r>
+              <a:t>I'll pause here for questions, then we'll continue.</a:t>
             </a:r>
           </a:p>
         </p:txBody>
@@ -2073,7 +2472,31 @@
           <a:lstStyle/>
           <a:p>
             <a:r>
-              <a:t>[ADV] 75 min</a:t>
+              <a:t>In this slide we cover Why Federated Learning? (Ch.19). This material is covered in Ch.19 · FL motivation · regulatory compliance section.</a:t>
+            </a:r>
+          </a:p>
+          <a:p/>
+          <a:p>
+            <a:r>
+              <a:t>First, regarding centralized ml, collect all raw data to cloud — privacy, GDPR, bandwidth, latency risks. Next, regarding fl, train collaboratively — raw data never leaves edge devices or local storage.</a:t>
+            </a:r>
+          </a:p>
+          <a:p/>
+          <a:p>
+            <a:r>
+              <a:t>By contrast, Only model weight updates (gradients/parameters) sent to aggregation server each round. We should also consider that Critical for healthcare, finance, smart cities, IoT fleets with sensitive local data.</a:t>
+            </a:r>
+          </a:p>
+          <a:p/>
+          <a:p>
+            <a:r>
+              <a:t>Another key point is that Regulatory frameworks (GDPR, DPDP, HIPAA) restrict data centralization — FL enables compliance. Furthermore, regarding book motivation section cites real-world cases, hospitals, banks, cross-device IoT.</a:t>
+            </a:r>
+          </a:p>
+          <a:p/>
+          <a:p>
+            <a:r>
+              <a:t>I'll pause here for questions, then we'll continue.</a:t>
             </a:r>
           </a:p>
         </p:txBody>
@@ -2143,7 +2566,7 @@
           <a:lstStyle/>
           <a:p>
             <a:r>
-              <a:t>[ADV] 6 min</a:t>
+              <a:t>We now begin a new section: Validate &amp; wrap-up. Confirm aggregation + Module H exclusion. In the next slides, listen for whether we are in theory mode or hands-on mode, and open your terminal when the slides turn to lab work.</a:t>
             </a:r>
           </a:p>
         </p:txBody>
@@ -2213,7 +2636,125 @@
           <a:lstStyle/>
           <a:p>
             <a:r>
-              <a:t>[ADV] 75 min</a:t>
+              <a:t>Now we move to the hands-on part: Validate FL lab. Open your lab VM and follow along.</a:t>
+            </a:r>
+          </a:p>
+          <a:p/>
+          <a:p>
+            <a:r>
+              <a:t>Please run the following command on your VM: cd training &amp;&amp; ./validate-lab-fl.sh. Wait until you see a sensible result before continuing. Next, regarding watch server log for, round 1 complete · Round 2 complete · final accuracy.</a:t>
+            </a:r>
+          </a:p>
+          <a:p/>
+          <a:p>
+            <a:r>
+              <a:t>By contrast, Interrupt FL plugins on all boards after successful validation.</a:t>
+            </a:r>
+          </a:p>
+          <a:p/>
+          <a:p>
+            <a:r>
+              <a:t>Raise your hand if you're stuck — we'll wait until most of you are done.</a:t>
+            </a:r>
+          </a:p>
+          <a:p/>
+          <a:p>
+            <a:r>
+              <a:t>Instructor timing (title): Step 5 — Validate FL lab</a:t>
+            </a:r>
+          </a:p>
+        </p:txBody>
+      </p:sp>
+      <p:sp>
+        <p:nvSpPr>
+          <p:cNvPr id="4" name="Slide Number Placeholder 3"/>
+          <p:cNvSpPr>
+            <a:spLocks noGrp="1"/>
+          </p:cNvSpPr>
+          <p:nvPr>
+            <p:ph type="sldNum" idx="5" sz="quarter"/>
+          </p:nvPr>
+        </p:nvSpPr>
+        <p:spPr/>
+      </p:sp>
+    </p:spTree>
+  </p:cSld>
+  <p:clrMapOvr>
+    <a:masterClrMapping/>
+  </p:clrMapOvr>
+</p:notes>
+</file>
+
+<file path=ppt/notesSlides/notesSlide32.xml><?xml version="1.0" encoding="utf-8"?>
+<p:notes xmlns:a="http://schemas.openxmlformats.org/drawingml/2006/main" xmlns:p="http://schemas.openxmlformats.org/presentationml/2006/main" xmlns:r="http://schemas.openxmlformats.org/officeDocument/2006/relationships">
+  <p:cSld>
+    <p:spTree>
+      <p:nvGrpSpPr>
+        <p:cNvPr id="1" name=""/>
+        <p:cNvGrpSpPr/>
+        <p:nvPr/>
+      </p:nvGrpSpPr>
+      <p:grpSpPr>
+        <a:xfrm>
+          <a:off x="0" y="0"/>
+          <a:ext cx="0" cy="0"/>
+          <a:chOff x="0" y="0"/>
+          <a:chExt cx="0" cy="0"/>
+        </a:xfrm>
+      </p:grpSpPr>
+      <p:sp>
+        <p:nvSpPr>
+          <p:cNvPr id="2" name="Slide Image Placeholder 1"/>
+          <p:cNvSpPr>
+            <a:spLocks noGrp="1"/>
+          </p:cNvSpPr>
+          <p:nvPr>
+            <p:ph type="sldImg" idx="2"/>
+          </p:nvPr>
+        </p:nvSpPr>
+        <p:spPr/>
+      </p:sp>
+      <p:sp>
+        <p:nvSpPr>
+          <p:cNvPr id="3" name="Notes Placeholder 2"/>
+          <p:cNvSpPr>
+            <a:spLocks noGrp="1"/>
+          </p:cNvSpPr>
+          <p:nvPr>
+            <p:ph type="body" idx="3" sz="quarter"/>
+          </p:nvPr>
+        </p:nvSpPr>
+        <p:spPr/>
+        <p:txBody>
+          <a:bodyPr/>
+          <a:lstStyle/>
+          <a:p>
+            <a:r>
+              <a:t>On this slide, Module G checklist &amp; resource note.</a:t>
+            </a:r>
+          </a:p>
+          <a:p/>
+          <a:p>
+            <a:r>
+              <a:t>First, □ Flower server shows 2 aggregation rounds completing with 3 clients. Next, □ Three board plugins connected and contributed weight updates.</a:t>
+            </a:r>
+          </a:p>
+          <a:p/>
+          <a:p>
+            <a:r>
+              <a:t>By contrast, □ validate-lab-fl.sh passes. We should also consider that □ free -h ≥ 2 GB during FL — do NOT run K3s Blueprint (Module H) concurrently.</a:t>
+            </a:r>
+          </a:p>
+          <a:p/>
+          <a:p>
+            <a:r>
+              <a:t>Another key point is that □ Students articulate horizontal cross-silo FL classification from Ch.19 taxonomy.</a:t>
+            </a:r>
+          </a:p>
+          <a:p/>
+          <a:p>
+            <a:r>
+              <a:t>If these objectives are clear, we can proceed.</a:t>
             </a:r>
           </a:p>
         </p:txBody>
@@ -2283,7 +2824,31 @@
           <a:lstStyle/>
           <a:p>
             <a:r>
-              <a:t>[ADV] 75 min</a:t>
+              <a:t>In this slide we cover Centralized vs federated — operational contrast (Ch.19). This material is covered in Ch.19 · centralized vs federated comparison.</a:t>
+            </a:r>
+          </a:p>
+          <a:p/>
+          <a:p>
+            <a:r>
+              <a:t>First, in the centralized approach, an ETL pipeline uploads datasets, then a single GPU cluster trains monolithic model. Next, in the federated approach, N clients train locally, then the server aggregates, then the global model improves iteratively.</a:t>
+            </a:r>
+          </a:p>
+          <a:p/>
+          <a:p>
+            <a:r>
+              <a:t>By contrast, a major bottleneck of centralized training is the network upload of the full dataset from each edge site. We should also consider that federated learning has bottlenecks: straggler clients, non-IID data distribution, communication rounds.</a:t>
+            </a:r>
+          </a:p>
+          <a:p/>
+          <a:p>
+            <a:r>
+              <a:t>Another key point is that for Stack4Things, the value proposition is that IoTronic deploys FL client plugin to fleet — the operational layer for federated learning. Furthermore, our lab demonstration uses 3 boards, 3 CSV files, 1 Flower server — minimal horizontal FL topology.</a:t>
+            </a:r>
+          </a:p>
+          <a:p/>
+          <a:p>
+            <a:r>
+              <a:t>I'll pause here for questions, then we'll continue.</a:t>
             </a:r>
           </a:p>
         </p:txBody>
@@ -2353,7 +2918,31 @@
           <a:lstStyle/>
           <a:p>
             <a:r>
-              <a:t>[ADV] 75 min</a:t>
+              <a:t>In this slide we cover FL architecture components (Ch.19). This material is covered in Ch.19 · fig:chap19:federated_learning_architecture · listing server.py.</a:t>
+            </a:r>
+          </a:p>
+          <a:p/>
+          <a:p>
+            <a:r>
+              <a:t>First, regarding server (flower in lab), orchestrates rounds, aggregates updates (FedAvg algorithm). Next, regarding clients, local training on board-resident dataset — heart_1/2/3.csv in ch19 demo.</a:t>
+            </a:r>
+          </a:p>
+          <a:p/>
+          <a:p>
+            <a:r>
+              <a:t>By contrast, regarding stack4things, async plugin injected on each board via IoTronic — Worker connects to server. We should also consider that Direct TCP to Flower server on VM host — lightweight for lab; MQTT optional in field.</a:t>
+            </a:r>
+          </a:p>
+          <a:p/>
+          <a:p>
+            <a:r>
+              <a:t>Another key point is that regarding book figure, fig:chap19:federated_learning_architecture — 3 clients + 1 server. Furthermore, Each client runs local epochs before sending weight update — not every mini-batch.</a:t>
+            </a:r>
+          </a:p>
+          <a:p/>
+          <a:p>
+            <a:r>
+              <a:t>I'll pause here for questions, then we'll continue.</a:t>
             </a:r>
           </a:p>
         </p:txBody>
@@ -2423,7 +3012,31 @@
           <a:lstStyle/>
           <a:p>
             <a:r>
-              <a:t>[ADV] 75 min</a:t>
+              <a:t>In this slide we cover FedAvg aggregation algorithm (Ch.19). This material is covered in Ch.19 · FedAvg · Flower framework references.</a:t>
+            </a:r>
+          </a:p>
+          <a:p/>
+          <a:p>
+            <a:r>
+              <a:t>First, regarding federated averaging, server computes weighted average of client model parameters. Next, Weight proportional to local dataset size — larger datasets influence global model more.</a:t>
+            </a:r>
+          </a:p>
+          <a:p/>
+          <a:p>
+            <a:r>
+              <a:t>By contrast, regarding round k, server broadcasts global model, then clients train locally, then clients send updates. We should also consider that Server aggregates, then broadcasts updated global model, then repeat for FL_ROUNDS iterations.</a:t>
+            </a:r>
+          </a:p>
+          <a:p/>
+          <a:p>
+            <a:r>
+              <a:t>Another key point is that Convergence depends on data IID-ness — lab CSVs designed with compatible schema. Furthermore, Flower framework abstracts transport — same FedAvg logic in lab and production.</a:t>
+            </a:r>
+          </a:p>
+          <a:p/>
+          <a:p>
+            <a:r>
+              <a:t>I'll pause here for questions, then we'll continue.</a:t>
             </a:r>
           </a:p>
         </p:txBody>
@@ -2493,7 +3106,31 @@
           <a:lstStyle/>
           <a:p>
             <a:r>
-              <a:t>[ADV] 75 min</a:t>
+              <a:t>In this slide we cover FL taxonomy — four categories (Ch.19). This material is covered in Ch.19 · FL types · horizontal vs vertical.</a:t>
+            </a:r>
+          </a:p>
+          <a:p/>
+          <a:p>
+            <a:r>
+              <a:t>First, regarding horizontal fl, same features, different samples — hospitals, IoT boards (lab demo type). Next, regarding vertical fl, different features, same samples — bank + credit card company collaboration.</a:t>
+            </a:r>
+          </a:p>
+          <a:p/>
+          <a:p>
+            <a:r>
+              <a:t>By contrast, regarding cross-silo, organizations with stable connectivity and rich local datasets. We should also consider that regarding cross-device, many mobile/IoT clients, intermittent connectivity, small local data.</a:t>
+            </a:r>
+          </a:p>
+          <a:p/>
+          <a:p>
+            <a:r>
+              <a:t>Another key point is that our lab demonstration uses horizontal cross-silo — 3 boards, same CSV schema, different row samples. Furthermore, Book taxonomy table helps students classify real-world FL deployment scenarios.</a:t>
+            </a:r>
+          </a:p>
+          <a:p/>
+          <a:p>
+            <a:r>
+              <a:t>I'll pause here for questions, then we'll continue.</a:t>
             </a:r>
           </a:p>
         </p:txBody>
@@ -2563,7 +3200,31 @@
           <a:lstStyle/>
           <a:p>
             <a:r>
-              <a:t>[ADV] 75 min</a:t>
+              <a:t>In this slide we cover Non-IID data challenges (Ch.19). This material is covered in Ch.19 · non-IID discussion · advanced FL algorithms footnote.</a:t>
+            </a:r>
+          </a:p>
+          <a:p/>
+          <a:p>
+            <a:r>
+              <a:t>First, regarding real edge data often non-iid, each board sees different distribution of sensor readings. Next, Non-IID slows convergence — may require more FL_ROUNDS or specialized aggregation.</a:t>
+            </a:r>
+          </a:p>
+          <a:p/>
+          <a:p>
+            <a:r>
+              <a:t>By contrast, Lab heart CSVs are mildly non-IID by design — demonstrates realistic edge heterogeneity. We should also consider that regarding production mitigations, fedProx, SCAFFOLD, personalization layers — beyond lab scope.</a:t>
+            </a:r>
+          </a:p>
+          <a:p/>
+          <a:p>
+            <a:r>
+              <a:t>Another key point is that Students should observe per-round accuracy variance in Flower server log output. Furthermore, Module D fleet heterogeneity (3 boards) mirrors cross-silo non-IID scenario.</a:t>
+            </a:r>
+          </a:p>
+          <a:p/>
+          <a:p>
+            <a:r>
+              <a:t>I'll pause here for questions, then we'll continue.</a:t>
             </a:r>
           </a:p>
         </p:txBody>
@@ -2633,7 +3294,31 @@
           <a:lstStyle/>
           <a:p>
             <a:r>
-              <a:t>[ADV] 75 min</a:t>
+              <a:t>In this slide we cover S4T + FL integration — plugin model (Ch.19). This material is covered in Ch.19 · ch19 repo plugin + server.py listing.</a:t>
+            </a:r>
+          </a:p>
+          <a:p/>
+          <a:p>
+            <a:r>
+              <a:t>First, Async plugin Worker in client.py connects to Flower server as FL client process. Next, regarding local training loop, read CSV, then train epochs, then send weight update via Flower gRPC.</a:t>
+            </a:r>
+          </a:p>
+          <a:p/>
+          <a:p>
+            <a:r>
+              <a:t>By contrast, regarding server-side evaluation, centralized loss/accuracy view printed each aggregation round. We should also consider that regarding plugin lifecycle, create in IoTronic, then inject per board, then Start while server running.</a:t>
+            </a:r>
+          </a:p>
+          <a:p/>
+          <a:p>
+            <a:r>
+              <a:t>Another key point is that regarding different csv per board, heart_1.csv on alpha, heart_2.csv on beta, heart_3.csv on gamma. Furthermore, regarding repo, training/repos/ch19 — server.py + client.py + sample datasets.</a:t>
+            </a:r>
+          </a:p>
+          <a:p/>
+          <a:p>
+            <a:r>
+              <a:t>I'll pause here for questions, then we'll continue.</a:t>
             </a:r>
           </a:p>
         </p:txBody>
@@ -5809,7 +6494,7 @@
           <a:lstStyle/>
           <a:p>
             <a:pPr>
-              <a:defRPr sz="3800" b="1">
+              <a:defRPr sz="4000" b="1">
                 <a:solidFill>
                   <a:srgbClr val="FFFFFF"/>
                 </a:solidFill>
@@ -5848,7 +6533,7 @@
               <a:spcAft>
                 <a:spcPts val="400"/>
               </a:spcAft>
-              <a:defRPr sz="2000" b="0">
+              <a:defRPr sz="2200" b="0">
                 <a:solidFill>
                   <a:srgbClr val="B2EBF2"/>
                 </a:solidFill>
@@ -6085,7 +6770,7 @@
           <a:lstStyle/>
           <a:p>
             <a:pPr algn="r">
-              <a:defRPr sz="1000" b="0">
+              <a:defRPr sz="1100" b="0">
                 <a:solidFill>
                   <a:srgbClr val="78909C"/>
                 </a:solidFill>
@@ -6121,7 +6806,7 @@
           <a:lstStyle/>
           <a:p>
             <a:pPr>
-              <a:defRPr sz="2400" b="1">
+              <a:defRPr sz="2600" b="1">
                 <a:solidFill>
                   <a:srgbClr val="0D2B45"/>
                 </a:solidFill>
@@ -6143,7 +6828,7 @@
         <p:spPr>
           <a:xfrm>
             <a:off x="502920" y="1554480"/>
-            <a:ext cx="11155680" cy="2651759"/>
+            <a:ext cx="11155680" cy="4800600"/>
           </a:xfrm>
           <a:prstGeom prst="roundRect">
             <a:avLst/>
@@ -6188,7 +6873,7 @@
         <p:spPr>
           <a:xfrm>
             <a:off x="777240" y="1673352"/>
-            <a:ext cx="10424160" cy="2468879"/>
+            <a:ext cx="10424160" cy="4572000"/>
           </a:xfrm>
           <a:prstGeom prst="rect">
             <a:avLst/>
@@ -6208,7 +6893,7 @@
               <a:spcAft>
                 <a:spcPts val="500"/>
               </a:spcAft>
-              <a:defRPr sz="1500" b="0">
+              <a:defRPr sz="1600" b="0">
                 <a:solidFill>
                   <a:srgbClr val="37474F"/>
                 </a:solidFill>
@@ -6227,7 +6912,7 @@
               <a:spcAft>
                 <a:spcPts val="500"/>
               </a:spcAft>
-              <a:defRPr sz="1500" b="0">
+              <a:defRPr sz="1600" b="0">
                 <a:solidFill>
                   <a:srgbClr val="37474F"/>
                 </a:solidFill>
@@ -6246,7 +6931,7 @@
               <a:spcAft>
                 <a:spcPts val="500"/>
               </a:spcAft>
-              <a:defRPr sz="1500" b="0">
+              <a:defRPr sz="1600" b="0">
                 <a:solidFill>
                   <a:srgbClr val="37474F"/>
                 </a:solidFill>
@@ -6265,7 +6950,7 @@
               <a:spcAft>
                 <a:spcPts val="500"/>
               </a:spcAft>
-              <a:defRPr sz="1500" b="0">
+              <a:defRPr sz="1600" b="0">
                 <a:solidFill>
                   <a:srgbClr val="37474F"/>
                 </a:solidFill>
@@ -6284,7 +6969,7 @@
               <a:spcAft>
                 <a:spcPts val="500"/>
               </a:spcAft>
-              <a:defRPr sz="1500" b="0">
+              <a:defRPr sz="1600" b="0">
                 <a:solidFill>
                   <a:srgbClr val="37474F"/>
                 </a:solidFill>
@@ -6303,7 +6988,7 @@
               <a:spcAft>
                 <a:spcPts val="500"/>
               </a:spcAft>
-              <a:defRPr sz="1500" b="0">
+              <a:defRPr sz="1600" b="0">
                 <a:solidFill>
                   <a:srgbClr val="37474F"/>
                 </a:solidFill>
@@ -6576,7 +7261,7 @@
           <a:lstStyle/>
           <a:p>
             <a:pPr algn="r">
-              <a:defRPr sz="1000" b="0">
+              <a:defRPr sz="1100" b="0">
                 <a:solidFill>
                   <a:srgbClr val="78909C"/>
                 </a:solidFill>
@@ -6612,7 +7297,7 @@
           <a:lstStyle/>
           <a:p>
             <a:pPr>
-              <a:defRPr sz="2400" b="1">
+              <a:defRPr sz="2600" b="1">
                 <a:solidFill>
                   <a:srgbClr val="0D2B45"/>
                 </a:solidFill>
@@ -6634,7 +7319,7 @@
         <p:spPr>
           <a:xfrm>
             <a:off x="502920" y="1554480"/>
-            <a:ext cx="11155680" cy="2651759"/>
+            <a:ext cx="11155680" cy="4800600"/>
           </a:xfrm>
           <a:prstGeom prst="roundRect">
             <a:avLst/>
@@ -6679,7 +7364,7 @@
         <p:spPr>
           <a:xfrm>
             <a:off x="777240" y="1673352"/>
-            <a:ext cx="10424160" cy="2468879"/>
+            <a:ext cx="10424160" cy="4572000"/>
           </a:xfrm>
           <a:prstGeom prst="rect">
             <a:avLst/>
@@ -6699,7 +7384,7 @@
               <a:spcAft>
                 <a:spcPts val="500"/>
               </a:spcAft>
-              <a:defRPr sz="1500" b="0">
+              <a:defRPr sz="1600" b="0">
                 <a:solidFill>
                   <a:srgbClr val="37474F"/>
                 </a:solidFill>
@@ -6718,7 +7403,7 @@
               <a:spcAft>
                 <a:spcPts val="500"/>
               </a:spcAft>
-              <a:defRPr sz="1500" b="0">
+              <a:defRPr sz="1600" b="0">
                 <a:solidFill>
                   <a:srgbClr val="37474F"/>
                 </a:solidFill>
@@ -6737,7 +7422,7 @@
               <a:spcAft>
                 <a:spcPts val="500"/>
               </a:spcAft>
-              <a:defRPr sz="1500" b="0">
+              <a:defRPr sz="1600" b="0">
                 <a:solidFill>
                   <a:srgbClr val="37474F"/>
                 </a:solidFill>
@@ -6756,7 +7441,7 @@
               <a:spcAft>
                 <a:spcPts val="500"/>
               </a:spcAft>
-              <a:defRPr sz="1500" b="0">
+              <a:defRPr sz="1600" b="0">
                 <a:solidFill>
                   <a:srgbClr val="37474F"/>
                 </a:solidFill>
@@ -6775,7 +7460,7 @@
               <a:spcAft>
                 <a:spcPts val="500"/>
               </a:spcAft>
-              <a:defRPr sz="1500" b="0">
+              <a:defRPr sz="1600" b="0">
                 <a:solidFill>
                   <a:srgbClr val="37474F"/>
                 </a:solidFill>
@@ -6794,7 +7479,7 @@
               <a:spcAft>
                 <a:spcPts val="500"/>
               </a:spcAft>
-              <a:defRPr sz="1500" b="0">
+              <a:defRPr sz="1600" b="0">
                 <a:solidFill>
                   <a:srgbClr val="37474F"/>
                 </a:solidFill>
@@ -7067,7 +7752,7 @@
           <a:lstStyle/>
           <a:p>
             <a:pPr algn="r">
-              <a:defRPr sz="1000" b="0">
+              <a:defRPr sz="1100" b="0">
                 <a:solidFill>
                   <a:srgbClr val="78909C"/>
                 </a:solidFill>
@@ -7103,7 +7788,7 @@
           <a:lstStyle/>
           <a:p>
             <a:pPr>
-              <a:defRPr sz="2400" b="1">
+              <a:defRPr sz="2600" b="1">
                 <a:solidFill>
                   <a:srgbClr val="0D2B45"/>
                 </a:solidFill>
@@ -7125,7 +7810,7 @@
         <p:spPr>
           <a:xfrm>
             <a:off x="502920" y="1554480"/>
-            <a:ext cx="11155680" cy="2651759"/>
+            <a:ext cx="11155680" cy="4800600"/>
           </a:xfrm>
           <a:prstGeom prst="roundRect">
             <a:avLst/>
@@ -7170,7 +7855,7 @@
         <p:spPr>
           <a:xfrm>
             <a:off x="777240" y="1673352"/>
-            <a:ext cx="10424160" cy="2468879"/>
+            <a:ext cx="10424160" cy="4572000"/>
           </a:xfrm>
           <a:prstGeom prst="rect">
             <a:avLst/>
@@ -7190,7 +7875,7 @@
               <a:spcAft>
                 <a:spcPts val="500"/>
               </a:spcAft>
-              <a:defRPr sz="1500" b="0">
+              <a:defRPr sz="1600" b="0">
                 <a:solidFill>
                   <a:srgbClr val="37474F"/>
                 </a:solidFill>
@@ -7209,7 +7894,7 @@
               <a:spcAft>
                 <a:spcPts val="500"/>
               </a:spcAft>
-              <a:defRPr sz="1500" b="0">
+              <a:defRPr sz="1600" b="0">
                 <a:solidFill>
                   <a:srgbClr val="37474F"/>
                 </a:solidFill>
@@ -7228,7 +7913,7 @@
               <a:spcAft>
                 <a:spcPts val="500"/>
               </a:spcAft>
-              <a:defRPr sz="1500" b="0">
+              <a:defRPr sz="1600" b="0">
                 <a:solidFill>
                   <a:srgbClr val="37474F"/>
                 </a:solidFill>
@@ -7247,7 +7932,7 @@
               <a:spcAft>
                 <a:spcPts val="500"/>
               </a:spcAft>
-              <a:defRPr sz="1500" b="0">
+              <a:defRPr sz="1600" b="0">
                 <a:solidFill>
                   <a:srgbClr val="37474F"/>
                 </a:solidFill>
@@ -7266,7 +7951,7 @@
               <a:spcAft>
                 <a:spcPts val="500"/>
               </a:spcAft>
-              <a:defRPr sz="1500" b="0">
+              <a:defRPr sz="1600" b="0">
                 <a:solidFill>
                   <a:srgbClr val="37474F"/>
                 </a:solidFill>
@@ -7285,7 +7970,7 @@
               <a:spcAft>
                 <a:spcPts val="500"/>
               </a:spcAft>
-              <a:defRPr sz="1500" b="0">
+              <a:defRPr sz="1600" b="0">
                 <a:solidFill>
                   <a:srgbClr val="37474F"/>
                 </a:solidFill>
@@ -7490,7 +8175,7 @@
         </p:nvSpPr>
         <p:spPr>
           <a:xfrm>
-            <a:off x="594360" y="438912"/>
+            <a:off x="594360" y="347472"/>
             <a:ext cx="10972800" cy="868680"/>
           </a:xfrm>
           <a:prstGeom prst="rect">
@@ -7526,8 +8211,8 @@
         </p:nvSpPr>
         <p:spPr>
           <a:xfrm>
-            <a:off x="2542260" y="1426464"/>
-            <a:ext cx="7107173" cy="4123944"/>
+            <a:off x="1120368" y="1298448"/>
+            <a:ext cx="9950958" cy="5733288"/>
           </a:xfrm>
           <a:prstGeom prst="roundRect">
             <a:avLst/>
@@ -7579,8 +8264,8 @@
         </p:blipFill>
         <p:spPr>
           <a:xfrm>
-            <a:off x="2615412" y="1499616"/>
-            <a:ext cx="6960869" cy="3977639"/>
+            <a:off x="1175232" y="1353312"/>
+            <a:ext cx="9841230" cy="5623560"/>
           </a:xfrm>
           <a:prstGeom prst="rect">
             <a:avLst/>
@@ -7595,7 +8280,7 @@
         </p:nvSpPr>
         <p:spPr>
           <a:xfrm>
-            <a:off x="594360" y="5687568"/>
+            <a:off x="594360" y="7168896"/>
             <a:ext cx="10972800" cy="411480"/>
           </a:xfrm>
           <a:prstGeom prst="rect">
@@ -7610,7 +8295,7 @@
           <a:lstStyle/>
           <a:p>
             <a:pPr>
-              <a:defRPr sz="1100" b="0">
+              <a:defRPr sz="1200" b="0">
                 <a:solidFill>
                   <a:srgbClr val="37474F"/>
                 </a:solidFill>
@@ -7815,7 +8500,7 @@
         </p:nvSpPr>
         <p:spPr>
           <a:xfrm>
-            <a:off x="594360" y="438912"/>
+            <a:off x="594360" y="347472"/>
             <a:ext cx="10972800" cy="868680"/>
           </a:xfrm>
           <a:prstGeom prst="rect">
@@ -7851,8 +8536,8 @@
         </p:nvSpPr>
         <p:spPr>
           <a:xfrm>
-            <a:off x="2627149" y="1426464"/>
-            <a:ext cx="6937396" cy="4123944"/>
+            <a:off x="1240383" y="1298448"/>
+            <a:ext cx="9710928" cy="5733288"/>
           </a:xfrm>
           <a:prstGeom prst="roundRect">
             <a:avLst/>
@@ -7904,8 +8589,8 @@
         </p:blipFill>
         <p:spPr>
           <a:xfrm>
-            <a:off x="2700301" y="1499616"/>
-            <a:ext cx="6791092" cy="3977639"/>
+            <a:off x="1295247" y="1353312"/>
+            <a:ext cx="9601200" cy="5623560"/>
           </a:xfrm>
           <a:prstGeom prst="rect">
             <a:avLst/>
@@ -7920,7 +8605,7 @@
         </p:nvSpPr>
         <p:spPr>
           <a:xfrm>
-            <a:off x="594360" y="5687568"/>
+            <a:off x="594360" y="7168896"/>
             <a:ext cx="10972800" cy="411480"/>
           </a:xfrm>
           <a:prstGeom prst="rect">
@@ -7935,7 +8620,7 @@
           <a:lstStyle/>
           <a:p>
             <a:pPr>
-              <a:defRPr sz="1100" b="0">
+              <a:defRPr sz="1200" b="0">
                 <a:solidFill>
                   <a:srgbClr val="37474F"/>
                 </a:solidFill>
@@ -8155,7 +8840,7 @@
           <a:lstStyle/>
           <a:p>
             <a:pPr>
-              <a:defRPr sz="2800" b="1">
+              <a:defRPr sz="3000" b="1">
                 <a:solidFill>
                   <a:srgbClr val="0D2B45"/>
                 </a:solidFill>
@@ -8177,7 +8862,7 @@
         <p:spPr>
           <a:xfrm>
             <a:off x="502920" y="1344168"/>
-            <a:ext cx="11155680" cy="2331720"/>
+            <a:ext cx="11155680" cy="5010912"/>
           </a:xfrm>
           <a:prstGeom prst="roundRect">
             <a:avLst/>
@@ -8222,7 +8907,7 @@
         <p:spPr>
           <a:xfrm>
             <a:off x="777240" y="1463040"/>
-            <a:ext cx="10424160" cy="2148840"/>
+            <a:ext cx="10424160" cy="4782312"/>
           </a:xfrm>
           <a:prstGeom prst="rect">
             <a:avLst/>
@@ -8242,7 +8927,7 @@
               <a:spcAft>
                 <a:spcPts val="800"/>
               </a:spcAft>
-              <a:defRPr sz="1700" b="0">
+              <a:defRPr sz="1900" b="0">
                 <a:solidFill>
                   <a:srgbClr val="37474F"/>
                 </a:solidFill>
@@ -8261,7 +8946,7 @@
               <a:spcAft>
                 <a:spcPts val="800"/>
               </a:spcAft>
-              <a:defRPr sz="1700" b="0">
+              <a:defRPr sz="1900" b="0">
                 <a:solidFill>
                   <a:srgbClr val="37474F"/>
                 </a:solidFill>
@@ -8280,7 +8965,7 @@
               <a:spcAft>
                 <a:spcPts val="800"/>
               </a:spcAft>
-              <a:defRPr sz="1700" b="0">
+              <a:defRPr sz="1900" b="0">
                 <a:solidFill>
                   <a:srgbClr val="37474F"/>
                 </a:solidFill>
@@ -8299,26 +8984,7 @@
               <a:spcAft>
                 <a:spcPts val="800"/>
               </a:spcAft>
-              <a:defRPr sz="1700" b="0">
-                <a:solidFill>
-                  <a:srgbClr val="37474F"/>
-                </a:solidFill>
-                <a:latin typeface="Calibri"/>
-              </a:defRPr>
-            </a:pPr>
-            <a:r>
-              <a:t>▸  Observe ≥2 aggregation rounds complete (FL_ROUNDS=2 classroom pacing)</a:t>
-            </a:r>
-          </a:p>
-          <a:p>
-            <a:pPr>
-              <a:lnSpc>
-                <a:spcPct val="115000"/>
-              </a:lnSpc>
-              <a:spcAft>
-                <a:spcPts val="800"/>
-              </a:spcAft>
-              <a:defRPr sz="1700" b="0">
+              <a:defRPr sz="1900" b="0">
                 <a:solidFill>
                   <a:srgbClr val="37474F"/>
                 </a:solidFill>
@@ -8555,7 +9221,7 @@
           <a:lstStyle/>
           <a:p>
             <a:pPr>
-              <a:defRPr sz="2400" b="1">
+              <a:defRPr sz="2600" b="1">
                 <a:solidFill>
                   <a:srgbClr val="0D2B45"/>
                 </a:solidFill>
@@ -8577,7 +9243,7 @@
         <p:spPr>
           <a:xfrm>
             <a:off x="502920" y="1554480"/>
-            <a:ext cx="11155680" cy="2651759"/>
+            <a:ext cx="11155680" cy="4800600"/>
           </a:xfrm>
           <a:prstGeom prst="roundRect">
             <a:avLst/>
@@ -8622,7 +9288,7 @@
         <p:spPr>
           <a:xfrm>
             <a:off x="777240" y="1673352"/>
-            <a:ext cx="10424160" cy="2468879"/>
+            <a:ext cx="10424160" cy="4572000"/>
           </a:xfrm>
           <a:prstGeom prst="rect">
             <a:avLst/>
@@ -8642,7 +9308,7 @@
               <a:spcAft>
                 <a:spcPts val="500"/>
               </a:spcAft>
-              <a:defRPr sz="1500" b="0">
+              <a:defRPr sz="1600" b="0">
                 <a:solidFill>
                   <a:srgbClr val="37474F"/>
                 </a:solidFill>
@@ -8661,7 +9327,7 @@
               <a:spcAft>
                 <a:spcPts val="500"/>
               </a:spcAft>
-              <a:defRPr sz="1500" b="0">
+              <a:defRPr sz="1600" b="0">
                 <a:solidFill>
                   <a:srgbClr val="37474F"/>
                 </a:solidFill>
@@ -8680,7 +9346,7 @@
               <a:spcAft>
                 <a:spcPts val="500"/>
               </a:spcAft>
-              <a:defRPr sz="1500" b="0">
+              <a:defRPr sz="1600" b="0">
                 <a:solidFill>
                   <a:srgbClr val="37474F"/>
                 </a:solidFill>
@@ -8699,7 +9365,7 @@
               <a:spcAft>
                 <a:spcPts val="500"/>
               </a:spcAft>
-              <a:defRPr sz="1500" b="0">
+              <a:defRPr sz="1600" b="0">
                 <a:solidFill>
                   <a:srgbClr val="37474F"/>
                 </a:solidFill>
@@ -8718,7 +9384,7 @@
               <a:spcAft>
                 <a:spcPts val="500"/>
               </a:spcAft>
-              <a:defRPr sz="1500" b="0">
+              <a:defRPr sz="1600" b="0">
                 <a:solidFill>
                   <a:srgbClr val="37474F"/>
                 </a:solidFill>
@@ -8737,7 +9403,7 @@
               <a:spcAft>
                 <a:spcPts val="500"/>
               </a:spcAft>
-              <a:defRPr sz="1500" b="0">
+              <a:defRPr sz="1600" b="0">
                 <a:solidFill>
                   <a:srgbClr val="37474F"/>
                 </a:solidFill>
@@ -8957,7 +9623,7 @@
           <a:lstStyle/>
           <a:p>
             <a:pPr>
-              <a:defRPr sz="2800" b="1">
+              <a:defRPr sz="3000" b="1">
                 <a:solidFill>
                   <a:srgbClr val="0D2B45"/>
                 </a:solidFill>
@@ -8979,7 +9645,7 @@
         <p:spPr>
           <a:xfrm>
             <a:off x="502920" y="1344168"/>
-            <a:ext cx="11155680" cy="2331720"/>
+            <a:ext cx="11155680" cy="5010912"/>
           </a:xfrm>
           <a:prstGeom prst="roundRect">
             <a:avLst/>
@@ -9024,7 +9690,7 @@
         <p:spPr>
           <a:xfrm>
             <a:off x="777240" y="1463040"/>
-            <a:ext cx="10424160" cy="2148840"/>
+            <a:ext cx="10424160" cy="4782312"/>
           </a:xfrm>
           <a:prstGeom prst="rect">
             <a:avLst/>
@@ -9044,7 +9710,7 @@
               <a:spcAft>
                 <a:spcPts val="800"/>
               </a:spcAft>
-              <a:defRPr sz="1700" b="0">
+              <a:defRPr sz="1900" b="0">
                 <a:solidFill>
                   <a:srgbClr val="37474F"/>
                 </a:solidFill>
@@ -9063,7 +9729,7 @@
               <a:spcAft>
                 <a:spcPts val="800"/>
               </a:spcAft>
-              <a:defRPr sz="1700" b="0">
+              <a:defRPr sz="1900" b="0">
                 <a:solidFill>
                   <a:srgbClr val="37474F"/>
                 </a:solidFill>
@@ -9082,7 +9748,7 @@
               <a:spcAft>
                 <a:spcPts val="800"/>
               </a:spcAft>
-              <a:defRPr sz="1700" b="0">
+              <a:defRPr sz="1900" b="0">
                 <a:solidFill>
                   <a:srgbClr val="37474F"/>
                 </a:solidFill>
@@ -9090,7 +9756,7 @@
               </a:defRPr>
             </a:pPr>
             <a:r>
-              <a:t>▸  Classroom pacing: FL_ROUNDS=2 — keeps session within 60 minutes</a:t>
+              <a:t>▸  Do NOT run simultaneously with Module H K3s — RAM gate: free -h ≥ 2 GB during FL</a:t>
             </a:r>
           </a:p>
           <a:p>
@@ -9101,26 +9767,7 @@
               <a:spcAft>
                 <a:spcPts val="800"/>
               </a:spcAft>
-              <a:defRPr sz="1700" b="0">
-                <a:solidFill>
-                  <a:srgbClr val="37474F"/>
-                </a:solidFill>
-                <a:latin typeface="Calibri"/>
-              </a:defRPr>
-            </a:pPr>
-            <a:r>
-              <a:t>▸  Do NOT run simultaneously with Module H K3s — RAM gate: free -h ≥ 2 GB during FL</a:t>
-            </a:r>
-          </a:p>
-          <a:p>
-            <a:pPr>
-              <a:lnSpc>
-                <a:spcPct val="115000"/>
-              </a:lnSpc>
-              <a:spcAft>
-                <a:spcPts val="800"/>
-              </a:spcAft>
-              <a:defRPr sz="1700" b="0">
+              <a:defRPr sz="1900" b="0">
                 <a:solidFill>
                   <a:srgbClr val="37474F"/>
                 </a:solidFill>
@@ -9304,7 +9951,7 @@
           <a:lstStyle/>
           <a:p>
             <a:pPr algn="ctr">
-              <a:defRPr sz="3600" b="1">
+              <a:defRPr sz="3800" b="1">
                 <a:solidFill>
                   <a:srgbClr val="FFFFFF"/>
                 </a:solidFill>
@@ -9340,7 +9987,7 @@
           <a:lstStyle/>
           <a:p>
             <a:pPr algn="ctr">
-              <a:defRPr sz="2000" b="0">
+              <a:defRPr sz="2200" b="0">
                 <a:solidFill>
                   <a:srgbClr val="B2EBF2"/>
                 </a:solidFill>
@@ -9445,7 +10092,7 @@
           <a:lstStyle/>
           <a:p>
             <a:pPr>
-              <a:defRPr sz="2800" b="1">
+              <a:defRPr sz="3000" b="1">
                 <a:solidFill>
                   <a:srgbClr val="0D2B45"/>
                 </a:solidFill>
@@ -9467,7 +10114,7 @@
         <p:spPr>
           <a:xfrm>
             <a:off x="502920" y="1344168"/>
-            <a:ext cx="11155680" cy="1691639"/>
+            <a:ext cx="11155680" cy="5010912"/>
           </a:xfrm>
           <a:prstGeom prst="roundRect">
             <a:avLst/>
@@ -9512,7 +10159,7 @@
         <p:spPr>
           <a:xfrm>
             <a:off x="777240" y="1463040"/>
-            <a:ext cx="10424160" cy="1508759"/>
+            <a:ext cx="10424160" cy="4782312"/>
           </a:xfrm>
           <a:prstGeom prst="rect">
             <a:avLst/>
@@ -9532,7 +10179,7 @@
               <a:spcAft>
                 <a:spcPts val="800"/>
               </a:spcAft>
-              <a:defRPr sz="1300" b="0">
+              <a:defRPr sz="1400" b="0">
                 <a:solidFill>
                   <a:srgbClr val="0D2B45"/>
                 </a:solidFill>
@@ -9551,7 +10198,7 @@
               <a:spcAft>
                 <a:spcPts val="800"/>
               </a:spcAft>
-              <a:defRPr sz="1700" b="0">
+              <a:defRPr sz="1900" b="0">
                 <a:solidFill>
                   <a:srgbClr val="37474F"/>
                 </a:solidFill>
@@ -9570,7 +10217,7 @@
               <a:spcAft>
                 <a:spcPts val="800"/>
               </a:spcAft>
-              <a:defRPr sz="1700" b="0">
+              <a:defRPr sz="1900" b="0">
                 <a:solidFill>
                   <a:srgbClr val="37474F"/>
                 </a:solidFill>
@@ -9754,7 +10401,7 @@
           <a:lstStyle/>
           <a:p>
             <a:pPr algn="ctr">
-              <a:defRPr sz="3600" b="1">
+              <a:defRPr sz="3800" b="1">
                 <a:solidFill>
                   <a:srgbClr val="FFFFFF"/>
                 </a:solidFill>
@@ -9790,7 +10437,7 @@
           <a:lstStyle/>
           <a:p>
             <a:pPr algn="ctr">
-              <a:defRPr sz="2000" b="0">
+              <a:defRPr sz="2200" b="0">
                 <a:solidFill>
                   <a:srgbClr val="B2EBF2"/>
                 </a:solidFill>
@@ -9948,7 +10595,7 @@
           <a:lstStyle/>
           <a:p>
             <a:pPr algn="r">
-              <a:defRPr sz="1000" b="0">
+              <a:defRPr sz="1100" b="0">
                 <a:solidFill>
                   <a:srgbClr val="78909C"/>
                 </a:solidFill>
@@ -9984,7 +10631,7 @@
           <a:lstStyle/>
           <a:p>
             <a:pPr>
-              <a:defRPr sz="2400" b="1">
+              <a:defRPr sz="2600" b="1">
                 <a:solidFill>
                   <a:srgbClr val="0D2B45"/>
                 </a:solidFill>
@@ -10006,7 +10653,7 @@
         <p:spPr>
           <a:xfrm>
             <a:off x="502920" y="1554480"/>
-            <a:ext cx="11155680" cy="2331720"/>
+            <a:ext cx="11155680" cy="4800600"/>
           </a:xfrm>
           <a:prstGeom prst="roundRect">
             <a:avLst/>
@@ -10051,7 +10698,7 @@
         <p:spPr>
           <a:xfrm>
             <a:off x="777240" y="1673352"/>
-            <a:ext cx="10424160" cy="2148840"/>
+            <a:ext cx="10424160" cy="4572000"/>
           </a:xfrm>
           <a:prstGeom prst="rect">
             <a:avLst/>
@@ -10071,7 +10718,7 @@
               <a:spcAft>
                 <a:spcPts val="500"/>
               </a:spcAft>
-              <a:defRPr sz="1500" b="0">
+              <a:defRPr sz="1700" b="0">
                 <a:solidFill>
                   <a:srgbClr val="37474F"/>
                 </a:solidFill>
@@ -10090,7 +10737,7 @@
               <a:spcAft>
                 <a:spcPts val="500"/>
               </a:spcAft>
-              <a:defRPr sz="1500" b="0">
+              <a:defRPr sz="1700" b="0">
                 <a:solidFill>
                   <a:srgbClr val="37474F"/>
                 </a:solidFill>
@@ -10109,7 +10756,7 @@
               <a:spcAft>
                 <a:spcPts val="500"/>
               </a:spcAft>
-              <a:defRPr sz="1500" b="0">
+              <a:defRPr sz="1700" b="0">
                 <a:solidFill>
                   <a:srgbClr val="37474F"/>
                 </a:solidFill>
@@ -10128,7 +10775,7 @@
               <a:spcAft>
                 <a:spcPts val="500"/>
               </a:spcAft>
-              <a:defRPr sz="1500" b="0">
+              <a:defRPr sz="1700" b="0">
                 <a:solidFill>
                   <a:srgbClr val="37474F"/>
                 </a:solidFill>
@@ -10147,7 +10794,7 @@
               <a:spcAft>
                 <a:spcPts val="500"/>
               </a:spcAft>
-              <a:defRPr sz="1500" b="0">
+              <a:defRPr sz="1700" b="0">
                 <a:solidFill>
                   <a:srgbClr val="37474F"/>
                 </a:solidFill>
@@ -10367,7 +11014,7 @@
           <a:lstStyle/>
           <a:p>
             <a:pPr>
-              <a:defRPr sz="2800" b="1">
+              <a:defRPr sz="3000" b="1">
                 <a:solidFill>
                   <a:srgbClr val="0D2B45"/>
                 </a:solidFill>
@@ -10389,7 +11036,7 @@
         <p:spPr>
           <a:xfrm>
             <a:off x="502920" y="1344168"/>
-            <a:ext cx="11155680" cy="2011680"/>
+            <a:ext cx="11155680" cy="5010912"/>
           </a:xfrm>
           <a:prstGeom prst="roundRect">
             <a:avLst/>
@@ -10434,7 +11081,7 @@
         <p:spPr>
           <a:xfrm>
             <a:off x="777240" y="1463040"/>
-            <a:ext cx="10424160" cy="1828800"/>
+            <a:ext cx="10424160" cy="4782312"/>
           </a:xfrm>
           <a:prstGeom prst="rect">
             <a:avLst/>
@@ -10454,7 +11101,7 @@
               <a:spcAft>
                 <a:spcPts val="800"/>
               </a:spcAft>
-              <a:defRPr sz="1300" b="0">
+              <a:defRPr sz="1400" b="0">
                 <a:solidFill>
                   <a:srgbClr val="0D2B45"/>
                 </a:solidFill>
@@ -10473,7 +11120,7 @@
               <a:spcAft>
                 <a:spcPts val="800"/>
               </a:spcAft>
-              <a:defRPr sz="1300" b="0">
+              <a:defRPr sz="1400" b="0">
                 <a:solidFill>
                   <a:srgbClr val="0D2B45"/>
                 </a:solidFill>
@@ -10492,7 +11139,7 @@
               <a:spcAft>
                 <a:spcPts val="800"/>
               </a:spcAft>
-              <a:defRPr sz="1700" b="0">
+              <a:defRPr sz="1900" b="0">
                 <a:solidFill>
                   <a:srgbClr val="37474F"/>
                 </a:solidFill>
@@ -10511,7 +11158,7 @@
               <a:spcAft>
                 <a:spcPts val="800"/>
               </a:spcAft>
-              <a:defRPr sz="1700" b="0">
+              <a:defRPr sz="1900" b="0">
                 <a:solidFill>
                   <a:srgbClr val="37474F"/>
                 </a:solidFill>
@@ -10695,7 +11342,7 @@
           <a:lstStyle/>
           <a:p>
             <a:pPr algn="ctr">
-              <a:defRPr sz="3600" b="1">
+              <a:defRPr sz="3800" b="1">
                 <a:solidFill>
                   <a:srgbClr val="FFFFFF"/>
                 </a:solidFill>
@@ -10731,7 +11378,7 @@
           <a:lstStyle/>
           <a:p>
             <a:pPr algn="ctr">
-              <a:defRPr sz="2000" b="0">
+              <a:defRPr sz="2200" b="0">
                 <a:solidFill>
                   <a:srgbClr val="B2EBF2"/>
                 </a:solidFill>
@@ -10836,7 +11483,7 @@
           <a:lstStyle/>
           <a:p>
             <a:pPr>
-              <a:defRPr sz="2800" b="1">
+              <a:defRPr sz="3000" b="1">
                 <a:solidFill>
                   <a:srgbClr val="0D2B45"/>
                 </a:solidFill>
@@ -10858,7 +11505,7 @@
         <p:spPr>
           <a:xfrm>
             <a:off x="502920" y="1344168"/>
-            <a:ext cx="11155680" cy="2011680"/>
+            <a:ext cx="11155680" cy="5010912"/>
           </a:xfrm>
           <a:prstGeom prst="roundRect">
             <a:avLst/>
@@ -10903,7 +11550,7 @@
         <p:spPr>
           <a:xfrm>
             <a:off x="777240" y="1463040"/>
-            <a:ext cx="10424160" cy="1828800"/>
+            <a:ext cx="10424160" cy="4782312"/>
           </a:xfrm>
           <a:prstGeom prst="rect">
             <a:avLst/>
@@ -10923,7 +11570,7 @@
               <a:spcAft>
                 <a:spcPts val="800"/>
               </a:spcAft>
-              <a:defRPr sz="1700" b="0">
+              <a:defRPr sz="1900" b="0">
                 <a:solidFill>
                   <a:srgbClr val="37474F"/>
                 </a:solidFill>
@@ -10942,7 +11589,7 @@
               <a:spcAft>
                 <a:spcPts val="800"/>
               </a:spcAft>
-              <a:defRPr sz="1700" b="0">
+              <a:defRPr sz="1900" b="0">
                 <a:solidFill>
                   <a:srgbClr val="37474F"/>
                 </a:solidFill>
@@ -10961,7 +11608,7 @@
               <a:spcAft>
                 <a:spcPts val="800"/>
               </a:spcAft>
-              <a:defRPr sz="1700" b="0">
+              <a:defRPr sz="1900" b="0">
                 <a:solidFill>
                   <a:srgbClr val="37474F"/>
                 </a:solidFill>
@@ -10980,7 +11627,7 @@
               <a:spcAft>
                 <a:spcPts val="800"/>
               </a:spcAft>
-              <a:defRPr sz="1700" b="0">
+              <a:defRPr sz="1900" b="0">
                 <a:solidFill>
                   <a:srgbClr val="37474F"/>
                 </a:solidFill>
@@ -11149,7 +11796,7 @@
         </p:nvSpPr>
         <p:spPr>
           <a:xfrm>
-            <a:off x="594360" y="438912"/>
+            <a:off x="594360" y="347472"/>
             <a:ext cx="10972800" cy="868680"/>
           </a:xfrm>
           <a:prstGeom prst="rect">
@@ -11185,8 +11832,8 @@
         </p:nvSpPr>
         <p:spPr>
           <a:xfrm>
-            <a:off x="2928975" y="1426464"/>
-            <a:ext cx="6333744" cy="4123944"/>
+            <a:off x="1667103" y="1298448"/>
+            <a:ext cx="8857488" cy="5733288"/>
           </a:xfrm>
           <a:prstGeom prst="roundRect">
             <a:avLst/>
@@ -11238,8 +11885,8 @@
         </p:blipFill>
         <p:spPr>
           <a:xfrm>
-            <a:off x="3002127" y="1499616"/>
-            <a:ext cx="6187440" cy="3977639"/>
+            <a:off x="1721967" y="1353312"/>
+            <a:ext cx="8747760" cy="5623560"/>
           </a:xfrm>
           <a:prstGeom prst="rect">
             <a:avLst/>
@@ -11254,7 +11901,7 @@
         </p:nvSpPr>
         <p:spPr>
           <a:xfrm>
-            <a:off x="594360" y="5687568"/>
+            <a:off x="594360" y="7168896"/>
             <a:ext cx="10972800" cy="411480"/>
           </a:xfrm>
           <a:prstGeom prst="rect">
@@ -11269,7 +11916,7 @@
           <a:lstStyle/>
           <a:p>
             <a:pPr>
-              <a:defRPr sz="1100" b="0">
+              <a:defRPr sz="1200" b="0">
                 <a:solidFill>
                   <a:srgbClr val="37474F"/>
                 </a:solidFill>
@@ -11474,7 +12121,7 @@
         </p:nvSpPr>
         <p:spPr>
           <a:xfrm>
-            <a:off x="594360" y="438912"/>
+            <a:off x="594360" y="347472"/>
             <a:ext cx="10972800" cy="868680"/>
           </a:xfrm>
           <a:prstGeom prst="rect">
@@ -11510,8 +12157,8 @@
         </p:nvSpPr>
         <p:spPr>
           <a:xfrm>
-            <a:off x="2542260" y="1426464"/>
-            <a:ext cx="7107173" cy="4123944"/>
+            <a:off x="1120368" y="1298448"/>
+            <a:ext cx="9950958" cy="5733288"/>
           </a:xfrm>
           <a:prstGeom prst="roundRect">
             <a:avLst/>
@@ -11563,8 +12210,8 @@
         </p:blipFill>
         <p:spPr>
           <a:xfrm>
-            <a:off x="2615412" y="1499616"/>
-            <a:ext cx="6960869" cy="3977639"/>
+            <a:off x="1175232" y="1353312"/>
+            <a:ext cx="9841230" cy="5623560"/>
           </a:xfrm>
           <a:prstGeom prst="rect">
             <a:avLst/>
@@ -11579,7 +12226,7 @@
         </p:nvSpPr>
         <p:spPr>
           <a:xfrm>
-            <a:off x="594360" y="5687568"/>
+            <a:off x="594360" y="7168896"/>
             <a:ext cx="10972800" cy="411480"/>
           </a:xfrm>
           <a:prstGeom prst="rect">
@@ -11594,7 +12241,7 @@
           <a:lstStyle/>
           <a:p>
             <a:pPr>
-              <a:defRPr sz="1100" b="0">
+              <a:defRPr sz="1200" b="0">
                 <a:solidFill>
                   <a:srgbClr val="37474F"/>
                 </a:solidFill>
@@ -11814,7 +12461,7 @@
           <a:lstStyle/>
           <a:p>
             <a:pPr>
-              <a:defRPr sz="2800" b="1">
+              <a:defRPr sz="3000" b="1">
                 <a:solidFill>
                   <a:srgbClr val="0D2B45"/>
                 </a:solidFill>
@@ -11836,7 +12483,7 @@
         <p:spPr>
           <a:xfrm>
             <a:off x="502920" y="1344168"/>
-            <a:ext cx="11155680" cy="2011680"/>
+            <a:ext cx="11155680" cy="5010912"/>
           </a:xfrm>
           <a:prstGeom prst="roundRect">
             <a:avLst/>
@@ -11881,7 +12528,7 @@
         <p:spPr>
           <a:xfrm>
             <a:off x="777240" y="1463040"/>
-            <a:ext cx="10424160" cy="1828800"/>
+            <a:ext cx="10424160" cy="4782312"/>
           </a:xfrm>
           <a:prstGeom prst="rect">
             <a:avLst/>
@@ -11901,7 +12548,7 @@
               <a:spcAft>
                 <a:spcPts val="800"/>
               </a:spcAft>
-              <a:defRPr sz="1700" b="0">
+              <a:defRPr sz="1900" b="0">
                 <a:solidFill>
                   <a:srgbClr val="37474F"/>
                 </a:solidFill>
@@ -11920,7 +12567,7 @@
               <a:spcAft>
                 <a:spcPts val="800"/>
               </a:spcAft>
-              <a:defRPr sz="1700" b="0">
+              <a:defRPr sz="1900" b="0">
                 <a:solidFill>
                   <a:srgbClr val="37474F"/>
                 </a:solidFill>
@@ -11939,7 +12586,7 @@
               <a:spcAft>
                 <a:spcPts val="800"/>
               </a:spcAft>
-              <a:defRPr sz="1700" b="0">
+              <a:defRPr sz="1900" b="0">
                 <a:solidFill>
                   <a:srgbClr val="37474F"/>
                 </a:solidFill>
@@ -11958,7 +12605,7 @@
               <a:spcAft>
                 <a:spcPts val="800"/>
               </a:spcAft>
-              <a:defRPr sz="1700" b="0">
+              <a:defRPr sz="1900" b="0">
                 <a:solidFill>
                   <a:srgbClr val="37474F"/>
                 </a:solidFill>
@@ -12195,7 +12842,7 @@
           <a:lstStyle/>
           <a:p>
             <a:pPr algn="r">
-              <a:defRPr sz="1000" b="0">
+              <a:defRPr sz="1100" b="0">
                 <a:solidFill>
                   <a:srgbClr val="78909C"/>
                 </a:solidFill>
@@ -12231,7 +12878,7 @@
           <a:lstStyle/>
           <a:p>
             <a:pPr>
-              <a:defRPr sz="2400" b="1">
+              <a:defRPr sz="2600" b="1">
                 <a:solidFill>
                   <a:srgbClr val="0D2B45"/>
                 </a:solidFill>
@@ -12253,7 +12900,7 @@
         <p:spPr>
           <a:xfrm>
             <a:off x="502920" y="1554480"/>
-            <a:ext cx="11155680" cy="2651759"/>
+            <a:ext cx="11155680" cy="4800600"/>
           </a:xfrm>
           <a:prstGeom prst="roundRect">
             <a:avLst/>
@@ -12298,7 +12945,7 @@
         <p:spPr>
           <a:xfrm>
             <a:off x="777240" y="1673352"/>
-            <a:ext cx="10424160" cy="2468879"/>
+            <a:ext cx="10424160" cy="4572000"/>
           </a:xfrm>
           <a:prstGeom prst="rect">
             <a:avLst/>
@@ -12318,7 +12965,7 @@
               <a:spcAft>
                 <a:spcPts val="500"/>
               </a:spcAft>
-              <a:defRPr sz="1500" b="0">
+              <a:defRPr sz="1600" b="0">
                 <a:solidFill>
                   <a:srgbClr val="37474F"/>
                 </a:solidFill>
@@ -12337,7 +12984,7 @@
               <a:spcAft>
                 <a:spcPts val="500"/>
               </a:spcAft>
-              <a:defRPr sz="1500" b="0">
+              <a:defRPr sz="1600" b="0">
                 <a:solidFill>
                   <a:srgbClr val="37474F"/>
                 </a:solidFill>
@@ -12356,7 +13003,7 @@
               <a:spcAft>
                 <a:spcPts val="500"/>
               </a:spcAft>
-              <a:defRPr sz="1500" b="0">
+              <a:defRPr sz="1600" b="0">
                 <a:solidFill>
                   <a:srgbClr val="37474F"/>
                 </a:solidFill>
@@ -12375,7 +13022,7 @@
               <a:spcAft>
                 <a:spcPts val="500"/>
               </a:spcAft>
-              <a:defRPr sz="1500" b="0">
+              <a:defRPr sz="1600" b="0">
                 <a:solidFill>
                   <a:srgbClr val="37474F"/>
                 </a:solidFill>
@@ -12394,7 +13041,7 @@
               <a:spcAft>
                 <a:spcPts val="500"/>
               </a:spcAft>
-              <a:defRPr sz="1500" b="0">
+              <a:defRPr sz="1600" b="0">
                 <a:solidFill>
                   <a:srgbClr val="37474F"/>
                 </a:solidFill>
@@ -12413,7 +13060,7 @@
               <a:spcAft>
                 <a:spcPts val="500"/>
               </a:spcAft>
-              <a:defRPr sz="1500" b="0">
+              <a:defRPr sz="1600" b="0">
                 <a:solidFill>
                   <a:srgbClr val="37474F"/>
                 </a:solidFill>
@@ -12686,7 +13333,7 @@
           <a:lstStyle/>
           <a:p>
             <a:pPr algn="r">
-              <a:defRPr sz="1000" b="0">
+              <a:defRPr sz="1100" b="0">
                 <a:solidFill>
                   <a:srgbClr val="78909C"/>
                 </a:solidFill>
@@ -12722,7 +13369,7 @@
           <a:lstStyle/>
           <a:p>
             <a:pPr>
-              <a:defRPr sz="2400" b="1">
+              <a:defRPr sz="2600" b="1">
                 <a:solidFill>
                   <a:srgbClr val="0D2B45"/>
                 </a:solidFill>
@@ -12744,7 +13391,7 @@
         <p:spPr>
           <a:xfrm>
             <a:off x="502920" y="1554480"/>
-            <a:ext cx="11155680" cy="2651759"/>
+            <a:ext cx="11155680" cy="4800600"/>
           </a:xfrm>
           <a:prstGeom prst="roundRect">
             <a:avLst/>
@@ -12789,7 +13436,7 @@
         <p:spPr>
           <a:xfrm>
             <a:off x="777240" y="1673352"/>
-            <a:ext cx="10424160" cy="2468879"/>
+            <a:ext cx="10424160" cy="4572000"/>
           </a:xfrm>
           <a:prstGeom prst="rect">
             <a:avLst/>
@@ -12809,7 +13456,7 @@
               <a:spcAft>
                 <a:spcPts val="500"/>
               </a:spcAft>
-              <a:defRPr sz="1500" b="0">
+              <a:defRPr sz="1600" b="0">
                 <a:solidFill>
                   <a:srgbClr val="37474F"/>
                 </a:solidFill>
@@ -12828,7 +13475,7 @@
               <a:spcAft>
                 <a:spcPts val="500"/>
               </a:spcAft>
-              <a:defRPr sz="1500" b="0">
+              <a:defRPr sz="1600" b="0">
                 <a:solidFill>
                   <a:srgbClr val="37474F"/>
                 </a:solidFill>
@@ -12847,7 +13494,7 @@
               <a:spcAft>
                 <a:spcPts val="500"/>
               </a:spcAft>
-              <a:defRPr sz="1500" b="0">
+              <a:defRPr sz="1600" b="0">
                 <a:solidFill>
                   <a:srgbClr val="37474F"/>
                 </a:solidFill>
@@ -12866,7 +13513,7 @@
               <a:spcAft>
                 <a:spcPts val="500"/>
               </a:spcAft>
-              <a:defRPr sz="1500" b="0">
+              <a:defRPr sz="1600" b="0">
                 <a:solidFill>
                   <a:srgbClr val="37474F"/>
                 </a:solidFill>
@@ -12885,7 +13532,7 @@
               <a:spcAft>
                 <a:spcPts val="500"/>
               </a:spcAft>
-              <a:defRPr sz="1500" b="0">
+              <a:defRPr sz="1600" b="0">
                 <a:solidFill>
                   <a:srgbClr val="37474F"/>
                 </a:solidFill>
@@ -12904,7 +13551,7 @@
               <a:spcAft>
                 <a:spcPts val="500"/>
               </a:spcAft>
-              <a:defRPr sz="1500" b="0">
+              <a:defRPr sz="1600" b="0">
                 <a:solidFill>
                   <a:srgbClr val="37474F"/>
                 </a:solidFill>
@@ -13177,7 +13824,7 @@
           <a:lstStyle/>
           <a:p>
             <a:pPr algn="r">
-              <a:defRPr sz="1000" b="0">
+              <a:defRPr sz="1100" b="0">
                 <a:solidFill>
                   <a:srgbClr val="78909C"/>
                 </a:solidFill>
@@ -13213,7 +13860,7 @@
           <a:lstStyle/>
           <a:p>
             <a:pPr>
-              <a:defRPr sz="2400" b="1">
+              <a:defRPr sz="2600" b="1">
                 <a:solidFill>
                   <a:srgbClr val="0D2B45"/>
                 </a:solidFill>
@@ -13235,7 +13882,7 @@
         <p:spPr>
           <a:xfrm>
             <a:off x="502920" y="1554480"/>
-            <a:ext cx="11155680" cy="2651759"/>
+            <a:ext cx="11155680" cy="4800600"/>
           </a:xfrm>
           <a:prstGeom prst="roundRect">
             <a:avLst/>
@@ -13280,7 +13927,7 @@
         <p:spPr>
           <a:xfrm>
             <a:off x="777240" y="1673352"/>
-            <a:ext cx="10424160" cy="2468879"/>
+            <a:ext cx="10424160" cy="4572000"/>
           </a:xfrm>
           <a:prstGeom prst="rect">
             <a:avLst/>
@@ -13300,7 +13947,7 @@
               <a:spcAft>
                 <a:spcPts val="500"/>
               </a:spcAft>
-              <a:defRPr sz="1500" b="0">
+              <a:defRPr sz="1600" b="0">
                 <a:solidFill>
                   <a:srgbClr val="37474F"/>
                 </a:solidFill>
@@ -13319,7 +13966,7 @@
               <a:spcAft>
                 <a:spcPts val="500"/>
               </a:spcAft>
-              <a:defRPr sz="1500" b="0">
+              <a:defRPr sz="1600" b="0">
                 <a:solidFill>
                   <a:srgbClr val="37474F"/>
                 </a:solidFill>
@@ -13338,7 +13985,7 @@
               <a:spcAft>
                 <a:spcPts val="500"/>
               </a:spcAft>
-              <a:defRPr sz="1500" b="0">
+              <a:defRPr sz="1600" b="0">
                 <a:solidFill>
                   <a:srgbClr val="37474F"/>
                 </a:solidFill>
@@ -13357,7 +14004,7 @@
               <a:spcAft>
                 <a:spcPts val="500"/>
               </a:spcAft>
-              <a:defRPr sz="1500" b="0">
+              <a:defRPr sz="1600" b="0">
                 <a:solidFill>
                   <a:srgbClr val="37474F"/>
                 </a:solidFill>
@@ -13376,7 +14023,7 @@
               <a:spcAft>
                 <a:spcPts val="500"/>
               </a:spcAft>
-              <a:defRPr sz="1500" b="0">
+              <a:defRPr sz="1600" b="0">
                 <a:solidFill>
                   <a:srgbClr val="37474F"/>
                 </a:solidFill>
@@ -13395,7 +14042,7 @@
               <a:spcAft>
                 <a:spcPts val="500"/>
               </a:spcAft>
-              <a:defRPr sz="1500" b="0">
+              <a:defRPr sz="1600" b="0">
                 <a:solidFill>
                   <a:srgbClr val="37474F"/>
                 </a:solidFill>
@@ -13668,7 +14315,7 @@
           <a:lstStyle/>
           <a:p>
             <a:pPr algn="r">
-              <a:defRPr sz="1000" b="0">
+              <a:defRPr sz="1100" b="0">
                 <a:solidFill>
                   <a:srgbClr val="78909C"/>
                 </a:solidFill>
@@ -13704,7 +14351,7 @@
           <a:lstStyle/>
           <a:p>
             <a:pPr>
-              <a:defRPr sz="2400" b="1">
+              <a:defRPr sz="2600" b="1">
                 <a:solidFill>
                   <a:srgbClr val="0D2B45"/>
                 </a:solidFill>
@@ -13726,7 +14373,7 @@
         <p:spPr>
           <a:xfrm>
             <a:off x="502920" y="1554480"/>
-            <a:ext cx="11155680" cy="2651759"/>
+            <a:ext cx="11155680" cy="4800600"/>
           </a:xfrm>
           <a:prstGeom prst="roundRect">
             <a:avLst/>
@@ -13771,7 +14418,7 @@
         <p:spPr>
           <a:xfrm>
             <a:off x="777240" y="1673352"/>
-            <a:ext cx="10424160" cy="2468879"/>
+            <a:ext cx="10424160" cy="4572000"/>
           </a:xfrm>
           <a:prstGeom prst="rect">
             <a:avLst/>
@@ -13791,7 +14438,7 @@
               <a:spcAft>
                 <a:spcPts val="500"/>
               </a:spcAft>
-              <a:defRPr sz="1500" b="0">
+              <a:defRPr sz="1600" b="0">
                 <a:solidFill>
                   <a:srgbClr val="37474F"/>
                 </a:solidFill>
@@ -13810,7 +14457,7 @@
               <a:spcAft>
                 <a:spcPts val="500"/>
               </a:spcAft>
-              <a:defRPr sz="1500" b="0">
+              <a:defRPr sz="1600" b="0">
                 <a:solidFill>
                   <a:srgbClr val="37474F"/>
                 </a:solidFill>
@@ -13829,7 +14476,7 @@
               <a:spcAft>
                 <a:spcPts val="500"/>
               </a:spcAft>
-              <a:defRPr sz="1500" b="0">
+              <a:defRPr sz="1600" b="0">
                 <a:solidFill>
                   <a:srgbClr val="37474F"/>
                 </a:solidFill>
@@ -13848,7 +14495,7 @@
               <a:spcAft>
                 <a:spcPts val="500"/>
               </a:spcAft>
-              <a:defRPr sz="1500" b="0">
+              <a:defRPr sz="1600" b="0">
                 <a:solidFill>
                   <a:srgbClr val="37474F"/>
                 </a:solidFill>
@@ -13867,7 +14514,7 @@
               <a:spcAft>
                 <a:spcPts val="500"/>
               </a:spcAft>
-              <a:defRPr sz="1500" b="0">
+              <a:defRPr sz="1600" b="0">
                 <a:solidFill>
                   <a:srgbClr val="37474F"/>
                 </a:solidFill>
@@ -13886,7 +14533,7 @@
               <a:spcAft>
                 <a:spcPts val="500"/>
               </a:spcAft>
-              <a:defRPr sz="1500" b="0">
+              <a:defRPr sz="1600" b="0">
                 <a:solidFill>
                   <a:srgbClr val="37474F"/>
                 </a:solidFill>
@@ -14106,7 +14753,7 @@
           <a:lstStyle/>
           <a:p>
             <a:pPr algn="ctr">
-              <a:defRPr sz="3600" b="1">
+              <a:defRPr sz="3800" b="1">
                 <a:solidFill>
                   <a:srgbClr val="FFFFFF"/>
                 </a:solidFill>
@@ -14142,7 +14789,7 @@
           <a:lstStyle/>
           <a:p>
             <a:pPr algn="ctr">
-              <a:defRPr sz="2000" b="0">
+              <a:defRPr sz="2200" b="0">
                 <a:solidFill>
                   <a:srgbClr val="B2EBF2"/>
                 </a:solidFill>
@@ -14247,7 +14894,7 @@
           <a:lstStyle/>
           <a:p>
             <a:pPr>
-              <a:defRPr sz="2800" b="1">
+              <a:defRPr sz="3000" b="1">
                 <a:solidFill>
                   <a:srgbClr val="0D2B45"/>
                 </a:solidFill>
@@ -14269,7 +14916,7 @@
         <p:spPr>
           <a:xfrm>
             <a:off x="502920" y="1344168"/>
-            <a:ext cx="11155680" cy="1691639"/>
+            <a:ext cx="11155680" cy="5010912"/>
           </a:xfrm>
           <a:prstGeom prst="roundRect">
             <a:avLst/>
@@ -14314,7 +14961,7 @@
         <p:spPr>
           <a:xfrm>
             <a:off x="777240" y="1463040"/>
-            <a:ext cx="10424160" cy="1508759"/>
+            <a:ext cx="10424160" cy="4782312"/>
           </a:xfrm>
           <a:prstGeom prst="rect">
             <a:avLst/>
@@ -14334,7 +14981,7 @@
               <a:spcAft>
                 <a:spcPts val="800"/>
               </a:spcAft>
-              <a:defRPr sz="1300" b="0">
+              <a:defRPr sz="1400" b="0">
                 <a:solidFill>
                   <a:srgbClr val="0D2B45"/>
                 </a:solidFill>
@@ -14353,7 +15000,7 @@
               <a:spcAft>
                 <a:spcPts val="800"/>
               </a:spcAft>
-              <a:defRPr sz="1700" b="0">
+              <a:defRPr sz="1900" b="0">
                 <a:solidFill>
                   <a:srgbClr val="37474F"/>
                 </a:solidFill>
@@ -14372,7 +15019,7 @@
               <a:spcAft>
                 <a:spcPts val="800"/>
               </a:spcAft>
-              <a:defRPr sz="1700" b="0">
+              <a:defRPr sz="1900" b="0">
                 <a:solidFill>
                   <a:srgbClr val="37474F"/>
                 </a:solidFill>
@@ -14556,7 +15203,7 @@
           <a:lstStyle/>
           <a:p>
             <a:pPr>
-              <a:defRPr sz="2800" b="1">
+              <a:defRPr sz="3000" b="1">
                 <a:solidFill>
                   <a:srgbClr val="0D2B45"/>
                 </a:solidFill>
@@ -14578,7 +15225,7 @@
         <p:spPr>
           <a:xfrm>
             <a:off x="502920" y="1344168"/>
-            <a:ext cx="11155680" cy="2331720"/>
+            <a:ext cx="11155680" cy="5010912"/>
           </a:xfrm>
           <a:prstGeom prst="roundRect">
             <a:avLst/>
@@ -14623,7 +15270,7 @@
         <p:spPr>
           <a:xfrm>
             <a:off x="777240" y="1463040"/>
-            <a:ext cx="10424160" cy="2148840"/>
+            <a:ext cx="10424160" cy="4782312"/>
           </a:xfrm>
           <a:prstGeom prst="rect">
             <a:avLst/>
@@ -14643,7 +15290,7 @@
               <a:spcAft>
                 <a:spcPts val="800"/>
               </a:spcAft>
-              <a:defRPr sz="1700" b="0">
+              <a:defRPr sz="1900" b="0">
                 <a:solidFill>
                   <a:srgbClr val="37474F"/>
                 </a:solidFill>
@@ -14662,7 +15309,7 @@
               <a:spcAft>
                 <a:spcPts val="800"/>
               </a:spcAft>
-              <a:defRPr sz="1700" b="0">
+              <a:defRPr sz="1900" b="0">
                 <a:solidFill>
                   <a:srgbClr val="37474F"/>
                 </a:solidFill>
@@ -14681,7 +15328,7 @@
               <a:spcAft>
                 <a:spcPts val="800"/>
               </a:spcAft>
-              <a:defRPr sz="1700" b="0">
+              <a:defRPr sz="1900" b="0">
                 <a:solidFill>
                   <a:srgbClr val="37474F"/>
                 </a:solidFill>
@@ -14700,7 +15347,7 @@
               <a:spcAft>
                 <a:spcPts val="800"/>
               </a:spcAft>
-              <a:defRPr sz="1700" b="0">
+              <a:defRPr sz="1900" b="0">
                 <a:solidFill>
                   <a:srgbClr val="37474F"/>
                 </a:solidFill>
@@ -14719,7 +15366,7 @@
               <a:spcAft>
                 <a:spcPts val="800"/>
               </a:spcAft>
-              <a:defRPr sz="1700" b="0">
+              <a:defRPr sz="1900" b="0">
                 <a:solidFill>
                   <a:srgbClr val="37474F"/>
                 </a:solidFill>
@@ -14956,7 +15603,7 @@
           <a:lstStyle/>
           <a:p>
             <a:pPr algn="r">
-              <a:defRPr sz="1000" b="0">
+              <a:defRPr sz="1100" b="0">
                 <a:solidFill>
                   <a:srgbClr val="78909C"/>
                 </a:solidFill>
@@ -14992,7 +15639,7 @@
           <a:lstStyle/>
           <a:p>
             <a:pPr>
-              <a:defRPr sz="2400" b="1">
+              <a:defRPr sz="2600" b="1">
                 <a:solidFill>
                   <a:srgbClr val="0D2B45"/>
                 </a:solidFill>
@@ -15014,7 +15661,7 @@
         <p:spPr>
           <a:xfrm>
             <a:off x="502920" y="1554480"/>
-            <a:ext cx="11155680" cy="2651759"/>
+            <a:ext cx="11155680" cy="4800600"/>
           </a:xfrm>
           <a:prstGeom prst="roundRect">
             <a:avLst/>
@@ -15059,7 +15706,7 @@
         <p:spPr>
           <a:xfrm>
             <a:off x="777240" y="1673352"/>
-            <a:ext cx="10424160" cy="2468879"/>
+            <a:ext cx="10424160" cy="4572000"/>
           </a:xfrm>
           <a:prstGeom prst="rect">
             <a:avLst/>
@@ -15079,7 +15726,7 @@
               <a:spcAft>
                 <a:spcPts val="500"/>
               </a:spcAft>
-              <a:defRPr sz="1500" b="0">
+              <a:defRPr sz="1600" b="0">
                 <a:solidFill>
                   <a:srgbClr val="37474F"/>
                 </a:solidFill>
@@ -15098,7 +15745,7 @@
               <a:spcAft>
                 <a:spcPts val="500"/>
               </a:spcAft>
-              <a:defRPr sz="1500" b="0">
+              <a:defRPr sz="1600" b="0">
                 <a:solidFill>
                   <a:srgbClr val="37474F"/>
                 </a:solidFill>
@@ -15117,7 +15764,7 @@
               <a:spcAft>
                 <a:spcPts val="500"/>
               </a:spcAft>
-              <a:defRPr sz="1500" b="0">
+              <a:defRPr sz="1600" b="0">
                 <a:solidFill>
                   <a:srgbClr val="37474F"/>
                 </a:solidFill>
@@ -15136,7 +15783,7 @@
               <a:spcAft>
                 <a:spcPts val="500"/>
               </a:spcAft>
-              <a:defRPr sz="1500" b="0">
+              <a:defRPr sz="1600" b="0">
                 <a:solidFill>
                   <a:srgbClr val="37474F"/>
                 </a:solidFill>
@@ -15155,7 +15802,7 @@
               <a:spcAft>
                 <a:spcPts val="500"/>
               </a:spcAft>
-              <a:defRPr sz="1500" b="0">
+              <a:defRPr sz="1600" b="0">
                 <a:solidFill>
                   <a:srgbClr val="37474F"/>
                 </a:solidFill>
@@ -15174,7 +15821,7 @@
               <a:spcAft>
                 <a:spcPts val="500"/>
               </a:spcAft>
-              <a:defRPr sz="1500" b="0">
+              <a:defRPr sz="1600" b="0">
                 <a:solidFill>
                   <a:srgbClr val="37474F"/>
                 </a:solidFill>
@@ -15447,7 +16094,7 @@
           <a:lstStyle/>
           <a:p>
             <a:pPr algn="r">
-              <a:defRPr sz="1000" b="0">
+              <a:defRPr sz="1100" b="0">
                 <a:solidFill>
                   <a:srgbClr val="78909C"/>
                 </a:solidFill>
@@ -15483,7 +16130,7 @@
           <a:lstStyle/>
           <a:p>
             <a:pPr>
-              <a:defRPr sz="2400" b="1">
+              <a:defRPr sz="2600" b="1">
                 <a:solidFill>
                   <a:srgbClr val="0D2B45"/>
                 </a:solidFill>
@@ -15505,7 +16152,7 @@
         <p:spPr>
           <a:xfrm>
             <a:off x="502920" y="1554480"/>
-            <a:ext cx="11155680" cy="2651759"/>
+            <a:ext cx="11155680" cy="4800600"/>
           </a:xfrm>
           <a:prstGeom prst="roundRect">
             <a:avLst/>
@@ -15550,7 +16197,7 @@
         <p:spPr>
           <a:xfrm>
             <a:off x="777240" y="1673352"/>
-            <a:ext cx="10424160" cy="2468879"/>
+            <a:ext cx="10424160" cy="4572000"/>
           </a:xfrm>
           <a:prstGeom prst="rect">
             <a:avLst/>
@@ -15570,7 +16217,7 @@
               <a:spcAft>
                 <a:spcPts val="500"/>
               </a:spcAft>
-              <a:defRPr sz="1500" b="0">
+              <a:defRPr sz="1600" b="0">
                 <a:solidFill>
                   <a:srgbClr val="37474F"/>
                 </a:solidFill>
@@ -15589,7 +16236,7 @@
               <a:spcAft>
                 <a:spcPts val="500"/>
               </a:spcAft>
-              <a:defRPr sz="1500" b="0">
+              <a:defRPr sz="1600" b="0">
                 <a:solidFill>
                   <a:srgbClr val="37474F"/>
                 </a:solidFill>
@@ -15608,7 +16255,7 @@
               <a:spcAft>
                 <a:spcPts val="500"/>
               </a:spcAft>
-              <a:defRPr sz="1500" b="0">
+              <a:defRPr sz="1600" b="0">
                 <a:solidFill>
                   <a:srgbClr val="37474F"/>
                 </a:solidFill>
@@ -15627,7 +16274,7 @@
               <a:spcAft>
                 <a:spcPts val="500"/>
               </a:spcAft>
-              <a:defRPr sz="1500" b="0">
+              <a:defRPr sz="1600" b="0">
                 <a:solidFill>
                   <a:srgbClr val="37474F"/>
                 </a:solidFill>
@@ -15646,7 +16293,7 @@
               <a:spcAft>
                 <a:spcPts val="500"/>
               </a:spcAft>
-              <a:defRPr sz="1500" b="0">
+              <a:defRPr sz="1600" b="0">
                 <a:solidFill>
                   <a:srgbClr val="37474F"/>
                 </a:solidFill>
@@ -15665,7 +16312,7 @@
               <a:spcAft>
                 <a:spcPts val="500"/>
               </a:spcAft>
-              <a:defRPr sz="1500" b="0">
+              <a:defRPr sz="1600" b="0">
                 <a:solidFill>
                   <a:srgbClr val="37474F"/>
                 </a:solidFill>
@@ -15938,7 +16585,7 @@
           <a:lstStyle/>
           <a:p>
             <a:pPr algn="r">
-              <a:defRPr sz="1000" b="0">
+              <a:defRPr sz="1100" b="0">
                 <a:solidFill>
                   <a:srgbClr val="78909C"/>
                 </a:solidFill>
@@ -15974,7 +16621,7 @@
           <a:lstStyle/>
           <a:p>
             <a:pPr>
-              <a:defRPr sz="2400" b="1">
+              <a:defRPr sz="2600" b="1">
                 <a:solidFill>
                   <a:srgbClr val="0D2B45"/>
                 </a:solidFill>
@@ -15996,7 +16643,7 @@
         <p:spPr>
           <a:xfrm>
             <a:off x="502920" y="1554480"/>
-            <a:ext cx="11155680" cy="2651759"/>
+            <a:ext cx="11155680" cy="4800600"/>
           </a:xfrm>
           <a:prstGeom prst="roundRect">
             <a:avLst/>
@@ -16041,7 +16688,7 @@
         <p:spPr>
           <a:xfrm>
             <a:off x="777240" y="1673352"/>
-            <a:ext cx="10424160" cy="2468879"/>
+            <a:ext cx="10424160" cy="4572000"/>
           </a:xfrm>
           <a:prstGeom prst="rect">
             <a:avLst/>
@@ -16061,7 +16708,7 @@
               <a:spcAft>
                 <a:spcPts val="500"/>
               </a:spcAft>
-              <a:defRPr sz="1500" b="0">
+              <a:defRPr sz="1600" b="0">
                 <a:solidFill>
                   <a:srgbClr val="37474F"/>
                 </a:solidFill>
@@ -16080,7 +16727,7 @@
               <a:spcAft>
                 <a:spcPts val="500"/>
               </a:spcAft>
-              <a:defRPr sz="1500" b="0">
+              <a:defRPr sz="1600" b="0">
                 <a:solidFill>
                   <a:srgbClr val="37474F"/>
                 </a:solidFill>
@@ -16099,7 +16746,7 @@
               <a:spcAft>
                 <a:spcPts val="500"/>
               </a:spcAft>
-              <a:defRPr sz="1500" b="0">
+              <a:defRPr sz="1600" b="0">
                 <a:solidFill>
                   <a:srgbClr val="37474F"/>
                 </a:solidFill>
@@ -16118,7 +16765,7 @@
               <a:spcAft>
                 <a:spcPts val="500"/>
               </a:spcAft>
-              <a:defRPr sz="1500" b="0">
+              <a:defRPr sz="1600" b="0">
                 <a:solidFill>
                   <a:srgbClr val="37474F"/>
                 </a:solidFill>
@@ -16137,7 +16784,7 @@
               <a:spcAft>
                 <a:spcPts val="500"/>
               </a:spcAft>
-              <a:defRPr sz="1500" b="0">
+              <a:defRPr sz="1600" b="0">
                 <a:solidFill>
                   <a:srgbClr val="37474F"/>
                 </a:solidFill>
@@ -16156,7 +16803,7 @@
               <a:spcAft>
                 <a:spcPts val="500"/>
               </a:spcAft>
-              <a:defRPr sz="1500" b="0">
+              <a:defRPr sz="1600" b="0">
                 <a:solidFill>
                   <a:srgbClr val="37474F"/>
                 </a:solidFill>
@@ -16429,7 +17076,7 @@
           <a:lstStyle/>
           <a:p>
             <a:pPr algn="r">
-              <a:defRPr sz="1000" b="0">
+              <a:defRPr sz="1100" b="0">
                 <a:solidFill>
                   <a:srgbClr val="78909C"/>
                 </a:solidFill>
@@ -16465,7 +17112,7 @@
           <a:lstStyle/>
           <a:p>
             <a:pPr>
-              <a:defRPr sz="2400" b="1">
+              <a:defRPr sz="2600" b="1">
                 <a:solidFill>
                   <a:srgbClr val="0D2B45"/>
                 </a:solidFill>
@@ -16487,7 +17134,7 @@
         <p:spPr>
           <a:xfrm>
             <a:off x="502920" y="1554480"/>
-            <a:ext cx="11155680" cy="2651759"/>
+            <a:ext cx="11155680" cy="4800600"/>
           </a:xfrm>
           <a:prstGeom prst="roundRect">
             <a:avLst/>
@@ -16532,7 +17179,7 @@
         <p:spPr>
           <a:xfrm>
             <a:off x="777240" y="1673352"/>
-            <a:ext cx="10424160" cy="2468879"/>
+            <a:ext cx="10424160" cy="4572000"/>
           </a:xfrm>
           <a:prstGeom prst="rect">
             <a:avLst/>
@@ -16552,7 +17199,7 @@
               <a:spcAft>
                 <a:spcPts val="500"/>
               </a:spcAft>
-              <a:defRPr sz="1500" b="0">
+              <a:defRPr sz="1600" b="0">
                 <a:solidFill>
                   <a:srgbClr val="37474F"/>
                 </a:solidFill>
@@ -16571,7 +17218,7 @@
               <a:spcAft>
                 <a:spcPts val="500"/>
               </a:spcAft>
-              <a:defRPr sz="1500" b="0">
+              <a:defRPr sz="1600" b="0">
                 <a:solidFill>
                   <a:srgbClr val="37474F"/>
                 </a:solidFill>
@@ -16590,7 +17237,7 @@
               <a:spcAft>
                 <a:spcPts val="500"/>
               </a:spcAft>
-              <a:defRPr sz="1500" b="0">
+              <a:defRPr sz="1600" b="0">
                 <a:solidFill>
                   <a:srgbClr val="37474F"/>
                 </a:solidFill>
@@ -16609,7 +17256,7 @@
               <a:spcAft>
                 <a:spcPts val="500"/>
               </a:spcAft>
-              <a:defRPr sz="1500" b="0">
+              <a:defRPr sz="1600" b="0">
                 <a:solidFill>
                   <a:srgbClr val="37474F"/>
                 </a:solidFill>
@@ -16628,7 +17275,7 @@
               <a:spcAft>
                 <a:spcPts val="500"/>
               </a:spcAft>
-              <a:defRPr sz="1500" b="0">
+              <a:defRPr sz="1600" b="0">
                 <a:solidFill>
                   <a:srgbClr val="37474F"/>
                 </a:solidFill>
@@ -16647,7 +17294,7 @@
               <a:spcAft>
                 <a:spcPts val="500"/>
               </a:spcAft>
-              <a:defRPr sz="1500" b="0">
+              <a:defRPr sz="1600" b="0">
                 <a:solidFill>
                   <a:srgbClr val="37474F"/>
                 </a:solidFill>
@@ -16920,7 +17567,7 @@
           <a:lstStyle/>
           <a:p>
             <a:pPr algn="r">
-              <a:defRPr sz="1000" b="0">
+              <a:defRPr sz="1100" b="0">
                 <a:solidFill>
                   <a:srgbClr val="78909C"/>
                 </a:solidFill>
@@ -16956,7 +17603,7 @@
           <a:lstStyle/>
           <a:p>
             <a:pPr>
-              <a:defRPr sz="2400" b="1">
+              <a:defRPr sz="2600" b="1">
                 <a:solidFill>
                   <a:srgbClr val="0D2B45"/>
                 </a:solidFill>
@@ -16978,7 +17625,7 @@
         <p:spPr>
           <a:xfrm>
             <a:off x="502920" y="1554480"/>
-            <a:ext cx="11155680" cy="2651759"/>
+            <a:ext cx="11155680" cy="4800600"/>
           </a:xfrm>
           <a:prstGeom prst="roundRect">
             <a:avLst/>
@@ -17023,7 +17670,7 @@
         <p:spPr>
           <a:xfrm>
             <a:off x="777240" y="1673352"/>
-            <a:ext cx="10424160" cy="2468879"/>
+            <a:ext cx="10424160" cy="4572000"/>
           </a:xfrm>
           <a:prstGeom prst="rect">
             <a:avLst/>
@@ -17043,7 +17690,7 @@
               <a:spcAft>
                 <a:spcPts val="500"/>
               </a:spcAft>
-              <a:defRPr sz="1500" b="0">
+              <a:defRPr sz="1600" b="0">
                 <a:solidFill>
                   <a:srgbClr val="37474F"/>
                 </a:solidFill>
@@ -17062,7 +17709,7 @@
               <a:spcAft>
                 <a:spcPts val="500"/>
               </a:spcAft>
-              <a:defRPr sz="1500" b="0">
+              <a:defRPr sz="1600" b="0">
                 <a:solidFill>
                   <a:srgbClr val="37474F"/>
                 </a:solidFill>
@@ -17081,7 +17728,7 @@
               <a:spcAft>
                 <a:spcPts val="500"/>
               </a:spcAft>
-              <a:defRPr sz="1500" b="0">
+              <a:defRPr sz="1600" b="0">
                 <a:solidFill>
                   <a:srgbClr val="37474F"/>
                 </a:solidFill>
@@ -17100,7 +17747,7 @@
               <a:spcAft>
                 <a:spcPts val="500"/>
               </a:spcAft>
-              <a:defRPr sz="1500" b="0">
+              <a:defRPr sz="1600" b="0">
                 <a:solidFill>
                   <a:srgbClr val="37474F"/>
                 </a:solidFill>
@@ -17119,7 +17766,7 @@
               <a:spcAft>
                 <a:spcPts val="500"/>
               </a:spcAft>
-              <a:defRPr sz="1500" b="0">
+              <a:defRPr sz="1600" b="0">
                 <a:solidFill>
                   <a:srgbClr val="37474F"/>
                 </a:solidFill>
@@ -17138,7 +17785,7 @@
               <a:spcAft>
                 <a:spcPts val="500"/>
               </a:spcAft>
-              <a:defRPr sz="1500" b="0">
+              <a:defRPr sz="1600" b="0">
                 <a:solidFill>
                   <a:srgbClr val="37474F"/>
                 </a:solidFill>
@@ -17411,7 +18058,7 @@
           <a:lstStyle/>
           <a:p>
             <a:pPr algn="r">
-              <a:defRPr sz="1000" b="0">
+              <a:defRPr sz="1100" b="0">
                 <a:solidFill>
                   <a:srgbClr val="78909C"/>
                 </a:solidFill>
@@ -17447,7 +18094,7 @@
           <a:lstStyle/>
           <a:p>
             <a:pPr>
-              <a:defRPr sz="2400" b="1">
+              <a:defRPr sz="2600" b="1">
                 <a:solidFill>
                   <a:srgbClr val="0D2B45"/>
                 </a:solidFill>
@@ -17469,7 +18116,7 @@
         <p:spPr>
           <a:xfrm>
             <a:off x="502920" y="1554480"/>
-            <a:ext cx="11155680" cy="2651759"/>
+            <a:ext cx="11155680" cy="4800600"/>
           </a:xfrm>
           <a:prstGeom prst="roundRect">
             <a:avLst/>
@@ -17514,7 +18161,7 @@
         <p:spPr>
           <a:xfrm>
             <a:off x="777240" y="1673352"/>
-            <a:ext cx="10424160" cy="2468879"/>
+            <a:ext cx="10424160" cy="4572000"/>
           </a:xfrm>
           <a:prstGeom prst="rect">
             <a:avLst/>
@@ -17534,7 +18181,7 @@
               <a:spcAft>
                 <a:spcPts val="500"/>
               </a:spcAft>
-              <a:defRPr sz="1500" b="0">
+              <a:defRPr sz="1600" b="0">
                 <a:solidFill>
                   <a:srgbClr val="37474F"/>
                 </a:solidFill>
@@ -17553,7 +18200,7 @@
               <a:spcAft>
                 <a:spcPts val="500"/>
               </a:spcAft>
-              <a:defRPr sz="1500" b="0">
+              <a:defRPr sz="1600" b="0">
                 <a:solidFill>
                   <a:srgbClr val="37474F"/>
                 </a:solidFill>
@@ -17572,7 +18219,7 @@
               <a:spcAft>
                 <a:spcPts val="500"/>
               </a:spcAft>
-              <a:defRPr sz="1500" b="0">
+              <a:defRPr sz="1600" b="0">
                 <a:solidFill>
                   <a:srgbClr val="37474F"/>
                 </a:solidFill>
@@ -17591,7 +18238,7 @@
               <a:spcAft>
                 <a:spcPts val="500"/>
               </a:spcAft>
-              <a:defRPr sz="1500" b="0">
+              <a:defRPr sz="1600" b="0">
                 <a:solidFill>
                   <a:srgbClr val="37474F"/>
                 </a:solidFill>
@@ -17610,7 +18257,7 @@
               <a:spcAft>
                 <a:spcPts val="500"/>
               </a:spcAft>
-              <a:defRPr sz="1500" b="0">
+              <a:defRPr sz="1600" b="0">
                 <a:solidFill>
                   <a:srgbClr val="37474F"/>
                 </a:solidFill>
@@ -17629,7 +18276,7 @@
               <a:spcAft>
                 <a:spcPts val="500"/>
               </a:spcAft>
-              <a:defRPr sz="1500" b="0">
+              <a:defRPr sz="1600" b="0">
                 <a:solidFill>
                   <a:srgbClr val="37474F"/>
                 </a:solidFill>

--- a/slides/ModuleG_FederatedLearning_EN.pptx
+++ b/slides/ModuleG_FederatedLearning_EN.pptx
@@ -37,6 +37,9 @@
     <p:sldId id="285" r:id="rId37"/>
     <p:sldId id="286" r:id="rId38"/>
     <p:sldId id="287" r:id="rId39"/>
+    <p:sldId id="288" r:id="rId40"/>
+    <p:sldId id="289" r:id="rId41"/>
+    <p:sldId id="290" r:id="rId42"/>
   </p:sldIdLst>
   <p:sldSz cx="12191695" cy="6858000" type="screen4x3"/>
   <p:notesSz cx="6858000" cy="9144000"/>
@@ -1055,13 +1058,13 @@
           <a:p/>
           <a:p>
             <a:r>
-              <a:t>First, Explain FL motivation, FedAvg, and horizontal cross-silo taxonomy (Ch.19). Next, Deploy Flower aggregation server on VM host.</a:t>
+              <a:t>First, Explain FL motivation, FedAvg, and horizontal cross-silo taxonomy (Ch.19). Next, Deploy Flower server; federated failure-prediction model across 3 edge production lines.</a:t>
             </a:r>
           </a:p>
           <a:p/>
           <a:p>
             <a:r>
-              <a:t>By contrast, Inject FL async client plugin on 3 Active boards with distinct CSV datasets. We should also consider that Pass validate-lab-fl.sh — bridge Ch.19 AI methodology with Ch.13–14 S4T stack.</a:t>
+              <a:t>By contrast, Inject FL async client on 3 Active boards with distinct machine_*.csv datasets. We should also consider that Pass validate-lab-fl.sh — bridge Ch.19 AI methodology with Ch.13–14 S4T stack.</a:t>
             </a:r>
           </a:p>
           <a:p/>
@@ -1254,13 +1257,19 @@
           <a:p/>
           <a:p>
             <a:r>
-              <a:t>First, Module D complete — 3 Active boards on {{VM_IP}}:1474/:1475/:1476. Next, regarding repo, training/repos/ch19 (server.py, client.py, heart_*.csv).</a:t>
+              <a:t>First, Module D complete — 3 Active boards on {{VM_IP}}:1474/:1475/:1476. Next, regarding repo, ch19/server.py + fl_client_plugin.py + machine_*.csv (predictive maintenance lab).</a:t>
             </a:r>
           </a:p>
           <a:p/>
           <a:p>
             <a:r>
-              <a:t>By contrast, Do NOT run simultaneously with Module H K3s — RAM gate: free -h ≥ 2 GB during FL. We should also consider that Horizon admin / s4t · LR dashboards me / arancino on all three instances.</a:t>
+              <a:t>By contrast, Run install-fl-on-boards.sh once — deps + machine_*.csv into LR containers. We should also consider that Do NOT run simultaneously with Module H K3s — RAM gate: free -h ≥ 2 GB during FL.</a:t>
+            </a:r>
+          </a:p>
+          <a:p/>
+          <a:p>
+            <a:r>
+              <a:t>Another key point is that Horizon admin / s4t · LR dashboards me / arancino on all three instances.</a:t>
             </a:r>
           </a:p>
           <a:p/>
@@ -1423,19 +1432,19 @@
           <a:lstStyle/>
           <a:p>
             <a:r>
-              <a:t>Now we move to the hands-on part: Install Flower and ML dependencies. Open your lab VM and follow along.</a:t>
+              <a:t>Now we move to the hands-on part: Install FL deps on VM and boards. Open your lab VM and follow along.</a:t>
             </a:r>
           </a:p>
           <a:p/>
           <a:p>
             <a:r>
-              <a:t>Please run the following command on your VM: pip install flwr torch pandas scikit-learn. Wait until you see a sensible result before continuing. Next, regarding # or use helper, training/experiments/federated-learning/start-server.sh.</a:t>
+              <a:t>Please run the following command on your VM: cd training &amp;&amp; pip install flwr torch pandas scikit-learn # or use .venv. Wait until you see a sensible result before continuing. Please run the following command on your VM: ./experiments/federated-learning/install-fl-on-boards.sh. Wait until you see a sensible result before continuing.</a:t>
             </a:r>
           </a:p>
           <a:p/>
           <a:p>
             <a:r>
-              <a:t>By contrast, regarding verify, python3 -c "import flwr; print(flwr.__version__)".</a:t>
+              <a:t>By contrast, Copies machine_1/2/3.csv + fl_client_plugin.py into each LR container (/opt/fl/).</a:t>
             </a:r>
           </a:p>
           <a:p/>
@@ -1447,7 +1456,7 @@
           <a:p/>
           <a:p>
             <a:r>
-              <a:t>Instructor timing (title): Step 1 — Install Flower and ML dependencies</a:t>
+              <a:t>Instructor timing (title): Step 1 — Install FL deps on VM and boards</a:t>
             </a:r>
           </a:p>
         </p:txBody>
@@ -1587,19 +1596,19 @@
           <a:lstStyle/>
           <a:p>
             <a:r>
-              <a:t>In this slide we cover Flower server configuration (Ch.19). This material is covered in Ch.19 · server.py listing · Flower ServerConfig.</a:t>
+              <a:t>In this slide we cover Flower server configuration (Ch.19). This material is covered in Ch.19 · server.py on cloud VM · FL_PORT=8087 · Horizon panel + fl-control :8091.</a:t>
             </a:r>
           </a:p>
           <a:p/>
           <a:p>
             <a:r>
-              <a:t>First, regarding server.py in ch19 repo, configures FedAvg strategy and number of rounds. Next, FL_ROUNDS env var controls aggregation iterations — set to 2 for classroom demo.</a:t>
+              <a:t>First, regarding server.py on vm host, fedAvg strategy — same role as book listing (Cap. 19). Next, FL_ROUNDS env var controls aggregation iterations — set to 2 for classroom demo.</a:t>
             </a:r>
           </a:p>
           <a:p/>
           <a:p>
             <a:r>
-              <a:t>By contrast, Server binds all interfaces on port 8080 — must be reachable from LR Docker containers. We should also consider that LR containers reach VM host via docker bridge gateway IP or host network mode.</a:t>
+              <a:t>By contrast, regarding server binds 0.0.0.0, 8087 (default) — avoids WSTUN conflict on :8080. We should also consider that LR containers reach VM host via Docker bridge gateway (e.g. 172.18.0.1:8087).</a:t>
             </a:r>
           </a:p>
           <a:p/>
@@ -1692,19 +1701,19 @@
           <a:lstStyle/>
           <a:p>
             <a:r>
-              <a:t>Now we move to the hands-on part: Start Flower aggregation server. Open your lab VM and follow along.</a:t>
+              <a:t>Now we move to the hands-on part: Enable FL panel and start Flower server. Open your lab VM and follow along.</a:t>
             </a:r>
           </a:p>
           <a:p/>
           <a:p>
             <a:r>
-              <a:t>Please run the following command on your VM: cd training/repos/ch19. Wait until you see a sensible result before continuing. Please run the following command on your VM: FL_ROUNDS=2 python3 server.py. Wait until you see a sensible result before continuing.</a:t>
+              <a:t>Please run the following command on your VM: cd training &amp;&amp; ./experiments/federated-learning/setup-fl-horizon.sh # once. Wait until you see a sensible result before continuing. Next, Horizon, then IoT, then Federated Learning, then Lab parameters, then Save.</a:t>
             </a:r>
           </a:p>
           <a:p/>
           <a:p>
             <a:r>
-              <a:t>By contrast, Keep terminal open — server must run while client plugins connect. We should also consider that regarding expected, waiting for clients message, then round 1/2 aggregation output.</a:t>
+              <a:t>By contrast, Click Start Flower server (or Restart after param changes) — live topology iframe. We should also consider that regarding optional demo-ready, ./experiments/federated-learning/setup-fl-demo-plugins.sh.</a:t>
             </a:r>
           </a:p>
           <a:p/>
@@ -1716,7 +1725,7 @@
           <a:p/>
           <a:p>
             <a:r>
-              <a:t>Instructor timing (title): Step 2 — Start Flower aggregation server</a:t>
+              <a:t>Instructor timing (title): Step 2 — Enable FL panel and start Flower server</a:t>
             </a:r>
           </a:p>
         </p:txBody>
@@ -1786,7 +1795,7 @@
           <a:lstStyle/>
           <a:p>
             <a:r>
-              <a:t>We now begin a new section: Lab: deploy FL client plugins. One async plugin per board. In the next slides, listen for whether we are in theory mode or hands-on mode, and open your terminal when the slides turn to lab work.</a:t>
+              <a:t>We now begin a new section: Lab: deploy FL client plugins. Single shared fl-client plugin. In the next slides, listen for whether we are in theory mode or hands-on mode, and open your terminal when the slides turn to lab work.</a:t>
             </a:r>
           </a:p>
           <a:p/>
@@ -1868,13 +1877,13 @@
           <a:p/>
           <a:p>
             <a:r>
-              <a:t>First, Horizon, then Plugins, then Create async plugin from ch19 client.py template. Next, Create three plugin instances OR one plugin injected on three boards.</a:t>
+              <a:t>First, Horizon, then Federated Learning, then Create / update FL client plugin (name: fl-client). Next, regarding one shared async plugin — per-board json, csv_file + board_name only.</a:t>
             </a:r>
           </a:p>
           <a:p/>
           <a:p>
             <a:r>
-              <a:t>By contrast, regarding configure dataset path, heart_1.csv on alpha, heart_2.csv on beta, heart_3.csv on gamma. We should also consider that regarding server address in plugin params, {{VM_IP}}:8080 (Flower server on VM host).</a:t>
+              <a:t>By contrast, regarding inject fl-client, board-alpha (machine_1/CNC), board-beta (machine_2/conveyor), board-gamma (machine_3/pump). We should also consider that Lab parameters supply server_address and dashboard_url — Apply to all boards.</a:t>
             </a:r>
           </a:p>
           <a:p/>
@@ -1956,7 +1965,7 @@
           <a:lstStyle/>
           <a:p>
             <a:r>
-              <a:t>Please look at the screenshot on screen: Horizon IoT — Plugins dashboard (FL client deploy). Walk the class through what they see in the interface. Connect each panel and button to a component we already deployed in the stack. In particular, note the following: Three async plugins — Callable=OFF → use Start action · login admin / s4t. Take a few seconds to orient before we continue.</a:t>
+              <a:t>Please look at the screenshot on screen: Horizon — Federated Learning panel (Module G). Walk the class through what they see in the interface. Connect each panel and button to a component we already deployed in the stack. In particular, note the following: Predictive maintenance lab · machine_1/2/3.csv per board · admin / s4t. Take a few seconds to orient before we continue.</a:t>
             </a:r>
           </a:p>
         </p:txBody>
@@ -2026,7 +2035,7 @@
           <a:lstStyle/>
           <a:p>
             <a:r>
-              <a:t>Please look at the diagram on screen: Multi-board topology for FL clients. Describe the main boxes and arrows. Relate each element to a Docker service or API you have already seen. In particular, note the following: 3 LR clients :1474/:1475/:1476 → single Flower server {{VM_IP}}:8080. Take a few seconds to orient before we continue.</a:t>
+              <a:t>Please look at the screenshot on screen: Lab parameters — rounds, server and dashboard URLs. Walk the class through what they see in the interface. Connect each panel and button to a component we already deployed in the stack. In particular, note the following: FL rounds + Docker gateway for Flower :8087 and dashboard :8090. Take a few seconds to orient before we continue.</a:t>
             </a:r>
           </a:p>
         </p:txBody>
@@ -2096,31 +2105,7 @@
           <a:lstStyle/>
           <a:p>
             <a:r>
-              <a:t>Now we move to the hands-on part: Start FL clients on all three boards. Open your lab VM and follow along.</a:t>
-            </a:r>
-          </a:p>
-          <a:p/>
-          <a:p>
-            <a:r>
-              <a:t>First, regarding while flower server is running, plugins, then FL client, then Start on board-alpha. Next, Start on board-beta · Start on board-gamma.</a:t>
-            </a:r>
-          </a:p>
-          <a:p/>
-          <a:p>
-            <a:r>
-              <a:t>By contrast, regarding watch server terminal, clients connect, then round 1 begins, then aggregation, then round 2. We should also consider that regarding each lr log, docker logs lightning-rod-2 — local training progress messages.</a:t>
-            </a:r>
-          </a:p>
-          <a:p/>
-          <a:p>
-            <a:r>
-              <a:t>Raise your hand if you're stuck — we'll wait until most of you are done.</a:t>
-            </a:r>
-          </a:p>
-          <a:p/>
-          <a:p>
-            <a:r>
-              <a:t>Instructor timing (title): Step 4 — Start FL clients on all three boards</a:t>
+              <a:t>Please look at the screenshot on screen: Edge FL clients — failure prediction per production line. Walk the class through what they see in the interface. Connect each panel and button to a component we already deployed in the stack. In particular, note the following: board-alpha CNC · board-beta conveyor · board-gamma pump · machine_*.csv JSON. Take a few seconds to orient before we continue.</a:t>
             </a:r>
           </a:p>
         </p:txBody>
@@ -2190,31 +2175,7 @@
           <a:lstStyle/>
           <a:p>
             <a:r>
-              <a:t>In this slide we cover Client plugin execution flow (Ch.19). This material is covered in Ch.19 · client.py Worker class · async plugin pattern.</a:t>
-            </a:r>
-          </a:p>
-          <a:p/>
-          <a:p>
-            <a:r>
-              <a:t>First, Start action launches async Worker — connects to Flower server via gRPC/TCP. Next, Worker loads local CSV — initializes model with global weights from server.</a:t>
-            </a:r>
-          </a:p>
-          <a:p/>
-          <a:p>
-            <a:r>
-              <a:t>By contrast, regarding local training, N local epochs on board CPU — sends weight delta to server. We should also consider that Server aggregates all 3 client updates — broadcasts new global weights.</a:t>
-            </a:r>
-          </a:p>
-          <a:p/>
-          <a:p>
-            <a:r>
-              <a:t>Another key point is that regarding round 2, clients receive updated global model — repeat local training. Furthermore, regarding stop, interrupt plugin on each board after rounds complete — clean shutdown.</a:t>
-            </a:r>
-          </a:p>
-          <a:p/>
-          <a:p>
-            <a:r>
-              <a:t>I'll pause here for questions, then we'll continue.</a:t>
+              <a:t>Please look at the diagram on screen: Multi-board topology for FL clients. Describe the main boxes and arrows. Relate each element to a Docker service or API you have already seen. In particular, note the following: 3 LR clients :1474/:1475/:1476 → Flower server on VM host :8087 (not on a board). Take a few seconds to orient before we continue.</a:t>
             </a:r>
           </a:p>
         </p:txBody>
@@ -2284,31 +2245,7 @@
           <a:lstStyle/>
           <a:p>
             <a:r>
-              <a:t>In this slide we cover Troubleshooting FL connectivity (Ch.19 lab). This material is covered in training/experiments/federated-learning/ · validate-lab-fl.sh.</a:t>
-            </a:r>
-          </a:p>
-          <a:p/>
-          <a:p>
-            <a:r>
-              <a:t>First, regarding clients cannot connect, verify Flower server IP reachable from LR container network. Next, regarding use docker bridge gateway ip if {{vm_ip}}, 8080 not reachable from inside containers.</a:t>
-            </a:r>
-          </a:p>
-          <a:p/>
-          <a:p>
-            <a:r>
-              <a:t>By contrast, regarding server stuck waiting, ensure all 3 Start actions fired — minimum client count not met. We should also consider that regarding oom on board, reduce local epochs in client.py params — edge boards have limited RAM.</a:t>
-            </a:r>
-          </a:p>
-          <a:p/>
-          <a:p>
-            <a:r>
-              <a:t>Another key point is that regarding plugin error on start, check client.py syntax and flwr/torch installed in LR image. Furthermore, Validate-lab-fl.sh automates connectivity and round-completion checks.</a:t>
-            </a:r>
-          </a:p>
-          <a:p/>
-          <a:p>
-            <a:r>
-              <a:t>I'll pause here for questions, then we'll continue.</a:t>
+              <a:t>Please look at the screenshot on screen: Live topology — federated failure-prediction dashboard. Walk the class through what they see in the interface. Connect each panel and button to a component we already deployed in the stack. In particular, note the following: Vibration/temperature/current models aggregate without sharing raw CSVs. Take a few seconds to orient before we continue.</a:t>
             </a:r>
           </a:p>
         </p:txBody>
@@ -2378,31 +2315,31 @@
           <a:lstStyle/>
           <a:p>
             <a:r>
-              <a:t>In this slide we cover FL in the Cloud Continuum research context (Ch.19 + Ch.11). This material is covered in Ch.19 + Ch.11 Type 4 · SLICES RI FL experiment pattern.</a:t>
+              <a:t>Now we move to the hands-on part: Start FL clients on all three boards. Open your lab VM and follow along.</a:t>
             </a:r>
           </a:p>
           <a:p/>
           <a:p>
             <a:r>
-              <a:t>First, regarding ch.11 type 4 experiments, AI/ML workflows including federated learning at edge. Next, regarding slices ri multi-site fl, clients on different European sites, server on cloud slice.</a:t>
+              <a:t>First, regarding with flower server running, federated Learning panel, then Start all clients. Next, Or Start fl-client individually per board from the panel.</a:t>
             </a:r>
           </a:p>
           <a:p/>
           <a:p>
             <a:r>
-              <a:t>By contrast, S4T IoTronic inject scales FL client deployment — same pattern as Module D fleet ops. We should also consider that Crossplane Workflow CRD could declare FL experiment: server + N client plugins + datasets.</a:t>
+              <a:t>By contrast, regarding watch live topology, clients connect, then rounds advance, then loss/accuracy update. We should also consider that regarding lr logs, docker logs lightning-rod-2 — local training progress messages.</a:t>
             </a:r>
           </a:p>
           <a:p/>
           <a:p>
             <a:r>
-              <a:t>Another key point is that Edge-board FL preserves data sovereignty requirements of SLICES partner institutions. Furthermore, Lab on {{VM_IP}} is minimal horizontal FL — production scales to cross-silo federation.</a:t>
+              <a:t>Raise your hand if you're stuck — we'll wait until most of you are done.</a:t>
             </a:r>
           </a:p>
           <a:p/>
           <a:p>
             <a:r>
-              <a:t>I'll pause here for questions, then we'll continue.</a:t>
+              <a:t>Instructor timing (title): Step 4 — Start FL clients on all three boards</a:t>
             </a:r>
           </a:p>
         </p:txBody>
@@ -2566,7 +2503,31 @@
           <a:lstStyle/>
           <a:p>
             <a:r>
-              <a:t>We now begin a new section: Validate &amp; wrap-up. Confirm aggregation + Module H exclusion. In the next slides, listen for whether we are in theory mode or hands-on mode, and open your terminal when the slides turn to lab work.</a:t>
+              <a:t>In this slide we cover Client plugin execution flow (Ch.19). This material is covered in Ch.19 · fl_client_plugin.py Worker + HeartClient · async plugin pattern.</a:t>
+            </a:r>
+          </a:p>
+          <a:p/>
+          <a:p>
+            <a:r>
+              <a:t>First, Start action launches async Worker — connects to Flower server via gRPC/TCP. Next, Worker loads local CSV — initializes model with global weights from server.</a:t>
+            </a:r>
+          </a:p>
+          <a:p/>
+          <a:p>
+            <a:r>
+              <a:t>By contrast, regarding local training, N local epochs on board CPU — sends weight delta to server. We should also consider that Server aggregates all 3 client updates — broadcasts new global weights.</a:t>
+            </a:r>
+          </a:p>
+          <a:p/>
+          <a:p>
+            <a:r>
+              <a:t>Another key point is that regarding round 2, clients receive updated global model — repeat local training. Furthermore, regarding stop, interrupt plugin on each board after rounds complete — clean shutdown.</a:t>
+            </a:r>
+          </a:p>
+          <a:p/>
+          <a:p>
+            <a:r>
+              <a:t>I'll pause here for questions, then we'll continue.</a:t>
             </a:r>
           </a:p>
         </p:txBody>
@@ -2636,31 +2597,31 @@
           <a:lstStyle/>
           <a:p>
             <a:r>
-              <a:t>Now we move to the hands-on part: Validate FL lab. Open your lab VM and follow along.</a:t>
+              <a:t>In this slide we cover Troubleshooting FL connectivity (Ch.19 lab). This material is covered in fix-iotronic-wampagents.sh · validate-lab-fl.sh · install-fl-on-boards.sh.</a:t>
             </a:r>
           </a:p>
           <a:p/>
           <a:p>
             <a:r>
-              <a:t>Please run the following command on your VM: cd training &amp;&amp; ./validate-lab-fl.sh. Wait until you see a sensible result before continuing. Next, regarding watch server log for, round 1 complete · Round 2 complete · final accuracy.</a:t>
+              <a:t>First, regarding clients cannot connect, verify server on VM :8087 and gateway IP from install-fl-on-boards.sh. Next, regarding horizon 'unable to retrieve boards list', run scripts/fix-iotronic-wampagents.sh.</a:t>
             </a:r>
           </a:p>
           <a:p/>
           <a:p>
             <a:r>
-              <a:t>By contrast, Interrupt FL plugins on all boards after successful validation.</a:t>
+              <a:t>By contrast, regarding server stuck waiting, ensure all 3 Start actions fired — minimum client count not met. We should also consider that regarding oom on board, reduce local epochs in plugin params — edge boards have limited RAM.</a:t>
             </a:r>
           </a:p>
           <a:p/>
           <a:p>
             <a:r>
-              <a:t>Raise your hand if you're stuck — we'll wait until most of you are done.</a:t>
+              <a:t>Another key point is that regarding plugin error on start, re-run install-fl-on-boards.sh (flwr/torch in LR container). Furthermore, Validate-lab-fl.sh — artifacts, Horizon mounts, panel URL, live proxy + optional E2E.</a:t>
             </a:r>
           </a:p>
           <a:p/>
           <a:p>
             <a:r>
-              <a:t>Instructor timing (title): Step 5 — Validate FL lab</a:t>
+              <a:t>I'll pause here for questions, then we'll continue.</a:t>
             </a:r>
           </a:p>
         </p:txBody>
@@ -2730,19 +2691,277 @@
           <a:lstStyle/>
           <a:p>
             <a:r>
+              <a:t>In this slide we cover FL in the Cloud Continuum research context (Ch.19 + Ch.11). This material is covered in Ch.19 + Ch.11 Type 4 · SLICES RI FL experiment pattern.</a:t>
+            </a:r>
+          </a:p>
+          <a:p/>
+          <a:p>
+            <a:r>
+              <a:t>First, regarding ch.11 type 4 experiments, AI/ML workflows including federated learning at edge. Next, regarding slices ri multi-site fl, clients on different European sites, server on cloud slice.</a:t>
+            </a:r>
+          </a:p>
+          <a:p/>
+          <a:p>
+            <a:r>
+              <a:t>By contrast, S4T IoTronic inject scales FL client deployment — same pattern as Module D fleet ops. We should also consider that Crossplane Workflow CRD could declare FL experiment: server + N client plugins + datasets.</a:t>
+            </a:r>
+          </a:p>
+          <a:p/>
+          <a:p>
+            <a:r>
+              <a:t>Another key point is that Edge-board FL preserves data sovereignty requirements of SLICES partner institutions. Furthermore, Lab on {{VM_IP}} is minimal horizontal FL — production scales to cross-silo federation.</a:t>
+            </a:r>
+          </a:p>
+          <a:p/>
+          <a:p>
+            <a:r>
+              <a:t>I'll pause here for questions, then we'll continue.</a:t>
+            </a:r>
+          </a:p>
+        </p:txBody>
+      </p:sp>
+      <p:sp>
+        <p:nvSpPr>
+          <p:cNvPr id="4" name="Slide Number Placeholder 3"/>
+          <p:cNvSpPr>
+            <a:spLocks noGrp="1"/>
+          </p:cNvSpPr>
+          <p:nvPr>
+            <p:ph type="sldNum" idx="5" sz="quarter"/>
+          </p:nvPr>
+        </p:nvSpPr>
+        <p:spPr/>
+      </p:sp>
+    </p:spTree>
+  </p:cSld>
+  <p:clrMapOvr>
+    <a:masterClrMapping/>
+  </p:clrMapOvr>
+</p:notes>
+</file>
+
+<file path=ppt/notesSlides/notesSlide33.xml><?xml version="1.0" encoding="utf-8"?>
+<p:notes xmlns:a="http://schemas.openxmlformats.org/drawingml/2006/main" xmlns:p="http://schemas.openxmlformats.org/presentationml/2006/main" xmlns:r="http://schemas.openxmlformats.org/officeDocument/2006/relationships">
+  <p:cSld>
+    <p:spTree>
+      <p:nvGrpSpPr>
+        <p:cNvPr id="1" name=""/>
+        <p:cNvGrpSpPr/>
+        <p:nvPr/>
+      </p:nvGrpSpPr>
+      <p:grpSpPr>
+        <a:xfrm>
+          <a:off x="0" y="0"/>
+          <a:ext cx="0" cy="0"/>
+          <a:chOff x="0" y="0"/>
+          <a:chExt cx="0" cy="0"/>
+        </a:xfrm>
+      </p:grpSpPr>
+      <p:sp>
+        <p:nvSpPr>
+          <p:cNvPr id="2" name="Slide Image Placeholder 1"/>
+          <p:cNvSpPr>
+            <a:spLocks noGrp="1"/>
+          </p:cNvSpPr>
+          <p:nvPr>
+            <p:ph type="sldImg" idx="2"/>
+          </p:nvPr>
+        </p:nvSpPr>
+        <p:spPr/>
+      </p:sp>
+      <p:sp>
+        <p:nvSpPr>
+          <p:cNvPr id="3" name="Notes Placeholder 2"/>
+          <p:cNvSpPr>
+            <a:spLocks noGrp="1"/>
+          </p:cNvSpPr>
+          <p:nvPr>
+            <p:ph type="body" idx="3" sz="quarter"/>
+          </p:nvPr>
+        </p:nvSpPr>
+        <p:spPr/>
+        <p:txBody>
+          <a:bodyPr/>
+          <a:lstStyle/>
+          <a:p>
+            <a:r>
+              <a:t>We now begin a new section: Validate &amp; wrap-up. Confirm aggregation + Module H exclusion. In the next slides, listen for whether we are in theory mode or hands-on mode, and open your terminal when the slides turn to lab work.</a:t>
+            </a:r>
+          </a:p>
+        </p:txBody>
+      </p:sp>
+      <p:sp>
+        <p:nvSpPr>
+          <p:cNvPr id="4" name="Slide Number Placeholder 3"/>
+          <p:cNvSpPr>
+            <a:spLocks noGrp="1"/>
+          </p:cNvSpPr>
+          <p:nvPr>
+            <p:ph type="sldNum" idx="5" sz="quarter"/>
+          </p:nvPr>
+        </p:nvSpPr>
+        <p:spPr/>
+      </p:sp>
+    </p:spTree>
+  </p:cSld>
+  <p:clrMapOvr>
+    <a:masterClrMapping/>
+  </p:clrMapOvr>
+</p:notes>
+</file>
+
+<file path=ppt/notesSlides/notesSlide34.xml><?xml version="1.0" encoding="utf-8"?>
+<p:notes xmlns:a="http://schemas.openxmlformats.org/drawingml/2006/main" xmlns:p="http://schemas.openxmlformats.org/presentationml/2006/main" xmlns:r="http://schemas.openxmlformats.org/officeDocument/2006/relationships">
+  <p:cSld>
+    <p:spTree>
+      <p:nvGrpSpPr>
+        <p:cNvPr id="1" name=""/>
+        <p:cNvGrpSpPr/>
+        <p:nvPr/>
+      </p:nvGrpSpPr>
+      <p:grpSpPr>
+        <a:xfrm>
+          <a:off x="0" y="0"/>
+          <a:ext cx="0" cy="0"/>
+          <a:chOff x="0" y="0"/>
+          <a:chExt cx="0" cy="0"/>
+        </a:xfrm>
+      </p:grpSpPr>
+      <p:sp>
+        <p:nvSpPr>
+          <p:cNvPr id="2" name="Slide Image Placeholder 1"/>
+          <p:cNvSpPr>
+            <a:spLocks noGrp="1"/>
+          </p:cNvSpPr>
+          <p:nvPr>
+            <p:ph type="sldImg" idx="2"/>
+          </p:nvPr>
+        </p:nvSpPr>
+        <p:spPr/>
+      </p:sp>
+      <p:sp>
+        <p:nvSpPr>
+          <p:cNvPr id="3" name="Notes Placeholder 2"/>
+          <p:cNvSpPr>
+            <a:spLocks noGrp="1"/>
+          </p:cNvSpPr>
+          <p:nvPr>
+            <p:ph type="body" idx="3" sz="quarter"/>
+          </p:nvPr>
+        </p:nvSpPr>
+        <p:spPr/>
+        <p:txBody>
+          <a:bodyPr/>
+          <a:lstStyle/>
+          <a:p>
+            <a:r>
+              <a:t>Now we move to the hands-on part: Validate FL lab. Open your lab VM and follow along.</a:t>
+            </a:r>
+          </a:p>
+          <a:p/>
+          <a:p>
+            <a:r>
+              <a:t>Please run the following command on your VM: cd training &amp;&amp; ./validate-lab-fl.sh. Wait until you see a sensible result before continuing. Next, Live topology shows rounds completing; loss numeric (not em-dash).</a:t>
+            </a:r>
+          </a:p>
+          <a:p/>
+          <a:p>
+            <a:r>
+              <a:t>By contrast, Interrupt FL plugins on all boards after successful validation.</a:t>
+            </a:r>
+          </a:p>
+          <a:p/>
+          <a:p>
+            <a:r>
+              <a:t>Raise your hand if you're stuck — we'll wait until most of you are done.</a:t>
+            </a:r>
+          </a:p>
+          <a:p/>
+          <a:p>
+            <a:r>
+              <a:t>Instructor timing (title): Step 5 — Validate FL lab</a:t>
+            </a:r>
+          </a:p>
+        </p:txBody>
+      </p:sp>
+      <p:sp>
+        <p:nvSpPr>
+          <p:cNvPr id="4" name="Slide Number Placeholder 3"/>
+          <p:cNvSpPr>
+            <a:spLocks noGrp="1"/>
+          </p:cNvSpPr>
+          <p:nvPr>
+            <p:ph type="sldNum" idx="5" sz="quarter"/>
+          </p:nvPr>
+        </p:nvSpPr>
+        <p:spPr/>
+      </p:sp>
+    </p:spTree>
+  </p:cSld>
+  <p:clrMapOvr>
+    <a:masterClrMapping/>
+  </p:clrMapOvr>
+</p:notes>
+</file>
+
+<file path=ppt/notesSlides/notesSlide35.xml><?xml version="1.0" encoding="utf-8"?>
+<p:notes xmlns:a="http://schemas.openxmlformats.org/drawingml/2006/main" xmlns:p="http://schemas.openxmlformats.org/presentationml/2006/main" xmlns:r="http://schemas.openxmlformats.org/officeDocument/2006/relationships">
+  <p:cSld>
+    <p:spTree>
+      <p:nvGrpSpPr>
+        <p:cNvPr id="1" name=""/>
+        <p:cNvGrpSpPr/>
+        <p:nvPr/>
+      </p:nvGrpSpPr>
+      <p:grpSpPr>
+        <a:xfrm>
+          <a:off x="0" y="0"/>
+          <a:ext cx="0" cy="0"/>
+          <a:chOff x="0" y="0"/>
+          <a:chExt cx="0" cy="0"/>
+        </a:xfrm>
+      </p:grpSpPr>
+      <p:sp>
+        <p:nvSpPr>
+          <p:cNvPr id="2" name="Slide Image Placeholder 1"/>
+          <p:cNvSpPr>
+            <a:spLocks noGrp="1"/>
+          </p:cNvSpPr>
+          <p:nvPr>
+            <p:ph type="sldImg" idx="2"/>
+          </p:nvPr>
+        </p:nvSpPr>
+        <p:spPr/>
+      </p:sp>
+      <p:sp>
+        <p:nvSpPr>
+          <p:cNvPr id="3" name="Notes Placeholder 2"/>
+          <p:cNvSpPr>
+            <a:spLocks noGrp="1"/>
+          </p:cNvSpPr>
+          <p:nvPr>
+            <p:ph type="body" idx="3" sz="quarter"/>
+          </p:nvPr>
+        </p:nvSpPr>
+        <p:spPr/>
+        <p:txBody>
+          <a:bodyPr/>
+          <a:lstStyle/>
+          <a:p>
+            <a:r>
               <a:t>On this slide, Module G checklist &amp; resource note.</a:t>
             </a:r>
           </a:p>
           <a:p/>
           <a:p>
             <a:r>
-              <a:t>First, □ Flower server shows 2 aggregation rounds completing with 3 clients. Next, □ Three board plugins connected and contributed weight updates.</a:t>
+              <a:t>First, regarding □ horizon fl panel, start server + Start all clients — rounds complete in live topology. Next, □ Three production lines connected via fl-client with correct machine_*.csv per board.</a:t>
             </a:r>
           </a:p>
           <a:p/>
           <a:p>
             <a:r>
-              <a:t>By contrast, □ validate-lab-fl.sh passes. We should also consider that □ free -h ≥ 2 GB during FL — do NOT run K3s Blueprint (Module H) concurrently.</a:t>
+              <a:t>By contrast, regarding □ validate-lab-fl.sh passes (horizon mounts +, 8091 control API). We should also consider that □ free -h ≥ 2 GB during FL — do NOT run K3s Blueprint (Module H) concurrently.</a:t>
             </a:r>
           </a:p>
           <a:p/>
@@ -2830,19 +3049,19 @@
           <a:p/>
           <a:p>
             <a:r>
-              <a:t>First, in the centralized approach, an ETL pipeline uploads datasets, then a single GPU cluster trains monolithic model. Next, in the federated approach, N clients train locally, then the server aggregates, then the global model improves iteratively.</a:t>
+              <a:t>First, in the centralized approach, an ETL pipeline uploads datasets, then a single GPU cluster trains a monolithic model. Next, in the federated approach, N clients train locally, then the server aggregates, then the global model improves iteratively.</a:t>
             </a:r>
           </a:p>
           <a:p/>
           <a:p>
             <a:r>
-              <a:t>By contrast, a major bottleneck of centralized training is the network upload of the full dataset from each edge site. We should also consider that federated learning has bottlenecks: straggler clients, non-IID data distribution, communication rounds.</a:t>
+              <a:t>By contrast, a major bottleneck of centralized training is network upload of full dataset from each edge site. We should also consider that federated learning has bottlenecks: straggler clients, non-IID data distribution, communication rounds.</a:t>
             </a:r>
           </a:p>
           <a:p/>
           <a:p>
             <a:r>
-              <a:t>Another key point is that for Stack4Things, the value proposition is that IoTronic deploys FL client plugin to fleet — the operational layer for federated learning. Furthermore, our lab demonstration uses 3 boards, 3 CSV files, 1 Flower server — minimal horizontal FL topology.</a:t>
+              <a:t>Another key point is that for Stack4Things, the value proposition is that IoTronic deploys FL client plugin to fleet — the operational layer for federated learning. Furthermore, our lab demonstration uses 3 production lines, 3 CSV files, 1 Flower server — horizontal FL for failure prediction.</a:t>
             </a:r>
           </a:p>
           <a:p/>
@@ -2924,7 +3143,7 @@
           <a:p/>
           <a:p>
             <a:r>
-              <a:t>First, regarding server (flower in lab), orchestrates rounds, aggregates updates (FedAvg algorithm). Next, regarding clients, local training on board-resident dataset — heart_1/2/3.csv in ch19 demo.</a:t>
+              <a:t>First, regarding server (flower in lab), orchestrates rounds, aggregates updates (FedAvg algorithm). Next, regarding clients, local training on board-resident telemetry — machine_1/2/3.csv (predictive maintenance).</a:t>
             </a:r>
           </a:p>
           <a:p/>
@@ -3200,25 +3419,25 @@
           <a:lstStyle/>
           <a:p>
             <a:r>
-              <a:t>In this slide we cover Non-IID data challenges (Ch.19). This material is covered in Ch.19 · non-IID discussion · advanced FL algorithms footnote.</a:t>
+              <a:t>In this slide we cover Non-IID data challenges (Ch.19). This material is covered in Ch.19 · non-IID · predictive maintenance lab extension.</a:t>
             </a:r>
           </a:p>
           <a:p/>
           <a:p>
             <a:r>
-              <a:t>First, regarding real edge data often non-iid, each board sees different distribution of sensor readings. Next, Non-IID slows convergence — may require more FL_ROUNDS or specialized aggregation.</a:t>
+              <a:t>First, regarding real edge data often non-iid, each production line has different failure signatures. Next, regarding lab, CNC spindle vs conveyor vs pump — distinct vibration/temperature/current patterns.</a:t>
             </a:r>
           </a:p>
           <a:p/>
           <a:p>
             <a:r>
-              <a:t>By contrast, Lab heart CSVs are mildly non-IID by design — demonstrates realistic edge heterogeneity. We should also consider that regarding production mitigations, fedProx, SCAFFOLD, personalization layers — beyond lab scope.</a:t>
+              <a:t>By contrast, Target=1 = failure imminent; federated model learns global predictor without centralizing CSVs. We should also consider that Non-IID slows convergence — may require more FL_ROUNDS or specialized aggregation.</a:t>
             </a:r>
           </a:p>
           <a:p/>
           <a:p>
             <a:r>
-              <a:t>Another key point is that Students should observe per-round accuracy variance in Flower server log output. Furthermore, Module D fleet heterogeneity (3 boards) mirrors cross-silo non-IID scenario.</a:t>
+              <a:t>Another key point is that regarding production mitigations, fedProx, SCAFFOLD — beyond lab scope. Furthermore, Module D fleet (3 boards) mirrors cross-silo industrial FL scenario.</a:t>
             </a:r>
           </a:p>
           <a:p/>
@@ -3294,25 +3513,25 @@
           <a:lstStyle/>
           <a:p>
             <a:r>
-              <a:t>In this slide we cover S4T + FL integration — plugin model (Ch.19). This material is covered in Ch.19 · ch19 repo plugin + server.py listing.</a:t>
+              <a:t>In this slide we cover S4T + FL integration — plugin model (Ch.19). This material is covered in Ch.19 · server on cloud VM · 3 board clients · Horizon Federated Learning panel.</a:t>
             </a:r>
           </a:p>
           <a:p/>
           <a:p>
             <a:r>
-              <a:t>First, Async plugin Worker in client.py connects to Flower server as FL client process. Next, regarding local training loop, read CSV, then train epochs, then send weight update via Flower gRPC.</a:t>
+              <a:t>First, regarding each board monitors a different machine, vibration, temperature, motor current (local CSV). Next, regarding target, binary failure_imminent — raw telemetry never leaves the edge board.</a:t>
             </a:r>
           </a:p>
           <a:p/>
           <a:p>
             <a:r>
-              <a:t>By contrast, regarding server-side evaluation, centralized loss/accuracy view printed each aggregation round. We should also consider that regarding plugin lifecycle, create in IoTronic, then inject per board, then Start while server running.</a:t>
+              <a:t>By contrast, regarding plugin lifecycle, install datasets, then shared fl-client in FL panel, then inject, then Start. We should also consider that Board-alpha = CNC spindle, board-beta = conveyor motor, board-gamma = pump line.</a:t>
             </a:r>
           </a:p>
           <a:p/>
           <a:p>
             <a:r>
-              <a:t>Another key point is that regarding different csv per board, heart_1.csv on alpha, heart_2.csv on beta, heart_3.csv on gamma. Furthermore, regarding repo, training/repos/ch19 — server.py + client.py + sample datasets.</a:t>
+              <a:t>Another key point is that regarding non-iid by design, each line has different failure signatures (Ch.19 horizontal FL). Furthermore, regarding repo, ch19/server.py + fl_client_plugin.py + machine_*.csv (generate_pm_datasets.py).</a:t>
             </a:r>
           </a:p>
           <a:p/>
@@ -8954,7 +9173,7 @@
               </a:defRPr>
             </a:pPr>
             <a:r>
-              <a:t>▸  Deploy Flower aggregation server on VM host</a:t>
+              <a:t>▸  Deploy Flower server; federated failure-prediction model across 3 edge production lines</a:t>
             </a:r>
           </a:p>
           <a:p>
@@ -8973,7 +9192,7 @@
               </a:defRPr>
             </a:pPr>
             <a:r>
-              <a:t>▸  Inject FL async client plugin on 3 Active boards with distinct CSV datasets</a:t>
+              <a:t>▸  Inject FL async client on 3 Active boards with distinct machine_*.csv datasets</a:t>
             </a:r>
           </a:p>
           <a:p>
@@ -9737,7 +9956,26 @@
               </a:defRPr>
             </a:pPr>
             <a:r>
-              <a:t>▸  Repo: training/repos/ch19 (server.py, client.py, heart_*.csv)</a:t>
+              <a:t>▸  Repo: ch19/server.py + fl_client_plugin.py + machine_*.csv (predictive maintenance lab)</a:t>
+            </a:r>
+          </a:p>
+          <a:p>
+            <a:pPr>
+              <a:lnSpc>
+                <a:spcPct val="115000"/>
+              </a:lnSpc>
+              <a:spcAft>
+                <a:spcPts val="800"/>
+              </a:spcAft>
+              <a:defRPr sz="1900" b="0">
+                <a:solidFill>
+                  <a:srgbClr val="37474F"/>
+                </a:solidFill>
+                <a:latin typeface="Calibri"/>
+              </a:defRPr>
+            </a:pPr>
+            <a:r>
+              <a:t>▸  Run install-fl-on-boards.sh once — deps + machine_*.csv into LR containers</a:t>
             </a:r>
           </a:p>
           <a:p>
@@ -10100,7 +10338,7 @@
               </a:defRPr>
             </a:pPr>
             <a:r>
-              <a:t>Install Flower and ML dependencies</a:t>
+              <a:t>Install FL deps on VM and boards</a:t>
             </a:r>
           </a:p>
         </p:txBody>
@@ -10187,7 +10425,26 @@
               </a:defRPr>
             </a:pPr>
             <a:r>
-              <a:t>$ pip install flwr torch pandas scikit-learn</a:t>
+              <a:t>$ cd training &amp;&amp; pip install flwr torch pandas scikit-learn # or use .venv</a:t>
+            </a:r>
+          </a:p>
+          <a:p>
+            <a:pPr>
+              <a:lnSpc>
+                <a:spcPct val="115000"/>
+              </a:lnSpc>
+              <a:spcAft>
+                <a:spcPts val="800"/>
+              </a:spcAft>
+              <a:defRPr sz="1400" b="0">
+                <a:solidFill>
+                  <a:srgbClr val="0D2B45"/>
+                </a:solidFill>
+                <a:latin typeface="Consolas"/>
+              </a:defRPr>
+            </a:pPr>
+            <a:r>
+              <a:t>$ ./experiments/federated-learning/install-fl-on-boards.sh</a:t>
             </a:r>
           </a:p>
           <a:p>
@@ -10206,26 +10463,7 @@
               </a:defRPr>
             </a:pPr>
             <a:r>
-              <a:t>▸  # Or use helper: training/experiments/federated-learning/start-server.sh</a:t>
-            </a:r>
-          </a:p>
-          <a:p>
-            <a:pPr>
-              <a:lnSpc>
-                <a:spcPct val="115000"/>
-              </a:lnSpc>
-              <a:spcAft>
-                <a:spcPts val="800"/>
-              </a:spcAft>
-              <a:defRPr sz="1900" b="0">
-                <a:solidFill>
-                  <a:srgbClr val="37474F"/>
-                </a:solidFill>
-                <a:latin typeface="Calibri"/>
-              </a:defRPr>
-            </a:pPr>
-            <a:r>
-              <a:t>▸  Verify: python3 -c "import flwr; print(flwr.__version__)"</a:t>
+              <a:t>▸  Copies machine_1/2/3.csv + fl_client_plugin.py into each LR container (/opt/fl/)</a:t>
             </a:r>
           </a:p>
         </p:txBody>
@@ -10603,7 +10841,7 @@
               </a:defRPr>
             </a:pPr>
             <a:r>
-              <a:t>Ch.19 · server.py listing · Flower ServerConfig</a:t>
+              <a:t>Ch.19 · server.py on cloud VM · FL_PORT=8087 · Horizon panel + fl-cont</a:t>
             </a:r>
           </a:p>
         </p:txBody>
@@ -10726,7 +10964,7 @@
               </a:defRPr>
             </a:pPr>
             <a:r>
-              <a:t>▸  server.py in ch19 repo: configures FedAvg strategy and number of rounds</a:t>
+              <a:t>▸  server.py on VM host: FedAvg strategy — same role as book listing (Cap. 19)</a:t>
             </a:r>
           </a:p>
           <a:p>
@@ -10764,7 +11002,7 @@
               </a:defRPr>
             </a:pPr>
             <a:r>
-              <a:t>▸  Server binds all interfaces on port 8080 — must be reachable from LR Docker containers</a:t>
+              <a:t>▸  Server binds 0.0.0.0:8087 (default) — avoids WSTUN conflict on :8080</a:t>
             </a:r>
           </a:p>
           <a:p>
@@ -10783,7 +11021,7 @@
               </a:defRPr>
             </a:pPr>
             <a:r>
-              <a:t>▸  LR containers reach VM host via docker bridge gateway IP or host network mode</a:t>
+              <a:t>▸  LR containers reach VM host via Docker bridge gateway (e.g. 172.18.0.1:8087)</a:t>
             </a:r>
           </a:p>
           <a:p>
@@ -11022,7 +11260,7 @@
               </a:defRPr>
             </a:pPr>
             <a:r>
-              <a:t>Start Flower aggregation server</a:t>
+              <a:t>Enable FL panel and start Flower server</a:t>
             </a:r>
           </a:p>
         </p:txBody>
@@ -11109,26 +11347,7 @@
               </a:defRPr>
             </a:pPr>
             <a:r>
-              <a:t>$ cd training/repos/ch19</a:t>
-            </a:r>
-          </a:p>
-          <a:p>
-            <a:pPr>
-              <a:lnSpc>
-                <a:spcPct val="115000"/>
-              </a:lnSpc>
-              <a:spcAft>
-                <a:spcPts val="800"/>
-              </a:spcAft>
-              <a:defRPr sz="1400" b="0">
-                <a:solidFill>
-                  <a:srgbClr val="0D2B45"/>
-                </a:solidFill>
-                <a:latin typeface="Consolas"/>
-              </a:defRPr>
-            </a:pPr>
-            <a:r>
-              <a:t>$ FL_ROUNDS=2 python3 server.py</a:t>
+              <a:t>$ cd training &amp;&amp; ./experiments/federated-learning/setup-fl-horizon.sh # once</a:t>
             </a:r>
           </a:p>
           <a:p>
@@ -11147,7 +11366,7 @@
               </a:defRPr>
             </a:pPr>
             <a:r>
-              <a:t>▸  Keep terminal open — server must run while client plugins connect</a:t>
+              <a:t>▸  Horizon → IoT → Federated Learning → Lab parameters → Save</a:t>
             </a:r>
           </a:p>
           <a:p>
@@ -11166,7 +11385,26 @@
               </a:defRPr>
             </a:pPr>
             <a:r>
-              <a:t>▸  Expected: waiting for clients message, then round 1/2 aggregation output</a:t>
+              <a:t>▸  Click Start Flower server (or Restart after param changes) — live topology iframe</a:t>
+            </a:r>
+          </a:p>
+          <a:p>
+            <a:pPr>
+              <a:lnSpc>
+                <a:spcPct val="115000"/>
+              </a:lnSpc>
+              <a:spcAft>
+                <a:spcPts val="800"/>
+              </a:spcAft>
+              <a:defRPr sz="1900" b="0">
+                <a:solidFill>
+                  <a:srgbClr val="37474F"/>
+                </a:solidFill>
+                <a:latin typeface="Calibri"/>
+              </a:defRPr>
+            </a:pPr>
+            <a:r>
+              <a:t>▸  Optional demo-ready: ./experiments/federated-learning/setup-fl-demo-plugins.sh</a:t>
             </a:r>
           </a:p>
         </p:txBody>
@@ -11386,7 +11624,7 @@
               </a:defRPr>
             </a:pPr>
             <a:r>
-              <a:t>One async plugin per board</a:t>
+              <a:t>Single shared fl-client plugin</a:t>
             </a:r>
           </a:p>
         </p:txBody>
@@ -11578,7 +11816,7 @@
               </a:defRPr>
             </a:pPr>
             <a:r>
-              <a:t>▸  Horizon → Plugins → Create async plugin from ch19 client.py template</a:t>
+              <a:t>▸  Horizon → Federated Learning → Create / update FL client plugin (name: fl-client)</a:t>
             </a:r>
           </a:p>
           <a:p>
@@ -11597,7 +11835,7 @@
               </a:defRPr>
             </a:pPr>
             <a:r>
-              <a:t>▸  Create three plugin instances OR one plugin injected on three boards</a:t>
+              <a:t>▸  One shared async plugin — per-board JSON: csv_file + board_name only</a:t>
             </a:r>
           </a:p>
           <a:p>
@@ -11616,7 +11854,7 @@
               </a:defRPr>
             </a:pPr>
             <a:r>
-              <a:t>▸  Configure dataset path: heart_1.csv on alpha, heart_2.csv on beta, heart_3.csv on gamma</a:t>
+              <a:t>▸  Inject fl-client: board-alpha (machine_1/CNC), board-beta (machine_2/conveyor), board-gamma (machine_3/pump)</a:t>
             </a:r>
           </a:p>
           <a:p>
@@ -11635,7 +11873,7 @@
               </a:defRPr>
             </a:pPr>
             <a:r>
-              <a:t>▸  Server address in plugin params: {{VM_IP}}:8080 (Flower server on VM host)</a:t>
+              <a:t>▸  Lab parameters supply server_address and dashboard_url — Apply to all boards</a:t>
             </a:r>
           </a:p>
         </p:txBody>
@@ -11760,7 +11998,7 @@
             <a:avLst/>
           </a:prstGeom>
           <a:solidFill>
-            <a:srgbClr val="0D2B45"/>
+            <a:srgbClr val="008B9A"/>
           </a:solidFill>
           <a:ln>
             <a:noFill/>
@@ -11796,7 +12034,7 @@
         </p:nvSpPr>
         <p:spPr>
           <a:xfrm>
-            <a:off x="594360" y="347472"/>
+            <a:off x="594360" y="502920"/>
             <a:ext cx="10972800" cy="868680"/>
           </a:xfrm>
           <a:prstGeom prst="rect">
@@ -11811,7 +12049,7 @@
           <a:lstStyle/>
           <a:p>
             <a:pPr>
-              <a:defRPr sz="2200" b="1">
+              <a:defRPr sz="3000" b="1">
                 <a:solidFill>
                   <a:srgbClr val="0D2B45"/>
                 </a:solidFill>
@@ -11819,7 +12057,7 @@
               </a:defRPr>
             </a:pPr>
             <a:r>
-              <a:t>Horizon IoT — Plugins dashboard (FL client deploy)</a:t>
+              <a:t>Horizon — Federated Learning panel (Module G)</a:t>
             </a:r>
           </a:p>
         </p:txBody>
@@ -11832,8 +12070,8 @@
         </p:nvSpPr>
         <p:spPr>
           <a:xfrm>
-            <a:off x="1667103" y="1298448"/>
-            <a:ext cx="8857488" cy="5733288"/>
+            <a:off x="502920" y="1344168"/>
+            <a:ext cx="11155680" cy="5010912"/>
           </a:xfrm>
           <a:prstGeom prst="roundRect">
             <a:avLst/>
@@ -11841,7 +12079,7 @@
           <a:solidFill>
             <a:srgbClr val="FFFFFF"/>
           </a:solidFill>
-          <a:ln w="12700">
+          <a:ln w="9525">
             <a:solidFill>
               <a:srgbClr val="B2EBF2"/>
             </a:solidFill>
@@ -11869,40 +12107,16 @@
           </a:p>
         </p:txBody>
       </p:sp>
-      <p:pic>
-        <p:nvPicPr>
-          <p:cNvPr id="5" name="Picture 4" descr="horizon-plugins-dashboard.png"/>
-          <p:cNvPicPr>
-            <a:picLocks noChangeAspect="1"/>
-          </p:cNvPicPr>
-          <p:nvPr/>
-        </p:nvPicPr>
-        <p:blipFill>
-          <a:blip r:embed="rId2"/>
-          <a:stretch>
-            <a:fillRect/>
-          </a:stretch>
-        </p:blipFill>
-        <p:spPr>
-          <a:xfrm>
-            <a:off x="1721967" y="1353312"/>
-            <a:ext cx="8747760" cy="5623560"/>
-          </a:xfrm>
-          <a:prstGeom prst="rect">
-            <a:avLst/>
-          </a:prstGeom>
-        </p:spPr>
-      </p:pic>
-      <p:sp>
-        <p:nvSpPr>
-          <p:cNvPr id="6" name="TextBox 5"/>
+      <p:sp>
+        <p:nvSpPr>
+          <p:cNvPr id="5" name="TextBox 4"/>
           <p:cNvSpPr txBox="1"/>
           <p:nvPr/>
         </p:nvSpPr>
         <p:spPr>
           <a:xfrm>
-            <a:off x="594360" y="7168896"/>
-            <a:ext cx="10972800" cy="411480"/>
+            <a:off x="777240" y="1463040"/>
+            <a:ext cx="10424160" cy="4782312"/>
           </a:xfrm>
           <a:prstGeom prst="rect">
             <a:avLst/>
@@ -11910,13 +12124,19 @@
           <a:noFill/>
         </p:spPr>
         <p:txBody>
-          <a:bodyPr wrap="none">
+          <a:bodyPr wrap="square">
             <a:spAutoFit/>
           </a:bodyPr>
           <a:lstStyle/>
           <a:p>
             <a:pPr>
-              <a:defRPr sz="1200" b="0">
+              <a:lnSpc>
+                <a:spcPct val="115000"/>
+              </a:lnSpc>
+              <a:spcAft>
+                <a:spcPts val="800"/>
+              </a:spcAft>
+              <a:defRPr sz="1900" b="0">
                 <a:solidFill>
                   <a:srgbClr val="37474F"/>
                 </a:solidFill>
@@ -11924,14 +12144,33 @@
               </a:defRPr>
             </a:pPr>
             <a:r>
-              <a:t>Three async plugins — Callable=OFF → use Start action · login admin / s4t</a:t>
-            </a:r>
-          </a:p>
-        </p:txBody>
-      </p:sp>
-      <p:sp>
-        <p:nvSpPr>
-          <p:cNvPr id="7" name="Rectangle 6"/>
+              <a:t>▸  Screenshot not available</a:t>
+            </a:r>
+          </a:p>
+          <a:p>
+            <a:pPr>
+              <a:lnSpc>
+                <a:spcPct val="115000"/>
+              </a:lnSpc>
+              <a:spcAft>
+                <a:spcPts val="800"/>
+              </a:spcAft>
+              <a:defRPr sz="1900" b="0">
+                <a:solidFill>
+                  <a:srgbClr val="37474F"/>
+                </a:solidFill>
+                <a:latin typeface="Calibri"/>
+              </a:defRPr>
+            </a:pPr>
+            <a:r>
+              <a:t>▸  Predictive maintenance lab · machine_1/2/3.csv per board · admin / s4t</a:t>
+            </a:r>
+          </a:p>
+        </p:txBody>
+      </p:sp>
+      <p:sp>
+        <p:nvSpPr>
+          <p:cNvPr id="6" name="Rectangle 5"/>
           <p:cNvSpPr/>
           <p:nvPr/>
         </p:nvSpPr>
@@ -11974,7 +12213,7 @@
       </p:sp>
       <p:sp>
         <p:nvSpPr>
-          <p:cNvPr id="8" name="TextBox 7"/>
+          <p:cNvPr id="7" name="TextBox 6"/>
           <p:cNvSpPr txBox="1"/>
           <p:nvPr/>
         </p:nvSpPr>
@@ -12004,42 +12243,6 @@
             </a:pPr>
             <a:r>
               <a:t>Assembling Smart CPS · Stack4Things Training</a:t>
-            </a:r>
-          </a:p>
-        </p:txBody>
-      </p:sp>
-      <p:sp>
-        <p:nvSpPr>
-          <p:cNvPr id="9" name="TextBox 8"/>
-          <p:cNvSpPr txBox="1"/>
-          <p:nvPr/>
-        </p:nvSpPr>
-        <p:spPr>
-          <a:xfrm>
-            <a:off x="9326880" y="6455664"/>
-            <a:ext cx="2377440" cy="320040"/>
-          </a:xfrm>
-          <a:prstGeom prst="rect">
-            <a:avLst/>
-          </a:prstGeom>
-          <a:noFill/>
-        </p:spPr>
-        <p:txBody>
-          <a:bodyPr wrap="none">
-            <a:spAutoFit/>
-          </a:bodyPr>
-          <a:lstStyle/>
-          <a:p>
-            <a:pPr algn="r">
-              <a:defRPr sz="900" b="1">
-                <a:solidFill>
-                  <a:srgbClr val="008B9A"/>
-                </a:solidFill>
-                <a:latin typeface="Calibri"/>
-              </a:defRPr>
-            </a:pPr>
-            <a:r>
-              <a:t>Screenshot</a:t>
             </a:r>
           </a:p>
         </p:txBody>
@@ -12121,7 +12324,7 @@
         </p:nvSpPr>
         <p:spPr>
           <a:xfrm>
-            <a:off x="594360" y="347472"/>
+            <a:off x="594360" y="502920"/>
             <a:ext cx="10972800" cy="868680"/>
           </a:xfrm>
           <a:prstGeom prst="rect">
@@ -12136,7 +12339,7 @@
           <a:lstStyle/>
           <a:p>
             <a:pPr>
-              <a:defRPr sz="2200" b="1">
+              <a:defRPr sz="3000" b="1">
                 <a:solidFill>
                   <a:srgbClr val="0D2B45"/>
                 </a:solidFill>
@@ -12144,7 +12347,7 @@
               </a:defRPr>
             </a:pPr>
             <a:r>
-              <a:t>Multi-board topology for FL clients</a:t>
+              <a:t>Lab parameters — rounds, server and dashboard URLs</a:t>
             </a:r>
           </a:p>
         </p:txBody>
@@ -12157,8 +12360,8 @@
         </p:nvSpPr>
         <p:spPr>
           <a:xfrm>
-            <a:off x="1120368" y="1298448"/>
-            <a:ext cx="9950958" cy="5733288"/>
+            <a:off x="502920" y="1344168"/>
+            <a:ext cx="11155680" cy="5010912"/>
           </a:xfrm>
           <a:prstGeom prst="roundRect">
             <a:avLst/>
@@ -12166,7 +12369,7 @@
           <a:solidFill>
             <a:srgbClr val="FFFFFF"/>
           </a:solidFill>
-          <a:ln w="12700">
+          <a:ln w="9525">
             <a:solidFill>
               <a:srgbClr val="B2EBF2"/>
             </a:solidFill>
@@ -12194,40 +12397,16 @@
           </a:p>
         </p:txBody>
       </p:sp>
-      <p:pic>
-        <p:nvPicPr>
-          <p:cNvPr id="5" name="Picture 4" descr="multiboard-fleet.png"/>
-          <p:cNvPicPr>
-            <a:picLocks noChangeAspect="1"/>
-          </p:cNvPicPr>
-          <p:nvPr/>
-        </p:nvPicPr>
-        <p:blipFill>
-          <a:blip r:embed="rId2"/>
-          <a:stretch>
-            <a:fillRect/>
-          </a:stretch>
-        </p:blipFill>
-        <p:spPr>
-          <a:xfrm>
-            <a:off x="1175232" y="1353312"/>
-            <a:ext cx="9841230" cy="5623560"/>
-          </a:xfrm>
-          <a:prstGeom prst="rect">
-            <a:avLst/>
-          </a:prstGeom>
-        </p:spPr>
-      </p:pic>
-      <p:sp>
-        <p:nvSpPr>
-          <p:cNvPr id="6" name="TextBox 5"/>
+      <p:sp>
+        <p:nvSpPr>
+          <p:cNvPr id="5" name="TextBox 4"/>
           <p:cNvSpPr txBox="1"/>
           <p:nvPr/>
         </p:nvSpPr>
         <p:spPr>
           <a:xfrm>
-            <a:off x="594360" y="7168896"/>
-            <a:ext cx="10972800" cy="411480"/>
+            <a:off x="777240" y="1463040"/>
+            <a:ext cx="10424160" cy="4782312"/>
           </a:xfrm>
           <a:prstGeom prst="rect">
             <a:avLst/>
@@ -12235,13 +12414,19 @@
           <a:noFill/>
         </p:spPr>
         <p:txBody>
-          <a:bodyPr wrap="none">
+          <a:bodyPr wrap="square">
             <a:spAutoFit/>
           </a:bodyPr>
           <a:lstStyle/>
           <a:p>
             <a:pPr>
-              <a:defRPr sz="1200" b="0">
+              <a:lnSpc>
+                <a:spcPct val="115000"/>
+              </a:lnSpc>
+              <a:spcAft>
+                <a:spcPts val="800"/>
+              </a:spcAft>
+              <a:defRPr sz="1900" b="0">
                 <a:solidFill>
                   <a:srgbClr val="37474F"/>
                 </a:solidFill>
@@ -12249,14 +12434,33 @@
               </a:defRPr>
             </a:pPr>
             <a:r>
-              <a:t>3 LR clients :1474/:1475/:1476 → single Flower server {{VM_IP}}:8080</a:t>
-            </a:r>
-          </a:p>
-        </p:txBody>
-      </p:sp>
-      <p:sp>
-        <p:nvSpPr>
-          <p:cNvPr id="7" name="Rectangle 6"/>
+              <a:t>▸  Screenshot not available</a:t>
+            </a:r>
+          </a:p>
+          <a:p>
+            <a:pPr>
+              <a:lnSpc>
+                <a:spcPct val="115000"/>
+              </a:lnSpc>
+              <a:spcAft>
+                <a:spcPts val="800"/>
+              </a:spcAft>
+              <a:defRPr sz="1900" b="0">
+                <a:solidFill>
+                  <a:srgbClr val="37474F"/>
+                </a:solidFill>
+                <a:latin typeface="Calibri"/>
+              </a:defRPr>
+            </a:pPr>
+            <a:r>
+              <a:t>▸  FL rounds + Docker gateway for Flower :8087 and dashboard :8090</a:t>
+            </a:r>
+          </a:p>
+        </p:txBody>
+      </p:sp>
+      <p:sp>
+        <p:nvSpPr>
+          <p:cNvPr id="6" name="Rectangle 5"/>
           <p:cNvSpPr/>
           <p:nvPr/>
         </p:nvSpPr>
@@ -12299,7 +12503,7 @@
       </p:sp>
       <p:sp>
         <p:nvSpPr>
-          <p:cNvPr id="8" name="TextBox 7"/>
+          <p:cNvPr id="7" name="TextBox 6"/>
           <p:cNvSpPr txBox="1"/>
           <p:nvPr/>
         </p:nvSpPr>
@@ -12329,42 +12533,6 @@
             </a:pPr>
             <a:r>
               <a:t>Assembling Smart CPS · Stack4Things Training</a:t>
-            </a:r>
-          </a:p>
-        </p:txBody>
-      </p:sp>
-      <p:sp>
-        <p:nvSpPr>
-          <p:cNvPr id="9" name="TextBox 8"/>
-          <p:cNvSpPr txBox="1"/>
-          <p:nvPr/>
-        </p:nvSpPr>
-        <p:spPr>
-          <a:xfrm>
-            <a:off x="9326880" y="6455664"/>
-            <a:ext cx="2377440" cy="320040"/>
-          </a:xfrm>
-          <a:prstGeom prst="rect">
-            <a:avLst/>
-          </a:prstGeom>
-          <a:noFill/>
-        </p:spPr>
-        <p:txBody>
-          <a:bodyPr wrap="none">
-            <a:spAutoFit/>
-          </a:bodyPr>
-          <a:lstStyle/>
-          <a:p>
-            <a:pPr algn="r">
-              <a:defRPr sz="900" b="1">
-                <a:solidFill>
-                  <a:srgbClr val="008B9A"/>
-                </a:solidFill>
-                <a:latin typeface="Calibri"/>
-              </a:defRPr>
-            </a:pPr>
-            <a:r>
-              <a:t>Diagram</a:t>
             </a:r>
           </a:p>
         </p:txBody>
@@ -12469,7 +12637,7 @@
               </a:defRPr>
             </a:pPr>
             <a:r>
-              <a:t>Start FL clients on all three boards</a:t>
+              <a:t>Edge FL clients — failure prediction per production line</a:t>
             </a:r>
           </a:p>
         </p:txBody>
@@ -12556,7 +12724,7 @@
               </a:defRPr>
             </a:pPr>
             <a:r>
-              <a:t>▸  While Flower server is running: Plugins → FL client → Start on board-alpha</a:t>
+              <a:t>▸  Screenshot not available</a:t>
             </a:r>
           </a:p>
           <a:p>
@@ -12575,45 +12743,7 @@
               </a:defRPr>
             </a:pPr>
             <a:r>
-              <a:t>▸  Start on board-beta · Start on board-gamma</a:t>
-            </a:r>
-          </a:p>
-          <a:p>
-            <a:pPr>
-              <a:lnSpc>
-                <a:spcPct val="115000"/>
-              </a:lnSpc>
-              <a:spcAft>
-                <a:spcPts val="800"/>
-              </a:spcAft>
-              <a:defRPr sz="1900" b="0">
-                <a:solidFill>
-                  <a:srgbClr val="37474F"/>
-                </a:solidFill>
-                <a:latin typeface="Calibri"/>
-              </a:defRPr>
-            </a:pPr>
-            <a:r>
-              <a:t>▸  Watch server terminal: clients connect → round 1 begins → aggregation → round 2</a:t>
-            </a:r>
-          </a:p>
-          <a:p>
-            <a:pPr>
-              <a:lnSpc>
-                <a:spcPct val="115000"/>
-              </a:lnSpc>
-              <a:spcAft>
-                <a:spcPts val="800"/>
-              </a:spcAft>
-              <a:defRPr sz="1900" b="0">
-                <a:solidFill>
-                  <a:srgbClr val="37474F"/>
-                </a:solidFill>
-                <a:latin typeface="Calibri"/>
-              </a:defRPr>
-            </a:pPr>
-            <a:r>
-              <a:t>▸  Each LR log: docker logs lightning-rod-2 — local training progress messages</a:t>
+              <a:t>▸  board-alpha CNC · board-beta conveyor · board-gamma pump · machine_*.csv JSON</a:t>
             </a:r>
           </a:p>
         </p:txBody>
@@ -12711,7 +12841,7 @@
     <p:bg>
       <p:bgPr>
         <a:solidFill>
-          <a:srgbClr val="F0F9FA"/>
+          <a:srgbClr val="F8FAFC"/>
         </a:solidFill>
         <a:effectLst/>
       </p:bgPr>
@@ -12732,7 +12862,7 @@
         <p:spPr>
           <a:xfrm>
             <a:off x="0" y="0"/>
-            <a:ext cx="109728" cy="6858000"/>
+            <a:ext cx="12191695" cy="54864"/>
           </a:xfrm>
           <a:prstGeom prst="rect">
             <a:avLst/>
@@ -12768,23 +12898,61 @@
       </p:sp>
       <p:sp>
         <p:nvSpPr>
-          <p:cNvPr id="3" name="Rounded Rectangle 2"/>
+          <p:cNvPr id="3" name="TextBox 2"/>
+          <p:cNvSpPr txBox="1"/>
+          <p:nvPr/>
+        </p:nvSpPr>
+        <p:spPr>
+          <a:xfrm>
+            <a:off x="594360" y="347472"/>
+            <a:ext cx="10972800" cy="868680"/>
+          </a:xfrm>
+          <a:prstGeom prst="rect">
+            <a:avLst/>
+          </a:prstGeom>
+          <a:noFill/>
+        </p:spPr>
+        <p:txBody>
+          <a:bodyPr wrap="none">
+            <a:spAutoFit/>
+          </a:bodyPr>
+          <a:lstStyle/>
+          <a:p>
+            <a:pPr>
+              <a:defRPr sz="2200" b="1">
+                <a:solidFill>
+                  <a:srgbClr val="0D2B45"/>
+                </a:solidFill>
+                <a:latin typeface="Calibri"/>
+              </a:defRPr>
+            </a:pPr>
+            <a:r>
+              <a:t>Multi-board topology for FL clients</a:t>
+            </a:r>
+          </a:p>
+        </p:txBody>
+      </p:sp>
+      <p:sp>
+        <p:nvSpPr>
+          <p:cNvPr id="4" name="Rounded Rectangle 3"/>
           <p:cNvSpPr/>
           <p:nvPr/>
         </p:nvSpPr>
         <p:spPr>
           <a:xfrm>
-            <a:off x="502920" y="292608"/>
-            <a:ext cx="2011680" cy="310896"/>
+            <a:off x="1120368" y="1298448"/>
+            <a:ext cx="9950958" cy="5733288"/>
           </a:xfrm>
           <a:prstGeom prst="roundRect">
             <a:avLst/>
           </a:prstGeom>
           <a:solidFill>
-            <a:srgbClr val="008B9A"/>
+            <a:srgbClr val="FFFFFF"/>
           </a:solidFill>
-          <a:ln>
-            <a:noFill/>
+          <a:ln w="12700">
+            <a:solidFill>
+              <a:srgbClr val="B2EBF2"/>
+            </a:solidFill>
           </a:ln>
         </p:spPr>
         <p:style>
@@ -12805,30 +12973,44 @@
           <a:bodyPr rtlCol="0" anchor="ctr"/>
           <a:lstStyle/>
           <a:p>
-            <a:pPr algn="ctr">
-              <a:defRPr sz="1100" b="1">
-                <a:solidFill>
-                  <a:srgbClr val="FFFFFF"/>
-                </a:solidFill>
-                <a:latin typeface="Calibri"/>
-              </a:defRPr>
-            </a:pPr>
-            <a:r>
-              <a:t>THEORY</a:t>
-            </a:r>
-          </a:p>
-        </p:txBody>
-      </p:sp>
-      <p:sp>
-        <p:nvSpPr>
-          <p:cNvPr id="4" name="TextBox 3"/>
+            <a:pPr algn="ctr"/>
+          </a:p>
+        </p:txBody>
+      </p:sp>
+      <p:pic>
+        <p:nvPicPr>
+          <p:cNvPr id="5" name="Picture 4" descr="multiboard-fleet.png"/>
+          <p:cNvPicPr>
+            <a:picLocks noChangeAspect="1"/>
+          </p:cNvPicPr>
+          <p:nvPr/>
+        </p:nvPicPr>
+        <p:blipFill>
+          <a:blip r:embed="rId2"/>
+          <a:stretch>
+            <a:fillRect/>
+          </a:stretch>
+        </p:blipFill>
+        <p:spPr>
+          <a:xfrm>
+            <a:off x="1175232" y="1353312"/>
+            <a:ext cx="9841230" cy="5623560"/>
+          </a:xfrm>
+          <a:prstGeom prst="rect">
+            <a:avLst/>
+          </a:prstGeom>
+        </p:spPr>
+      </p:pic>
+      <p:sp>
+        <p:nvSpPr>
+          <p:cNvPr id="6" name="TextBox 5"/>
           <p:cNvSpPr txBox="1"/>
           <p:nvPr/>
         </p:nvSpPr>
         <p:spPr>
           <a:xfrm>
-            <a:off x="7772400" y="292608"/>
-            <a:ext cx="4114800" cy="411480"/>
+            <a:off x="594360" y="7168896"/>
+            <a:ext cx="10972800" cy="411480"/>
           </a:xfrm>
           <a:prstGeom prst="rect">
             <a:avLst/>
@@ -12841,131 +13023,8 @@
           </a:bodyPr>
           <a:lstStyle/>
           <a:p>
-            <a:pPr algn="r">
-              <a:defRPr sz="1100" b="0">
-                <a:solidFill>
-                  <a:srgbClr val="78909C"/>
-                </a:solidFill>
-                <a:latin typeface="Calibri"/>
-              </a:defRPr>
-            </a:pPr>
-            <a:r>
-              <a:t>Ch.19 · client.py Worker class · async plugin pattern</a:t>
-            </a:r>
-          </a:p>
-        </p:txBody>
-      </p:sp>
-      <p:sp>
-        <p:nvSpPr>
-          <p:cNvPr id="5" name="TextBox 4"/>
-          <p:cNvSpPr txBox="1"/>
-          <p:nvPr/>
-        </p:nvSpPr>
-        <p:spPr>
-          <a:xfrm>
-            <a:off x="594360" y="713232"/>
-            <a:ext cx="10972800" cy="868680"/>
-          </a:xfrm>
-          <a:prstGeom prst="rect">
-            <a:avLst/>
-          </a:prstGeom>
-          <a:noFill/>
-        </p:spPr>
-        <p:txBody>
-          <a:bodyPr wrap="none">
-            <a:spAutoFit/>
-          </a:bodyPr>
-          <a:lstStyle/>
-          <a:p>
             <a:pPr>
-              <a:defRPr sz="2600" b="1">
-                <a:solidFill>
-                  <a:srgbClr val="0D2B45"/>
-                </a:solidFill>
-                <a:latin typeface="Calibri"/>
-              </a:defRPr>
-            </a:pPr>
-            <a:r>
-              <a:t>Client plugin execution flow (Ch.19)</a:t>
-            </a:r>
-          </a:p>
-        </p:txBody>
-      </p:sp>
-      <p:sp>
-        <p:nvSpPr>
-          <p:cNvPr id="6" name="Rounded Rectangle 5"/>
-          <p:cNvSpPr/>
-          <p:nvPr/>
-        </p:nvSpPr>
-        <p:spPr>
-          <a:xfrm>
-            <a:off x="502920" y="1554480"/>
-            <a:ext cx="11155680" cy="4800600"/>
-          </a:xfrm>
-          <a:prstGeom prst="roundRect">
-            <a:avLst/>
-          </a:prstGeom>
-          <a:solidFill>
-            <a:srgbClr val="FFFFFF"/>
-          </a:solidFill>
-          <a:ln w="9525">
-            <a:solidFill>
-              <a:srgbClr val="B2EBF2"/>
-            </a:solidFill>
-          </a:ln>
-        </p:spPr>
-        <p:style>
-          <a:lnRef idx="1">
-            <a:schemeClr val="accent1"/>
-          </a:lnRef>
-          <a:fillRef idx="3">
-            <a:schemeClr val="accent1"/>
-          </a:fillRef>
-          <a:effectRef idx="2">
-            <a:schemeClr val="accent1"/>
-          </a:effectRef>
-          <a:fontRef idx="minor">
-            <a:schemeClr val="lt1"/>
-          </a:fontRef>
-        </p:style>
-        <p:txBody>
-          <a:bodyPr rtlCol="0" anchor="ctr"/>
-          <a:lstStyle/>
-          <a:p>
-            <a:pPr algn="ctr"/>
-          </a:p>
-        </p:txBody>
-      </p:sp>
-      <p:sp>
-        <p:nvSpPr>
-          <p:cNvPr id="7" name="TextBox 6"/>
-          <p:cNvSpPr txBox="1"/>
-          <p:nvPr/>
-        </p:nvSpPr>
-        <p:spPr>
-          <a:xfrm>
-            <a:off x="777240" y="1673352"/>
-            <a:ext cx="10424160" cy="4572000"/>
-          </a:xfrm>
-          <a:prstGeom prst="rect">
-            <a:avLst/>
-          </a:prstGeom>
-          <a:noFill/>
-        </p:spPr>
-        <p:txBody>
-          <a:bodyPr wrap="square">
-            <a:spAutoFit/>
-          </a:bodyPr>
-          <a:lstStyle/>
-          <a:p>
-            <a:pPr>
-              <a:lnSpc>
-                <a:spcPct val="115000"/>
-              </a:lnSpc>
-              <a:spcAft>
-                <a:spcPts val="500"/>
-              </a:spcAft>
-              <a:defRPr sz="1600" b="0">
+              <a:defRPr sz="1200" b="0">
                 <a:solidFill>
                   <a:srgbClr val="37474F"/>
                 </a:solidFill>
@@ -12973,109 +13032,14 @@
               </a:defRPr>
             </a:pPr>
             <a:r>
-              <a:t>▸  Start action launches async Worker — connects to Flower server via gRPC/TCP</a:t>
-            </a:r>
-          </a:p>
-          <a:p>
-            <a:pPr>
-              <a:lnSpc>
-                <a:spcPct val="115000"/>
-              </a:lnSpc>
-              <a:spcAft>
-                <a:spcPts val="500"/>
-              </a:spcAft>
-              <a:defRPr sz="1600" b="0">
-                <a:solidFill>
-                  <a:srgbClr val="37474F"/>
-                </a:solidFill>
-                <a:latin typeface="Calibri"/>
-              </a:defRPr>
-            </a:pPr>
-            <a:r>
-              <a:t>▸  Worker loads local CSV — initializes model with global weights from server</a:t>
-            </a:r>
-          </a:p>
-          <a:p>
-            <a:pPr>
-              <a:lnSpc>
-                <a:spcPct val="115000"/>
-              </a:lnSpc>
-              <a:spcAft>
-                <a:spcPts val="500"/>
-              </a:spcAft>
-              <a:defRPr sz="1600" b="0">
-                <a:solidFill>
-                  <a:srgbClr val="37474F"/>
-                </a:solidFill>
-                <a:latin typeface="Calibri"/>
-              </a:defRPr>
-            </a:pPr>
-            <a:r>
-              <a:t>▸  Local training: N local epochs on board CPU — sends weight delta to server</a:t>
-            </a:r>
-          </a:p>
-          <a:p>
-            <a:pPr>
-              <a:lnSpc>
-                <a:spcPct val="115000"/>
-              </a:lnSpc>
-              <a:spcAft>
-                <a:spcPts val="500"/>
-              </a:spcAft>
-              <a:defRPr sz="1600" b="0">
-                <a:solidFill>
-                  <a:srgbClr val="37474F"/>
-                </a:solidFill>
-                <a:latin typeface="Calibri"/>
-              </a:defRPr>
-            </a:pPr>
-            <a:r>
-              <a:t>▸  Server aggregates all 3 client updates — broadcasts new global weights</a:t>
-            </a:r>
-          </a:p>
-          <a:p>
-            <a:pPr>
-              <a:lnSpc>
-                <a:spcPct val="115000"/>
-              </a:lnSpc>
-              <a:spcAft>
-                <a:spcPts val="500"/>
-              </a:spcAft>
-              <a:defRPr sz="1600" b="0">
-                <a:solidFill>
-                  <a:srgbClr val="37474F"/>
-                </a:solidFill>
-                <a:latin typeface="Calibri"/>
-              </a:defRPr>
-            </a:pPr>
-            <a:r>
-              <a:t>▸  Round 2: clients receive updated global model — repeat local training</a:t>
-            </a:r>
-          </a:p>
-          <a:p>
-            <a:pPr>
-              <a:lnSpc>
-                <a:spcPct val="115000"/>
-              </a:lnSpc>
-              <a:spcAft>
-                <a:spcPts val="500"/>
-              </a:spcAft>
-              <a:defRPr sz="1600" b="0">
-                <a:solidFill>
-                  <a:srgbClr val="37474F"/>
-                </a:solidFill>
-                <a:latin typeface="Calibri"/>
-              </a:defRPr>
-            </a:pPr>
-            <a:r>
-              <a:t>▸  Stop: Interrupt plugin on each board after rounds complete — clean shutdown</a:t>
-            </a:r>
-          </a:p>
-        </p:txBody>
-      </p:sp>
-      <p:sp>
-        <p:nvSpPr>
-          <p:cNvPr id="8" name="Rectangle 7"/>
+              <a:t>3 LR clients :1474/:1475/:1476 → Flower server on VM host :8087 (not on a board)</a:t>
+            </a:r>
+          </a:p>
+        </p:txBody>
+      </p:sp>
+      <p:sp>
+        <p:nvSpPr>
+          <p:cNvPr id="7" name="Rectangle 6"/>
           <p:cNvSpPr/>
           <p:nvPr/>
         </p:nvSpPr>
@@ -13118,7 +13082,7 @@
       </p:sp>
       <p:sp>
         <p:nvSpPr>
-          <p:cNvPr id="9" name="TextBox 8"/>
+          <p:cNvPr id="8" name="TextBox 7"/>
           <p:cNvSpPr txBox="1"/>
           <p:nvPr/>
         </p:nvSpPr>
@@ -13154,7 +13118,7 @@
       </p:sp>
       <p:sp>
         <p:nvSpPr>
-          <p:cNvPr id="10" name="TextBox 9"/>
+          <p:cNvPr id="9" name="TextBox 8"/>
           <p:cNvSpPr txBox="1"/>
           <p:nvPr/>
         </p:nvSpPr>
@@ -13183,7 +13147,7 @@
               </a:defRPr>
             </a:pPr>
             <a:r>
-              <a:t>Theory</a:t>
+              <a:t>Diagram</a:t>
             </a:r>
           </a:p>
         </p:txBody>
@@ -13202,7 +13166,7 @@
     <p:bg>
       <p:bgPr>
         <a:solidFill>
-          <a:srgbClr val="F0F9FA"/>
+          <a:srgbClr val="F8FAFC"/>
         </a:solidFill>
         <a:effectLst/>
       </p:bgPr>
@@ -13223,7 +13187,7 @@
         <p:spPr>
           <a:xfrm>
             <a:off x="0" y="0"/>
-            <a:ext cx="109728" cy="6858000"/>
+            <a:ext cx="12191695" cy="54864"/>
           </a:xfrm>
           <a:prstGeom prst="rect">
             <a:avLst/>
@@ -13259,67 +13223,14 @@
       </p:sp>
       <p:sp>
         <p:nvSpPr>
-          <p:cNvPr id="3" name="Rounded Rectangle 2"/>
-          <p:cNvSpPr/>
-          <p:nvPr/>
-        </p:nvSpPr>
-        <p:spPr>
-          <a:xfrm>
-            <a:off x="502920" y="292608"/>
-            <a:ext cx="2011680" cy="310896"/>
-          </a:xfrm>
-          <a:prstGeom prst="roundRect">
-            <a:avLst/>
-          </a:prstGeom>
-          <a:solidFill>
-            <a:srgbClr val="008B9A"/>
-          </a:solidFill>
-          <a:ln>
-            <a:noFill/>
-          </a:ln>
-        </p:spPr>
-        <p:style>
-          <a:lnRef idx="1">
-            <a:schemeClr val="accent1"/>
-          </a:lnRef>
-          <a:fillRef idx="3">
-            <a:schemeClr val="accent1"/>
-          </a:fillRef>
-          <a:effectRef idx="2">
-            <a:schemeClr val="accent1"/>
-          </a:effectRef>
-          <a:fontRef idx="minor">
-            <a:schemeClr val="lt1"/>
-          </a:fontRef>
-        </p:style>
-        <p:txBody>
-          <a:bodyPr rtlCol="0" anchor="ctr"/>
-          <a:lstStyle/>
-          <a:p>
-            <a:pPr algn="ctr">
-              <a:defRPr sz="1100" b="1">
-                <a:solidFill>
-                  <a:srgbClr val="FFFFFF"/>
-                </a:solidFill>
-                <a:latin typeface="Calibri"/>
-              </a:defRPr>
-            </a:pPr>
-            <a:r>
-              <a:t>THEORY</a:t>
-            </a:r>
-          </a:p>
-        </p:txBody>
-      </p:sp>
-      <p:sp>
-        <p:nvSpPr>
-          <p:cNvPr id="4" name="TextBox 3"/>
+          <p:cNvPr id="3" name="TextBox 2"/>
           <p:cNvSpPr txBox="1"/>
           <p:nvPr/>
         </p:nvSpPr>
         <p:spPr>
           <a:xfrm>
-            <a:off x="7772400" y="292608"/>
-            <a:ext cx="4114800" cy="411480"/>
+            <a:off x="594360" y="502920"/>
+            <a:ext cx="10972800" cy="868680"/>
           </a:xfrm>
           <a:prstGeom prst="rect">
             <a:avLst/>
@@ -13332,44 +13243,8 @@
           </a:bodyPr>
           <a:lstStyle/>
           <a:p>
-            <a:pPr algn="r">
-              <a:defRPr sz="1100" b="0">
-                <a:solidFill>
-                  <a:srgbClr val="78909C"/>
-                </a:solidFill>
-                <a:latin typeface="Calibri"/>
-              </a:defRPr>
-            </a:pPr>
-            <a:r>
-              <a:t>training/experiments/federated-learning/ · validate-lab-fl.sh</a:t>
-            </a:r>
-          </a:p>
-        </p:txBody>
-      </p:sp>
-      <p:sp>
-        <p:nvSpPr>
-          <p:cNvPr id="5" name="TextBox 4"/>
-          <p:cNvSpPr txBox="1"/>
-          <p:nvPr/>
-        </p:nvSpPr>
-        <p:spPr>
-          <a:xfrm>
-            <a:off x="594360" y="713232"/>
-            <a:ext cx="10972800" cy="868680"/>
-          </a:xfrm>
-          <a:prstGeom prst="rect">
-            <a:avLst/>
-          </a:prstGeom>
-          <a:noFill/>
-        </p:spPr>
-        <p:txBody>
-          <a:bodyPr wrap="none">
-            <a:spAutoFit/>
-          </a:bodyPr>
-          <a:lstStyle/>
-          <a:p>
             <a:pPr>
-              <a:defRPr sz="2600" b="1">
+              <a:defRPr sz="3000" b="1">
                 <a:solidFill>
                   <a:srgbClr val="0D2B45"/>
                 </a:solidFill>
@@ -13377,21 +13252,21 @@
               </a:defRPr>
             </a:pPr>
             <a:r>
-              <a:t>Troubleshooting FL connectivity (Ch.19 lab)</a:t>
-            </a:r>
-          </a:p>
-        </p:txBody>
-      </p:sp>
-      <p:sp>
-        <p:nvSpPr>
-          <p:cNvPr id="6" name="Rounded Rectangle 5"/>
+              <a:t>Live topology — federated failure-prediction dashboard</a:t>
+            </a:r>
+          </a:p>
+        </p:txBody>
+      </p:sp>
+      <p:sp>
+        <p:nvSpPr>
+          <p:cNvPr id="4" name="Rounded Rectangle 3"/>
           <p:cNvSpPr/>
           <p:nvPr/>
         </p:nvSpPr>
         <p:spPr>
           <a:xfrm>
-            <a:off x="502920" y="1554480"/>
-            <a:ext cx="11155680" cy="4800600"/>
+            <a:off x="502920" y="1344168"/>
+            <a:ext cx="11155680" cy="5010912"/>
           </a:xfrm>
           <a:prstGeom prst="roundRect">
             <a:avLst/>
@@ -13429,14 +13304,14 @@
       </p:sp>
       <p:sp>
         <p:nvSpPr>
-          <p:cNvPr id="7" name="TextBox 6"/>
+          <p:cNvPr id="5" name="TextBox 4"/>
           <p:cNvSpPr txBox="1"/>
           <p:nvPr/>
         </p:nvSpPr>
         <p:spPr>
           <a:xfrm>
-            <a:off x="777240" y="1673352"/>
-            <a:ext cx="10424160" cy="4572000"/>
+            <a:off x="777240" y="1463040"/>
+            <a:ext cx="10424160" cy="4782312"/>
           </a:xfrm>
           <a:prstGeom prst="rect">
             <a:avLst/>
@@ -13454,9 +13329,9 @@
                 <a:spcPct val="115000"/>
               </a:lnSpc>
               <a:spcAft>
-                <a:spcPts val="500"/>
+                <a:spcPts val="800"/>
               </a:spcAft>
-              <a:defRPr sz="1600" b="0">
+              <a:defRPr sz="1900" b="0">
                 <a:solidFill>
                   <a:srgbClr val="37474F"/>
                 </a:solidFill>
@@ -13464,7 +13339,7 @@
               </a:defRPr>
             </a:pPr>
             <a:r>
-              <a:t>▸  Clients cannot connect: verify Flower server IP reachable from LR container network</a:t>
+              <a:t>▸  Screenshot not available</a:t>
             </a:r>
           </a:p>
           <a:p>
@@ -13473,9 +13348,9 @@
                 <a:spcPct val="115000"/>
               </a:lnSpc>
               <a:spcAft>
-                <a:spcPts val="500"/>
+                <a:spcPts val="800"/>
               </a:spcAft>
-              <a:defRPr sz="1600" b="0">
+              <a:defRPr sz="1900" b="0">
                 <a:solidFill>
                   <a:srgbClr val="37474F"/>
                 </a:solidFill>
@@ -13483,90 +13358,14 @@
               </a:defRPr>
             </a:pPr>
             <a:r>
-              <a:t>▸  Use docker bridge gateway IP if {{VM_IP}}:8080 not reachable from inside containers</a:t>
-            </a:r>
-          </a:p>
-          <a:p>
-            <a:pPr>
-              <a:lnSpc>
-                <a:spcPct val="115000"/>
-              </a:lnSpc>
-              <a:spcAft>
-                <a:spcPts val="500"/>
-              </a:spcAft>
-              <a:defRPr sz="1600" b="0">
-                <a:solidFill>
-                  <a:srgbClr val="37474F"/>
-                </a:solidFill>
-                <a:latin typeface="Calibri"/>
-              </a:defRPr>
-            </a:pPr>
-            <a:r>
-              <a:t>▸  Server stuck waiting: ensure all 3 Start actions fired — minimum client count not met</a:t>
-            </a:r>
-          </a:p>
-          <a:p>
-            <a:pPr>
-              <a:lnSpc>
-                <a:spcPct val="115000"/>
-              </a:lnSpc>
-              <a:spcAft>
-                <a:spcPts val="500"/>
-              </a:spcAft>
-              <a:defRPr sz="1600" b="0">
-                <a:solidFill>
-                  <a:srgbClr val="37474F"/>
-                </a:solidFill>
-                <a:latin typeface="Calibri"/>
-              </a:defRPr>
-            </a:pPr>
-            <a:r>
-              <a:t>▸  OOM on board: reduce local epochs in client.py params — edge boards have limited RAM</a:t>
-            </a:r>
-          </a:p>
-          <a:p>
-            <a:pPr>
-              <a:lnSpc>
-                <a:spcPct val="115000"/>
-              </a:lnSpc>
-              <a:spcAft>
-                <a:spcPts val="500"/>
-              </a:spcAft>
-              <a:defRPr sz="1600" b="0">
-                <a:solidFill>
-                  <a:srgbClr val="37474F"/>
-                </a:solidFill>
-                <a:latin typeface="Calibri"/>
-              </a:defRPr>
-            </a:pPr>
-            <a:r>
-              <a:t>▸  Plugin error on Start: check client.py syntax and flwr/torch installed in LR image</a:t>
-            </a:r>
-          </a:p>
-          <a:p>
-            <a:pPr>
-              <a:lnSpc>
-                <a:spcPct val="115000"/>
-              </a:lnSpc>
-              <a:spcAft>
-                <a:spcPts val="500"/>
-              </a:spcAft>
-              <a:defRPr sz="1600" b="0">
-                <a:solidFill>
-                  <a:srgbClr val="37474F"/>
-                </a:solidFill>
-                <a:latin typeface="Calibri"/>
-              </a:defRPr>
-            </a:pPr>
-            <a:r>
-              <a:t>▸  validate-lab-fl.sh automates connectivity and round-completion checks</a:t>
-            </a:r>
-          </a:p>
-        </p:txBody>
-      </p:sp>
-      <p:sp>
-        <p:nvSpPr>
-          <p:cNvPr id="8" name="Rectangle 7"/>
+              <a:t>▸  Vibration/temperature/current models aggregate without sharing raw CSVs</a:t>
+            </a:r>
+          </a:p>
+        </p:txBody>
+      </p:sp>
+      <p:sp>
+        <p:nvSpPr>
+          <p:cNvPr id="6" name="Rectangle 5"/>
           <p:cNvSpPr/>
           <p:nvPr/>
         </p:nvSpPr>
@@ -13609,7 +13408,7 @@
       </p:sp>
       <p:sp>
         <p:nvSpPr>
-          <p:cNvPr id="9" name="TextBox 8"/>
+          <p:cNvPr id="7" name="TextBox 6"/>
           <p:cNvSpPr txBox="1"/>
           <p:nvPr/>
         </p:nvSpPr>
@@ -13639,42 +13438,6 @@
             </a:pPr>
             <a:r>
               <a:t>Assembling Smart CPS · Stack4Things Training</a:t>
-            </a:r>
-          </a:p>
-        </p:txBody>
-      </p:sp>
-      <p:sp>
-        <p:nvSpPr>
-          <p:cNvPr id="10" name="TextBox 9"/>
-          <p:cNvSpPr txBox="1"/>
-          <p:nvPr/>
-        </p:nvSpPr>
-        <p:spPr>
-          <a:xfrm>
-            <a:off x="9326880" y="6455664"/>
-            <a:ext cx="2377440" cy="320040"/>
-          </a:xfrm>
-          <a:prstGeom prst="rect">
-            <a:avLst/>
-          </a:prstGeom>
-          <a:noFill/>
-        </p:spPr>
-        <p:txBody>
-          <a:bodyPr wrap="none">
-            <a:spAutoFit/>
-          </a:bodyPr>
-          <a:lstStyle/>
-          <a:p>
-            <a:pPr algn="r">
-              <a:defRPr sz="900" b="1">
-                <a:solidFill>
-                  <a:srgbClr val="008B9A"/>
-                </a:solidFill>
-                <a:latin typeface="Calibri"/>
-              </a:defRPr>
-            </a:pPr>
-            <a:r>
-              <a:t>Theory</a:t>
             </a:r>
           </a:p>
         </p:txBody>
@@ -13693,7 +13456,7 @@
     <p:bg>
       <p:bgPr>
         <a:solidFill>
-          <a:srgbClr val="F0F9FA"/>
+          <a:srgbClr val="F8FAFC"/>
         </a:solidFill>
         <a:effectLst/>
       </p:bgPr>
@@ -13714,7 +13477,7 @@
         <p:spPr>
           <a:xfrm>
             <a:off x="0" y="0"/>
-            <a:ext cx="109728" cy="6858000"/>
+            <a:ext cx="12191695" cy="54864"/>
           </a:xfrm>
           <a:prstGeom prst="rect">
             <a:avLst/>
@@ -13750,67 +13513,14 @@
       </p:sp>
       <p:sp>
         <p:nvSpPr>
-          <p:cNvPr id="3" name="Rounded Rectangle 2"/>
-          <p:cNvSpPr/>
-          <p:nvPr/>
-        </p:nvSpPr>
-        <p:spPr>
-          <a:xfrm>
-            <a:off x="502920" y="292608"/>
-            <a:ext cx="2011680" cy="310896"/>
-          </a:xfrm>
-          <a:prstGeom prst="roundRect">
-            <a:avLst/>
-          </a:prstGeom>
-          <a:solidFill>
-            <a:srgbClr val="008B9A"/>
-          </a:solidFill>
-          <a:ln>
-            <a:noFill/>
-          </a:ln>
-        </p:spPr>
-        <p:style>
-          <a:lnRef idx="1">
-            <a:schemeClr val="accent1"/>
-          </a:lnRef>
-          <a:fillRef idx="3">
-            <a:schemeClr val="accent1"/>
-          </a:fillRef>
-          <a:effectRef idx="2">
-            <a:schemeClr val="accent1"/>
-          </a:effectRef>
-          <a:fontRef idx="minor">
-            <a:schemeClr val="lt1"/>
-          </a:fontRef>
-        </p:style>
-        <p:txBody>
-          <a:bodyPr rtlCol="0" anchor="ctr"/>
-          <a:lstStyle/>
-          <a:p>
-            <a:pPr algn="ctr">
-              <a:defRPr sz="1100" b="1">
-                <a:solidFill>
-                  <a:srgbClr val="FFFFFF"/>
-                </a:solidFill>
-                <a:latin typeface="Calibri"/>
-              </a:defRPr>
-            </a:pPr>
-            <a:r>
-              <a:t>THEORY</a:t>
-            </a:r>
-          </a:p>
-        </p:txBody>
-      </p:sp>
-      <p:sp>
-        <p:nvSpPr>
-          <p:cNvPr id="4" name="TextBox 3"/>
+          <p:cNvPr id="3" name="TextBox 2"/>
           <p:cNvSpPr txBox="1"/>
           <p:nvPr/>
         </p:nvSpPr>
         <p:spPr>
           <a:xfrm>
-            <a:off x="7772400" y="292608"/>
-            <a:ext cx="4114800" cy="411480"/>
+            <a:off x="594360" y="502920"/>
+            <a:ext cx="10972800" cy="868680"/>
           </a:xfrm>
           <a:prstGeom prst="rect">
             <a:avLst/>
@@ -13823,44 +13533,8 @@
           </a:bodyPr>
           <a:lstStyle/>
           <a:p>
-            <a:pPr algn="r">
-              <a:defRPr sz="1100" b="0">
-                <a:solidFill>
-                  <a:srgbClr val="78909C"/>
-                </a:solidFill>
-                <a:latin typeface="Calibri"/>
-              </a:defRPr>
-            </a:pPr>
-            <a:r>
-              <a:t>Ch.19 + Ch.11 Type 4 · SLICES RI FL experiment pattern</a:t>
-            </a:r>
-          </a:p>
-        </p:txBody>
-      </p:sp>
-      <p:sp>
-        <p:nvSpPr>
-          <p:cNvPr id="5" name="TextBox 4"/>
-          <p:cNvSpPr txBox="1"/>
-          <p:nvPr/>
-        </p:nvSpPr>
-        <p:spPr>
-          <a:xfrm>
-            <a:off x="594360" y="713232"/>
-            <a:ext cx="10972800" cy="868680"/>
-          </a:xfrm>
-          <a:prstGeom prst="rect">
-            <a:avLst/>
-          </a:prstGeom>
-          <a:noFill/>
-        </p:spPr>
-        <p:txBody>
-          <a:bodyPr wrap="none">
-            <a:spAutoFit/>
-          </a:bodyPr>
-          <a:lstStyle/>
-          <a:p>
             <a:pPr>
-              <a:defRPr sz="2600" b="1">
+              <a:defRPr sz="3000" b="1">
                 <a:solidFill>
                   <a:srgbClr val="0D2B45"/>
                 </a:solidFill>
@@ -13868,21 +13542,21 @@
               </a:defRPr>
             </a:pPr>
             <a:r>
-              <a:t>FL in the Cloud Continuum research context (Ch.19 + Ch.11)</a:t>
-            </a:r>
-          </a:p>
-        </p:txBody>
-      </p:sp>
-      <p:sp>
-        <p:nvSpPr>
-          <p:cNvPr id="6" name="Rounded Rectangle 5"/>
+              <a:t>Start FL clients on all three boards</a:t>
+            </a:r>
+          </a:p>
+        </p:txBody>
+      </p:sp>
+      <p:sp>
+        <p:nvSpPr>
+          <p:cNvPr id="4" name="Rounded Rectangle 3"/>
           <p:cNvSpPr/>
           <p:nvPr/>
         </p:nvSpPr>
         <p:spPr>
           <a:xfrm>
-            <a:off x="502920" y="1554480"/>
-            <a:ext cx="11155680" cy="4800600"/>
+            <a:off x="502920" y="1344168"/>
+            <a:ext cx="11155680" cy="5010912"/>
           </a:xfrm>
           <a:prstGeom prst="roundRect">
             <a:avLst/>
@@ -13920,14 +13594,14 @@
       </p:sp>
       <p:sp>
         <p:nvSpPr>
-          <p:cNvPr id="7" name="TextBox 6"/>
+          <p:cNvPr id="5" name="TextBox 4"/>
           <p:cNvSpPr txBox="1"/>
           <p:nvPr/>
         </p:nvSpPr>
         <p:spPr>
           <a:xfrm>
-            <a:off x="777240" y="1673352"/>
-            <a:ext cx="10424160" cy="4572000"/>
+            <a:off x="777240" y="1463040"/>
+            <a:ext cx="10424160" cy="4782312"/>
           </a:xfrm>
           <a:prstGeom prst="rect">
             <a:avLst/>
@@ -13945,9 +13619,9 @@
                 <a:spcPct val="115000"/>
               </a:lnSpc>
               <a:spcAft>
-                <a:spcPts val="500"/>
+                <a:spcPts val="800"/>
               </a:spcAft>
-              <a:defRPr sz="1600" b="0">
+              <a:defRPr sz="1900" b="0">
                 <a:solidFill>
                   <a:srgbClr val="37474F"/>
                 </a:solidFill>
@@ -13955,7 +13629,7 @@
               </a:defRPr>
             </a:pPr>
             <a:r>
-              <a:t>▸  Ch.11 Type 4 experiments: AI/ML workflows including federated learning at edge</a:t>
+              <a:t>▸  With Flower server running: Federated Learning panel → Start all clients</a:t>
             </a:r>
           </a:p>
           <a:p>
@@ -13964,9 +13638,9 @@
                 <a:spcPct val="115000"/>
               </a:lnSpc>
               <a:spcAft>
-                <a:spcPts val="500"/>
+                <a:spcPts val="800"/>
               </a:spcAft>
-              <a:defRPr sz="1600" b="0">
+              <a:defRPr sz="1900" b="0">
                 <a:solidFill>
                   <a:srgbClr val="37474F"/>
                 </a:solidFill>
@@ -13974,7 +13648,7 @@
               </a:defRPr>
             </a:pPr>
             <a:r>
-              <a:t>▸  SLICES RI multi-site FL: clients on different European sites, server on cloud slice</a:t>
+              <a:t>▸  Or Start fl-client individually per board from the panel</a:t>
             </a:r>
           </a:p>
           <a:p>
@@ -13983,9 +13657,9 @@
                 <a:spcPct val="115000"/>
               </a:lnSpc>
               <a:spcAft>
-                <a:spcPts val="500"/>
+                <a:spcPts val="800"/>
               </a:spcAft>
-              <a:defRPr sz="1600" b="0">
+              <a:defRPr sz="1900" b="0">
                 <a:solidFill>
                   <a:srgbClr val="37474F"/>
                 </a:solidFill>
@@ -13993,7 +13667,7 @@
               </a:defRPr>
             </a:pPr>
             <a:r>
-              <a:t>▸  S4T IoTronic inject scales FL client deployment — same pattern as Module D fleet ops</a:t>
+              <a:t>▸  Watch live topology: clients connect → rounds advance → loss/accuracy update</a:t>
             </a:r>
           </a:p>
           <a:p>
@@ -14002,9 +13676,9 @@
                 <a:spcPct val="115000"/>
               </a:lnSpc>
               <a:spcAft>
-                <a:spcPts val="500"/>
+                <a:spcPts val="800"/>
               </a:spcAft>
-              <a:defRPr sz="1600" b="0">
+              <a:defRPr sz="1900" b="0">
                 <a:solidFill>
                   <a:srgbClr val="37474F"/>
                 </a:solidFill>
@@ -14012,52 +13686,14 @@
               </a:defRPr>
             </a:pPr>
             <a:r>
-              <a:t>▸  Crossplane Workflow CRD could declare FL experiment: server + N client plugins + datasets</a:t>
-            </a:r>
-          </a:p>
-          <a:p>
-            <a:pPr>
-              <a:lnSpc>
-                <a:spcPct val="115000"/>
-              </a:lnSpc>
-              <a:spcAft>
-                <a:spcPts val="500"/>
-              </a:spcAft>
-              <a:defRPr sz="1600" b="0">
-                <a:solidFill>
-                  <a:srgbClr val="37474F"/>
-                </a:solidFill>
-                <a:latin typeface="Calibri"/>
-              </a:defRPr>
-            </a:pPr>
-            <a:r>
-              <a:t>▸  Edge-board FL preserves data sovereignty requirements of SLICES partner institutions</a:t>
-            </a:r>
-          </a:p>
-          <a:p>
-            <a:pPr>
-              <a:lnSpc>
-                <a:spcPct val="115000"/>
-              </a:lnSpc>
-              <a:spcAft>
-                <a:spcPts val="500"/>
-              </a:spcAft>
-              <a:defRPr sz="1600" b="0">
-                <a:solidFill>
-                  <a:srgbClr val="37474F"/>
-                </a:solidFill>
-                <a:latin typeface="Calibri"/>
-              </a:defRPr>
-            </a:pPr>
-            <a:r>
-              <a:t>▸  Lab on {{VM_IP}} is minimal horizontal FL — production scales to cross-silo federation</a:t>
-            </a:r>
-          </a:p>
-        </p:txBody>
-      </p:sp>
-      <p:sp>
-        <p:nvSpPr>
-          <p:cNvPr id="8" name="Rectangle 7"/>
+              <a:t>▸  LR logs: docker logs lightning-rod-2 — local training progress messages</a:t>
+            </a:r>
+          </a:p>
+        </p:txBody>
+      </p:sp>
+      <p:sp>
+        <p:nvSpPr>
+          <p:cNvPr id="6" name="Rectangle 5"/>
           <p:cNvSpPr/>
           <p:nvPr/>
         </p:nvSpPr>
@@ -14100,7 +13736,7 @@
       </p:sp>
       <p:sp>
         <p:nvSpPr>
-          <p:cNvPr id="9" name="TextBox 8"/>
+          <p:cNvPr id="7" name="TextBox 6"/>
           <p:cNvSpPr txBox="1"/>
           <p:nvPr/>
         </p:nvSpPr>
@@ -14130,42 +13766,6 @@
             </a:pPr>
             <a:r>
               <a:t>Assembling Smart CPS · Stack4Things Training</a:t>
-            </a:r>
-          </a:p>
-        </p:txBody>
-      </p:sp>
-      <p:sp>
-        <p:nvSpPr>
-          <p:cNvPr id="10" name="TextBox 9"/>
-          <p:cNvSpPr txBox="1"/>
-          <p:nvPr/>
-        </p:nvSpPr>
-        <p:spPr>
-          <a:xfrm>
-            <a:off x="9326880" y="6455664"/>
-            <a:ext cx="2377440" cy="320040"/>
-          </a:xfrm>
-          <a:prstGeom prst="rect">
-            <a:avLst/>
-          </a:prstGeom>
-          <a:noFill/>
-        </p:spPr>
-        <p:txBody>
-          <a:bodyPr wrap="none">
-            <a:spAutoFit/>
-          </a:bodyPr>
-          <a:lstStyle/>
-          <a:p>
-            <a:pPr algn="r">
-              <a:defRPr sz="900" b="1">
-                <a:solidFill>
-                  <a:srgbClr val="008B9A"/>
-                </a:solidFill>
-                <a:latin typeface="Calibri"/>
-              </a:defRPr>
-            </a:pPr>
-            <a:r>
-              <a:t>Theory</a:t>
             </a:r>
           </a:p>
         </p:txBody>
@@ -14675,6 +14275,1479 @@
     <p:bg>
       <p:bgPr>
         <a:solidFill>
+          <a:srgbClr val="F0F9FA"/>
+        </a:solidFill>
+        <a:effectLst/>
+      </p:bgPr>
+    </p:bg>
+    <p:spTree>
+      <p:nvGrpSpPr>
+        <p:cNvPr id="1" name=""/>
+        <p:cNvGrpSpPr/>
+        <p:nvPr/>
+      </p:nvGrpSpPr>
+      <p:grpSpPr/>
+      <p:sp>
+        <p:nvSpPr>
+          <p:cNvPr id="2" name="Rectangle 1"/>
+          <p:cNvSpPr/>
+          <p:nvPr/>
+        </p:nvSpPr>
+        <p:spPr>
+          <a:xfrm>
+            <a:off x="0" y="0"/>
+            <a:ext cx="109728" cy="6858000"/>
+          </a:xfrm>
+          <a:prstGeom prst="rect">
+            <a:avLst/>
+          </a:prstGeom>
+          <a:solidFill>
+            <a:srgbClr val="008B9A"/>
+          </a:solidFill>
+          <a:ln>
+            <a:noFill/>
+          </a:ln>
+        </p:spPr>
+        <p:style>
+          <a:lnRef idx="1">
+            <a:schemeClr val="accent1"/>
+          </a:lnRef>
+          <a:fillRef idx="3">
+            <a:schemeClr val="accent1"/>
+          </a:fillRef>
+          <a:effectRef idx="2">
+            <a:schemeClr val="accent1"/>
+          </a:effectRef>
+          <a:fontRef idx="minor">
+            <a:schemeClr val="lt1"/>
+          </a:fontRef>
+        </p:style>
+        <p:txBody>
+          <a:bodyPr rtlCol="0" anchor="ctr"/>
+          <a:lstStyle/>
+          <a:p>
+            <a:pPr algn="ctr"/>
+          </a:p>
+        </p:txBody>
+      </p:sp>
+      <p:sp>
+        <p:nvSpPr>
+          <p:cNvPr id="3" name="Rounded Rectangle 2"/>
+          <p:cNvSpPr/>
+          <p:nvPr/>
+        </p:nvSpPr>
+        <p:spPr>
+          <a:xfrm>
+            <a:off x="502920" y="292608"/>
+            <a:ext cx="2011680" cy="310896"/>
+          </a:xfrm>
+          <a:prstGeom prst="roundRect">
+            <a:avLst/>
+          </a:prstGeom>
+          <a:solidFill>
+            <a:srgbClr val="008B9A"/>
+          </a:solidFill>
+          <a:ln>
+            <a:noFill/>
+          </a:ln>
+        </p:spPr>
+        <p:style>
+          <a:lnRef idx="1">
+            <a:schemeClr val="accent1"/>
+          </a:lnRef>
+          <a:fillRef idx="3">
+            <a:schemeClr val="accent1"/>
+          </a:fillRef>
+          <a:effectRef idx="2">
+            <a:schemeClr val="accent1"/>
+          </a:effectRef>
+          <a:fontRef idx="minor">
+            <a:schemeClr val="lt1"/>
+          </a:fontRef>
+        </p:style>
+        <p:txBody>
+          <a:bodyPr rtlCol="0" anchor="ctr"/>
+          <a:lstStyle/>
+          <a:p>
+            <a:pPr algn="ctr">
+              <a:defRPr sz="1100" b="1">
+                <a:solidFill>
+                  <a:srgbClr val="FFFFFF"/>
+                </a:solidFill>
+                <a:latin typeface="Calibri"/>
+              </a:defRPr>
+            </a:pPr>
+            <a:r>
+              <a:t>THEORY</a:t>
+            </a:r>
+          </a:p>
+        </p:txBody>
+      </p:sp>
+      <p:sp>
+        <p:nvSpPr>
+          <p:cNvPr id="4" name="TextBox 3"/>
+          <p:cNvSpPr txBox="1"/>
+          <p:nvPr/>
+        </p:nvSpPr>
+        <p:spPr>
+          <a:xfrm>
+            <a:off x="7772400" y="292608"/>
+            <a:ext cx="4114800" cy="411480"/>
+          </a:xfrm>
+          <a:prstGeom prst="rect">
+            <a:avLst/>
+          </a:prstGeom>
+          <a:noFill/>
+        </p:spPr>
+        <p:txBody>
+          <a:bodyPr wrap="none">
+            <a:spAutoFit/>
+          </a:bodyPr>
+          <a:lstStyle/>
+          <a:p>
+            <a:pPr algn="r">
+              <a:defRPr sz="1100" b="0">
+                <a:solidFill>
+                  <a:srgbClr val="78909C"/>
+                </a:solidFill>
+                <a:latin typeface="Calibri"/>
+              </a:defRPr>
+            </a:pPr>
+            <a:r>
+              <a:t>Ch.19 · fl_client_plugin.py Worker + HeartClient · async plugin patter</a:t>
+            </a:r>
+          </a:p>
+        </p:txBody>
+      </p:sp>
+      <p:sp>
+        <p:nvSpPr>
+          <p:cNvPr id="5" name="TextBox 4"/>
+          <p:cNvSpPr txBox="1"/>
+          <p:nvPr/>
+        </p:nvSpPr>
+        <p:spPr>
+          <a:xfrm>
+            <a:off x="594360" y="713232"/>
+            <a:ext cx="10972800" cy="868680"/>
+          </a:xfrm>
+          <a:prstGeom prst="rect">
+            <a:avLst/>
+          </a:prstGeom>
+          <a:noFill/>
+        </p:spPr>
+        <p:txBody>
+          <a:bodyPr wrap="none">
+            <a:spAutoFit/>
+          </a:bodyPr>
+          <a:lstStyle/>
+          <a:p>
+            <a:pPr>
+              <a:defRPr sz="2600" b="1">
+                <a:solidFill>
+                  <a:srgbClr val="0D2B45"/>
+                </a:solidFill>
+                <a:latin typeface="Calibri"/>
+              </a:defRPr>
+            </a:pPr>
+            <a:r>
+              <a:t>Client plugin execution flow (Ch.19)</a:t>
+            </a:r>
+          </a:p>
+        </p:txBody>
+      </p:sp>
+      <p:sp>
+        <p:nvSpPr>
+          <p:cNvPr id="6" name="Rounded Rectangle 5"/>
+          <p:cNvSpPr/>
+          <p:nvPr/>
+        </p:nvSpPr>
+        <p:spPr>
+          <a:xfrm>
+            <a:off x="502920" y="1554480"/>
+            <a:ext cx="11155680" cy="4800600"/>
+          </a:xfrm>
+          <a:prstGeom prst="roundRect">
+            <a:avLst/>
+          </a:prstGeom>
+          <a:solidFill>
+            <a:srgbClr val="FFFFFF"/>
+          </a:solidFill>
+          <a:ln w="9525">
+            <a:solidFill>
+              <a:srgbClr val="B2EBF2"/>
+            </a:solidFill>
+          </a:ln>
+        </p:spPr>
+        <p:style>
+          <a:lnRef idx="1">
+            <a:schemeClr val="accent1"/>
+          </a:lnRef>
+          <a:fillRef idx="3">
+            <a:schemeClr val="accent1"/>
+          </a:fillRef>
+          <a:effectRef idx="2">
+            <a:schemeClr val="accent1"/>
+          </a:effectRef>
+          <a:fontRef idx="minor">
+            <a:schemeClr val="lt1"/>
+          </a:fontRef>
+        </p:style>
+        <p:txBody>
+          <a:bodyPr rtlCol="0" anchor="ctr"/>
+          <a:lstStyle/>
+          <a:p>
+            <a:pPr algn="ctr"/>
+          </a:p>
+        </p:txBody>
+      </p:sp>
+      <p:sp>
+        <p:nvSpPr>
+          <p:cNvPr id="7" name="TextBox 6"/>
+          <p:cNvSpPr txBox="1"/>
+          <p:nvPr/>
+        </p:nvSpPr>
+        <p:spPr>
+          <a:xfrm>
+            <a:off x="777240" y="1673352"/>
+            <a:ext cx="10424160" cy="4572000"/>
+          </a:xfrm>
+          <a:prstGeom prst="rect">
+            <a:avLst/>
+          </a:prstGeom>
+          <a:noFill/>
+        </p:spPr>
+        <p:txBody>
+          <a:bodyPr wrap="square">
+            <a:spAutoFit/>
+          </a:bodyPr>
+          <a:lstStyle/>
+          <a:p>
+            <a:pPr>
+              <a:lnSpc>
+                <a:spcPct val="115000"/>
+              </a:lnSpc>
+              <a:spcAft>
+                <a:spcPts val="500"/>
+              </a:spcAft>
+              <a:defRPr sz="1600" b="0">
+                <a:solidFill>
+                  <a:srgbClr val="37474F"/>
+                </a:solidFill>
+                <a:latin typeface="Calibri"/>
+              </a:defRPr>
+            </a:pPr>
+            <a:r>
+              <a:t>▸  Start action launches async Worker — connects to Flower server via gRPC/TCP</a:t>
+            </a:r>
+          </a:p>
+          <a:p>
+            <a:pPr>
+              <a:lnSpc>
+                <a:spcPct val="115000"/>
+              </a:lnSpc>
+              <a:spcAft>
+                <a:spcPts val="500"/>
+              </a:spcAft>
+              <a:defRPr sz="1600" b="0">
+                <a:solidFill>
+                  <a:srgbClr val="37474F"/>
+                </a:solidFill>
+                <a:latin typeface="Calibri"/>
+              </a:defRPr>
+            </a:pPr>
+            <a:r>
+              <a:t>▸  Worker loads local CSV — initializes model with global weights from server</a:t>
+            </a:r>
+          </a:p>
+          <a:p>
+            <a:pPr>
+              <a:lnSpc>
+                <a:spcPct val="115000"/>
+              </a:lnSpc>
+              <a:spcAft>
+                <a:spcPts val="500"/>
+              </a:spcAft>
+              <a:defRPr sz="1600" b="0">
+                <a:solidFill>
+                  <a:srgbClr val="37474F"/>
+                </a:solidFill>
+                <a:latin typeface="Calibri"/>
+              </a:defRPr>
+            </a:pPr>
+            <a:r>
+              <a:t>▸  Local training: N local epochs on board CPU — sends weight delta to server</a:t>
+            </a:r>
+          </a:p>
+          <a:p>
+            <a:pPr>
+              <a:lnSpc>
+                <a:spcPct val="115000"/>
+              </a:lnSpc>
+              <a:spcAft>
+                <a:spcPts val="500"/>
+              </a:spcAft>
+              <a:defRPr sz="1600" b="0">
+                <a:solidFill>
+                  <a:srgbClr val="37474F"/>
+                </a:solidFill>
+                <a:latin typeface="Calibri"/>
+              </a:defRPr>
+            </a:pPr>
+            <a:r>
+              <a:t>▸  Server aggregates all 3 client updates — broadcasts new global weights</a:t>
+            </a:r>
+          </a:p>
+          <a:p>
+            <a:pPr>
+              <a:lnSpc>
+                <a:spcPct val="115000"/>
+              </a:lnSpc>
+              <a:spcAft>
+                <a:spcPts val="500"/>
+              </a:spcAft>
+              <a:defRPr sz="1600" b="0">
+                <a:solidFill>
+                  <a:srgbClr val="37474F"/>
+                </a:solidFill>
+                <a:latin typeface="Calibri"/>
+              </a:defRPr>
+            </a:pPr>
+            <a:r>
+              <a:t>▸  Round 2: clients receive updated global model — repeat local training</a:t>
+            </a:r>
+          </a:p>
+          <a:p>
+            <a:pPr>
+              <a:lnSpc>
+                <a:spcPct val="115000"/>
+              </a:lnSpc>
+              <a:spcAft>
+                <a:spcPts val="500"/>
+              </a:spcAft>
+              <a:defRPr sz="1600" b="0">
+                <a:solidFill>
+                  <a:srgbClr val="37474F"/>
+                </a:solidFill>
+                <a:latin typeface="Calibri"/>
+              </a:defRPr>
+            </a:pPr>
+            <a:r>
+              <a:t>▸  Stop: Interrupt plugin on each board after rounds complete — clean shutdown</a:t>
+            </a:r>
+          </a:p>
+        </p:txBody>
+      </p:sp>
+      <p:sp>
+        <p:nvSpPr>
+          <p:cNvPr id="8" name="Rectangle 7"/>
+          <p:cNvSpPr/>
+          <p:nvPr/>
+        </p:nvSpPr>
+        <p:spPr>
+          <a:xfrm>
+            <a:off x="457200" y="6446520"/>
+            <a:ext cx="11274552" cy="18288"/>
+          </a:xfrm>
+          <a:prstGeom prst="rect">
+            <a:avLst/>
+          </a:prstGeom>
+          <a:solidFill>
+            <a:srgbClr val="B2EBF2"/>
+          </a:solidFill>
+          <a:ln>
+            <a:noFill/>
+          </a:ln>
+        </p:spPr>
+        <p:style>
+          <a:lnRef idx="1">
+            <a:schemeClr val="accent1"/>
+          </a:lnRef>
+          <a:fillRef idx="3">
+            <a:schemeClr val="accent1"/>
+          </a:fillRef>
+          <a:effectRef idx="2">
+            <a:schemeClr val="accent1"/>
+          </a:effectRef>
+          <a:fontRef idx="minor">
+            <a:schemeClr val="lt1"/>
+          </a:fontRef>
+        </p:style>
+        <p:txBody>
+          <a:bodyPr rtlCol="0" anchor="ctr"/>
+          <a:lstStyle/>
+          <a:p>
+            <a:pPr algn="ctr"/>
+          </a:p>
+        </p:txBody>
+      </p:sp>
+      <p:sp>
+        <p:nvSpPr>
+          <p:cNvPr id="9" name="TextBox 8"/>
+          <p:cNvSpPr txBox="1"/>
+          <p:nvPr/>
+        </p:nvSpPr>
+        <p:spPr>
+          <a:xfrm>
+            <a:off x="502920" y="6473952"/>
+            <a:ext cx="7315200" cy="320040"/>
+          </a:xfrm>
+          <a:prstGeom prst="rect">
+            <a:avLst/>
+          </a:prstGeom>
+          <a:noFill/>
+        </p:spPr>
+        <p:txBody>
+          <a:bodyPr wrap="none">
+            <a:spAutoFit/>
+          </a:bodyPr>
+          <a:lstStyle/>
+          <a:p>
+            <a:pPr>
+              <a:defRPr sz="900" b="0">
+                <a:solidFill>
+                  <a:srgbClr val="90A4AE"/>
+                </a:solidFill>
+                <a:latin typeface="Calibri"/>
+              </a:defRPr>
+            </a:pPr>
+            <a:r>
+              <a:t>Assembling Smart CPS · Stack4Things Training</a:t>
+            </a:r>
+          </a:p>
+        </p:txBody>
+      </p:sp>
+      <p:sp>
+        <p:nvSpPr>
+          <p:cNvPr id="10" name="TextBox 9"/>
+          <p:cNvSpPr txBox="1"/>
+          <p:nvPr/>
+        </p:nvSpPr>
+        <p:spPr>
+          <a:xfrm>
+            <a:off x="9326880" y="6455664"/>
+            <a:ext cx="2377440" cy="320040"/>
+          </a:xfrm>
+          <a:prstGeom prst="rect">
+            <a:avLst/>
+          </a:prstGeom>
+          <a:noFill/>
+        </p:spPr>
+        <p:txBody>
+          <a:bodyPr wrap="none">
+            <a:spAutoFit/>
+          </a:bodyPr>
+          <a:lstStyle/>
+          <a:p>
+            <a:pPr algn="r">
+              <a:defRPr sz="900" b="1">
+                <a:solidFill>
+                  <a:srgbClr val="008B9A"/>
+                </a:solidFill>
+                <a:latin typeface="Calibri"/>
+              </a:defRPr>
+            </a:pPr>
+            <a:r>
+              <a:t>Theory</a:t>
+            </a:r>
+          </a:p>
+        </p:txBody>
+      </p:sp>
+    </p:spTree>
+  </p:cSld>
+  <p:clrMapOvr>
+    <a:masterClrMapping/>
+  </p:clrMapOvr>
+</p:sld>
+</file>
+
+<file path=ppt/slides/slide31.xml><?xml version="1.0" encoding="utf-8"?>
+<p:sld xmlns:a="http://schemas.openxmlformats.org/drawingml/2006/main" xmlns:p="http://schemas.openxmlformats.org/presentationml/2006/main" xmlns:r="http://schemas.openxmlformats.org/officeDocument/2006/relationships">
+  <p:cSld>
+    <p:bg>
+      <p:bgPr>
+        <a:solidFill>
+          <a:srgbClr val="F0F9FA"/>
+        </a:solidFill>
+        <a:effectLst/>
+      </p:bgPr>
+    </p:bg>
+    <p:spTree>
+      <p:nvGrpSpPr>
+        <p:cNvPr id="1" name=""/>
+        <p:cNvGrpSpPr/>
+        <p:nvPr/>
+      </p:nvGrpSpPr>
+      <p:grpSpPr/>
+      <p:sp>
+        <p:nvSpPr>
+          <p:cNvPr id="2" name="Rectangle 1"/>
+          <p:cNvSpPr/>
+          <p:nvPr/>
+        </p:nvSpPr>
+        <p:spPr>
+          <a:xfrm>
+            <a:off x="0" y="0"/>
+            <a:ext cx="109728" cy="6858000"/>
+          </a:xfrm>
+          <a:prstGeom prst="rect">
+            <a:avLst/>
+          </a:prstGeom>
+          <a:solidFill>
+            <a:srgbClr val="008B9A"/>
+          </a:solidFill>
+          <a:ln>
+            <a:noFill/>
+          </a:ln>
+        </p:spPr>
+        <p:style>
+          <a:lnRef idx="1">
+            <a:schemeClr val="accent1"/>
+          </a:lnRef>
+          <a:fillRef idx="3">
+            <a:schemeClr val="accent1"/>
+          </a:fillRef>
+          <a:effectRef idx="2">
+            <a:schemeClr val="accent1"/>
+          </a:effectRef>
+          <a:fontRef idx="minor">
+            <a:schemeClr val="lt1"/>
+          </a:fontRef>
+        </p:style>
+        <p:txBody>
+          <a:bodyPr rtlCol="0" anchor="ctr"/>
+          <a:lstStyle/>
+          <a:p>
+            <a:pPr algn="ctr"/>
+          </a:p>
+        </p:txBody>
+      </p:sp>
+      <p:sp>
+        <p:nvSpPr>
+          <p:cNvPr id="3" name="Rounded Rectangle 2"/>
+          <p:cNvSpPr/>
+          <p:nvPr/>
+        </p:nvSpPr>
+        <p:spPr>
+          <a:xfrm>
+            <a:off x="502920" y="292608"/>
+            <a:ext cx="2011680" cy="310896"/>
+          </a:xfrm>
+          <a:prstGeom prst="roundRect">
+            <a:avLst/>
+          </a:prstGeom>
+          <a:solidFill>
+            <a:srgbClr val="008B9A"/>
+          </a:solidFill>
+          <a:ln>
+            <a:noFill/>
+          </a:ln>
+        </p:spPr>
+        <p:style>
+          <a:lnRef idx="1">
+            <a:schemeClr val="accent1"/>
+          </a:lnRef>
+          <a:fillRef idx="3">
+            <a:schemeClr val="accent1"/>
+          </a:fillRef>
+          <a:effectRef idx="2">
+            <a:schemeClr val="accent1"/>
+          </a:effectRef>
+          <a:fontRef idx="minor">
+            <a:schemeClr val="lt1"/>
+          </a:fontRef>
+        </p:style>
+        <p:txBody>
+          <a:bodyPr rtlCol="0" anchor="ctr"/>
+          <a:lstStyle/>
+          <a:p>
+            <a:pPr algn="ctr">
+              <a:defRPr sz="1100" b="1">
+                <a:solidFill>
+                  <a:srgbClr val="FFFFFF"/>
+                </a:solidFill>
+                <a:latin typeface="Calibri"/>
+              </a:defRPr>
+            </a:pPr>
+            <a:r>
+              <a:t>THEORY</a:t>
+            </a:r>
+          </a:p>
+        </p:txBody>
+      </p:sp>
+      <p:sp>
+        <p:nvSpPr>
+          <p:cNvPr id="4" name="TextBox 3"/>
+          <p:cNvSpPr txBox="1"/>
+          <p:nvPr/>
+        </p:nvSpPr>
+        <p:spPr>
+          <a:xfrm>
+            <a:off x="7772400" y="292608"/>
+            <a:ext cx="4114800" cy="411480"/>
+          </a:xfrm>
+          <a:prstGeom prst="rect">
+            <a:avLst/>
+          </a:prstGeom>
+          <a:noFill/>
+        </p:spPr>
+        <p:txBody>
+          <a:bodyPr wrap="none">
+            <a:spAutoFit/>
+          </a:bodyPr>
+          <a:lstStyle/>
+          <a:p>
+            <a:pPr algn="r">
+              <a:defRPr sz="1100" b="0">
+                <a:solidFill>
+                  <a:srgbClr val="78909C"/>
+                </a:solidFill>
+                <a:latin typeface="Calibri"/>
+              </a:defRPr>
+            </a:pPr>
+            <a:r>
+              <a:t>fix-iotronic-wampagents.sh · validate-lab-fl.sh · install-fl-on-boards</a:t>
+            </a:r>
+          </a:p>
+        </p:txBody>
+      </p:sp>
+      <p:sp>
+        <p:nvSpPr>
+          <p:cNvPr id="5" name="TextBox 4"/>
+          <p:cNvSpPr txBox="1"/>
+          <p:nvPr/>
+        </p:nvSpPr>
+        <p:spPr>
+          <a:xfrm>
+            <a:off x="594360" y="713232"/>
+            <a:ext cx="10972800" cy="868680"/>
+          </a:xfrm>
+          <a:prstGeom prst="rect">
+            <a:avLst/>
+          </a:prstGeom>
+          <a:noFill/>
+        </p:spPr>
+        <p:txBody>
+          <a:bodyPr wrap="none">
+            <a:spAutoFit/>
+          </a:bodyPr>
+          <a:lstStyle/>
+          <a:p>
+            <a:pPr>
+              <a:defRPr sz="2600" b="1">
+                <a:solidFill>
+                  <a:srgbClr val="0D2B45"/>
+                </a:solidFill>
+                <a:latin typeface="Calibri"/>
+              </a:defRPr>
+            </a:pPr>
+            <a:r>
+              <a:t>Troubleshooting FL connectivity (Ch.19 lab)</a:t>
+            </a:r>
+          </a:p>
+        </p:txBody>
+      </p:sp>
+      <p:sp>
+        <p:nvSpPr>
+          <p:cNvPr id="6" name="Rounded Rectangle 5"/>
+          <p:cNvSpPr/>
+          <p:nvPr/>
+        </p:nvSpPr>
+        <p:spPr>
+          <a:xfrm>
+            <a:off x="502920" y="1554480"/>
+            <a:ext cx="11155680" cy="4800600"/>
+          </a:xfrm>
+          <a:prstGeom prst="roundRect">
+            <a:avLst/>
+          </a:prstGeom>
+          <a:solidFill>
+            <a:srgbClr val="FFFFFF"/>
+          </a:solidFill>
+          <a:ln w="9525">
+            <a:solidFill>
+              <a:srgbClr val="B2EBF2"/>
+            </a:solidFill>
+          </a:ln>
+        </p:spPr>
+        <p:style>
+          <a:lnRef idx="1">
+            <a:schemeClr val="accent1"/>
+          </a:lnRef>
+          <a:fillRef idx="3">
+            <a:schemeClr val="accent1"/>
+          </a:fillRef>
+          <a:effectRef idx="2">
+            <a:schemeClr val="accent1"/>
+          </a:effectRef>
+          <a:fontRef idx="minor">
+            <a:schemeClr val="lt1"/>
+          </a:fontRef>
+        </p:style>
+        <p:txBody>
+          <a:bodyPr rtlCol="0" anchor="ctr"/>
+          <a:lstStyle/>
+          <a:p>
+            <a:pPr algn="ctr"/>
+          </a:p>
+        </p:txBody>
+      </p:sp>
+      <p:sp>
+        <p:nvSpPr>
+          <p:cNvPr id="7" name="TextBox 6"/>
+          <p:cNvSpPr txBox="1"/>
+          <p:nvPr/>
+        </p:nvSpPr>
+        <p:spPr>
+          <a:xfrm>
+            <a:off x="777240" y="1673352"/>
+            <a:ext cx="10424160" cy="4572000"/>
+          </a:xfrm>
+          <a:prstGeom prst="rect">
+            <a:avLst/>
+          </a:prstGeom>
+          <a:noFill/>
+        </p:spPr>
+        <p:txBody>
+          <a:bodyPr wrap="square">
+            <a:spAutoFit/>
+          </a:bodyPr>
+          <a:lstStyle/>
+          <a:p>
+            <a:pPr>
+              <a:lnSpc>
+                <a:spcPct val="115000"/>
+              </a:lnSpc>
+              <a:spcAft>
+                <a:spcPts val="500"/>
+              </a:spcAft>
+              <a:defRPr sz="1600" b="0">
+                <a:solidFill>
+                  <a:srgbClr val="37474F"/>
+                </a:solidFill>
+                <a:latin typeface="Calibri"/>
+              </a:defRPr>
+            </a:pPr>
+            <a:r>
+              <a:t>▸  Clients cannot connect: verify server on VM :8087 and gateway IP from install-fl-on-boards.sh</a:t>
+            </a:r>
+          </a:p>
+          <a:p>
+            <a:pPr>
+              <a:lnSpc>
+                <a:spcPct val="115000"/>
+              </a:lnSpc>
+              <a:spcAft>
+                <a:spcPts val="500"/>
+              </a:spcAft>
+              <a:defRPr sz="1600" b="0">
+                <a:solidFill>
+                  <a:srgbClr val="37474F"/>
+                </a:solidFill>
+                <a:latin typeface="Calibri"/>
+              </a:defRPr>
+            </a:pPr>
+            <a:r>
+              <a:t>▸  Horizon 'Unable to retrieve boards list': run scripts/fix-iotronic-wampagents.sh</a:t>
+            </a:r>
+          </a:p>
+          <a:p>
+            <a:pPr>
+              <a:lnSpc>
+                <a:spcPct val="115000"/>
+              </a:lnSpc>
+              <a:spcAft>
+                <a:spcPts val="500"/>
+              </a:spcAft>
+              <a:defRPr sz="1600" b="0">
+                <a:solidFill>
+                  <a:srgbClr val="37474F"/>
+                </a:solidFill>
+                <a:latin typeface="Calibri"/>
+              </a:defRPr>
+            </a:pPr>
+            <a:r>
+              <a:t>▸  Server stuck waiting: ensure all 3 Start actions fired — minimum client count not met</a:t>
+            </a:r>
+          </a:p>
+          <a:p>
+            <a:pPr>
+              <a:lnSpc>
+                <a:spcPct val="115000"/>
+              </a:lnSpc>
+              <a:spcAft>
+                <a:spcPts val="500"/>
+              </a:spcAft>
+              <a:defRPr sz="1600" b="0">
+                <a:solidFill>
+                  <a:srgbClr val="37474F"/>
+                </a:solidFill>
+                <a:latin typeface="Calibri"/>
+              </a:defRPr>
+            </a:pPr>
+            <a:r>
+              <a:t>▸  OOM on board: reduce local epochs in plugin params — edge boards have limited RAM</a:t>
+            </a:r>
+          </a:p>
+          <a:p>
+            <a:pPr>
+              <a:lnSpc>
+                <a:spcPct val="115000"/>
+              </a:lnSpc>
+              <a:spcAft>
+                <a:spcPts val="500"/>
+              </a:spcAft>
+              <a:defRPr sz="1600" b="0">
+                <a:solidFill>
+                  <a:srgbClr val="37474F"/>
+                </a:solidFill>
+                <a:latin typeface="Calibri"/>
+              </a:defRPr>
+            </a:pPr>
+            <a:r>
+              <a:t>▸  Plugin error on Start: re-run install-fl-on-boards.sh (flwr/torch in LR container)</a:t>
+            </a:r>
+          </a:p>
+          <a:p>
+            <a:pPr>
+              <a:lnSpc>
+                <a:spcPct val="115000"/>
+              </a:lnSpc>
+              <a:spcAft>
+                <a:spcPts val="500"/>
+              </a:spcAft>
+              <a:defRPr sz="1600" b="0">
+                <a:solidFill>
+                  <a:srgbClr val="37474F"/>
+                </a:solidFill>
+                <a:latin typeface="Calibri"/>
+              </a:defRPr>
+            </a:pPr>
+            <a:r>
+              <a:t>▸  validate-lab-fl.sh — artifacts, Horizon mounts, panel URL, live proxy + optional E2E</a:t>
+            </a:r>
+          </a:p>
+        </p:txBody>
+      </p:sp>
+      <p:sp>
+        <p:nvSpPr>
+          <p:cNvPr id="8" name="Rectangle 7"/>
+          <p:cNvSpPr/>
+          <p:nvPr/>
+        </p:nvSpPr>
+        <p:spPr>
+          <a:xfrm>
+            <a:off x="457200" y="6446520"/>
+            <a:ext cx="11274552" cy="18288"/>
+          </a:xfrm>
+          <a:prstGeom prst="rect">
+            <a:avLst/>
+          </a:prstGeom>
+          <a:solidFill>
+            <a:srgbClr val="B2EBF2"/>
+          </a:solidFill>
+          <a:ln>
+            <a:noFill/>
+          </a:ln>
+        </p:spPr>
+        <p:style>
+          <a:lnRef idx="1">
+            <a:schemeClr val="accent1"/>
+          </a:lnRef>
+          <a:fillRef idx="3">
+            <a:schemeClr val="accent1"/>
+          </a:fillRef>
+          <a:effectRef idx="2">
+            <a:schemeClr val="accent1"/>
+          </a:effectRef>
+          <a:fontRef idx="minor">
+            <a:schemeClr val="lt1"/>
+          </a:fontRef>
+        </p:style>
+        <p:txBody>
+          <a:bodyPr rtlCol="0" anchor="ctr"/>
+          <a:lstStyle/>
+          <a:p>
+            <a:pPr algn="ctr"/>
+          </a:p>
+        </p:txBody>
+      </p:sp>
+      <p:sp>
+        <p:nvSpPr>
+          <p:cNvPr id="9" name="TextBox 8"/>
+          <p:cNvSpPr txBox="1"/>
+          <p:nvPr/>
+        </p:nvSpPr>
+        <p:spPr>
+          <a:xfrm>
+            <a:off x="502920" y="6473952"/>
+            <a:ext cx="7315200" cy="320040"/>
+          </a:xfrm>
+          <a:prstGeom prst="rect">
+            <a:avLst/>
+          </a:prstGeom>
+          <a:noFill/>
+        </p:spPr>
+        <p:txBody>
+          <a:bodyPr wrap="none">
+            <a:spAutoFit/>
+          </a:bodyPr>
+          <a:lstStyle/>
+          <a:p>
+            <a:pPr>
+              <a:defRPr sz="900" b="0">
+                <a:solidFill>
+                  <a:srgbClr val="90A4AE"/>
+                </a:solidFill>
+                <a:latin typeface="Calibri"/>
+              </a:defRPr>
+            </a:pPr>
+            <a:r>
+              <a:t>Assembling Smart CPS · Stack4Things Training</a:t>
+            </a:r>
+          </a:p>
+        </p:txBody>
+      </p:sp>
+      <p:sp>
+        <p:nvSpPr>
+          <p:cNvPr id="10" name="TextBox 9"/>
+          <p:cNvSpPr txBox="1"/>
+          <p:nvPr/>
+        </p:nvSpPr>
+        <p:spPr>
+          <a:xfrm>
+            <a:off x="9326880" y="6455664"/>
+            <a:ext cx="2377440" cy="320040"/>
+          </a:xfrm>
+          <a:prstGeom prst="rect">
+            <a:avLst/>
+          </a:prstGeom>
+          <a:noFill/>
+        </p:spPr>
+        <p:txBody>
+          <a:bodyPr wrap="none">
+            <a:spAutoFit/>
+          </a:bodyPr>
+          <a:lstStyle/>
+          <a:p>
+            <a:pPr algn="r">
+              <a:defRPr sz="900" b="1">
+                <a:solidFill>
+                  <a:srgbClr val="008B9A"/>
+                </a:solidFill>
+                <a:latin typeface="Calibri"/>
+              </a:defRPr>
+            </a:pPr>
+            <a:r>
+              <a:t>Theory</a:t>
+            </a:r>
+          </a:p>
+        </p:txBody>
+      </p:sp>
+    </p:spTree>
+  </p:cSld>
+  <p:clrMapOvr>
+    <a:masterClrMapping/>
+  </p:clrMapOvr>
+</p:sld>
+</file>
+
+<file path=ppt/slides/slide32.xml><?xml version="1.0" encoding="utf-8"?>
+<p:sld xmlns:a="http://schemas.openxmlformats.org/drawingml/2006/main" xmlns:p="http://schemas.openxmlformats.org/presentationml/2006/main" xmlns:r="http://schemas.openxmlformats.org/officeDocument/2006/relationships">
+  <p:cSld>
+    <p:bg>
+      <p:bgPr>
+        <a:solidFill>
+          <a:srgbClr val="F0F9FA"/>
+        </a:solidFill>
+        <a:effectLst/>
+      </p:bgPr>
+    </p:bg>
+    <p:spTree>
+      <p:nvGrpSpPr>
+        <p:cNvPr id="1" name=""/>
+        <p:cNvGrpSpPr/>
+        <p:nvPr/>
+      </p:nvGrpSpPr>
+      <p:grpSpPr/>
+      <p:sp>
+        <p:nvSpPr>
+          <p:cNvPr id="2" name="Rectangle 1"/>
+          <p:cNvSpPr/>
+          <p:nvPr/>
+        </p:nvSpPr>
+        <p:spPr>
+          <a:xfrm>
+            <a:off x="0" y="0"/>
+            <a:ext cx="109728" cy="6858000"/>
+          </a:xfrm>
+          <a:prstGeom prst="rect">
+            <a:avLst/>
+          </a:prstGeom>
+          <a:solidFill>
+            <a:srgbClr val="008B9A"/>
+          </a:solidFill>
+          <a:ln>
+            <a:noFill/>
+          </a:ln>
+        </p:spPr>
+        <p:style>
+          <a:lnRef idx="1">
+            <a:schemeClr val="accent1"/>
+          </a:lnRef>
+          <a:fillRef idx="3">
+            <a:schemeClr val="accent1"/>
+          </a:fillRef>
+          <a:effectRef idx="2">
+            <a:schemeClr val="accent1"/>
+          </a:effectRef>
+          <a:fontRef idx="minor">
+            <a:schemeClr val="lt1"/>
+          </a:fontRef>
+        </p:style>
+        <p:txBody>
+          <a:bodyPr rtlCol="0" anchor="ctr"/>
+          <a:lstStyle/>
+          <a:p>
+            <a:pPr algn="ctr"/>
+          </a:p>
+        </p:txBody>
+      </p:sp>
+      <p:sp>
+        <p:nvSpPr>
+          <p:cNvPr id="3" name="Rounded Rectangle 2"/>
+          <p:cNvSpPr/>
+          <p:nvPr/>
+        </p:nvSpPr>
+        <p:spPr>
+          <a:xfrm>
+            <a:off x="502920" y="292608"/>
+            <a:ext cx="2011680" cy="310896"/>
+          </a:xfrm>
+          <a:prstGeom prst="roundRect">
+            <a:avLst/>
+          </a:prstGeom>
+          <a:solidFill>
+            <a:srgbClr val="008B9A"/>
+          </a:solidFill>
+          <a:ln>
+            <a:noFill/>
+          </a:ln>
+        </p:spPr>
+        <p:style>
+          <a:lnRef idx="1">
+            <a:schemeClr val="accent1"/>
+          </a:lnRef>
+          <a:fillRef idx="3">
+            <a:schemeClr val="accent1"/>
+          </a:fillRef>
+          <a:effectRef idx="2">
+            <a:schemeClr val="accent1"/>
+          </a:effectRef>
+          <a:fontRef idx="minor">
+            <a:schemeClr val="lt1"/>
+          </a:fontRef>
+        </p:style>
+        <p:txBody>
+          <a:bodyPr rtlCol="0" anchor="ctr"/>
+          <a:lstStyle/>
+          <a:p>
+            <a:pPr algn="ctr">
+              <a:defRPr sz="1100" b="1">
+                <a:solidFill>
+                  <a:srgbClr val="FFFFFF"/>
+                </a:solidFill>
+                <a:latin typeface="Calibri"/>
+              </a:defRPr>
+            </a:pPr>
+            <a:r>
+              <a:t>THEORY</a:t>
+            </a:r>
+          </a:p>
+        </p:txBody>
+      </p:sp>
+      <p:sp>
+        <p:nvSpPr>
+          <p:cNvPr id="4" name="TextBox 3"/>
+          <p:cNvSpPr txBox="1"/>
+          <p:nvPr/>
+        </p:nvSpPr>
+        <p:spPr>
+          <a:xfrm>
+            <a:off x="7772400" y="292608"/>
+            <a:ext cx="4114800" cy="411480"/>
+          </a:xfrm>
+          <a:prstGeom prst="rect">
+            <a:avLst/>
+          </a:prstGeom>
+          <a:noFill/>
+        </p:spPr>
+        <p:txBody>
+          <a:bodyPr wrap="none">
+            <a:spAutoFit/>
+          </a:bodyPr>
+          <a:lstStyle/>
+          <a:p>
+            <a:pPr algn="r">
+              <a:defRPr sz="1100" b="0">
+                <a:solidFill>
+                  <a:srgbClr val="78909C"/>
+                </a:solidFill>
+                <a:latin typeface="Calibri"/>
+              </a:defRPr>
+            </a:pPr>
+            <a:r>
+              <a:t>Ch.19 + Ch.11 Type 4 · SLICES RI FL experiment pattern</a:t>
+            </a:r>
+          </a:p>
+        </p:txBody>
+      </p:sp>
+      <p:sp>
+        <p:nvSpPr>
+          <p:cNvPr id="5" name="TextBox 4"/>
+          <p:cNvSpPr txBox="1"/>
+          <p:nvPr/>
+        </p:nvSpPr>
+        <p:spPr>
+          <a:xfrm>
+            <a:off x="594360" y="713232"/>
+            <a:ext cx="10972800" cy="868680"/>
+          </a:xfrm>
+          <a:prstGeom prst="rect">
+            <a:avLst/>
+          </a:prstGeom>
+          <a:noFill/>
+        </p:spPr>
+        <p:txBody>
+          <a:bodyPr wrap="none">
+            <a:spAutoFit/>
+          </a:bodyPr>
+          <a:lstStyle/>
+          <a:p>
+            <a:pPr>
+              <a:defRPr sz="2600" b="1">
+                <a:solidFill>
+                  <a:srgbClr val="0D2B45"/>
+                </a:solidFill>
+                <a:latin typeface="Calibri"/>
+              </a:defRPr>
+            </a:pPr>
+            <a:r>
+              <a:t>FL in the Cloud Continuum research context (Ch.19 + Ch.11)</a:t>
+            </a:r>
+          </a:p>
+        </p:txBody>
+      </p:sp>
+      <p:sp>
+        <p:nvSpPr>
+          <p:cNvPr id="6" name="Rounded Rectangle 5"/>
+          <p:cNvSpPr/>
+          <p:nvPr/>
+        </p:nvSpPr>
+        <p:spPr>
+          <a:xfrm>
+            <a:off x="502920" y="1554480"/>
+            <a:ext cx="11155680" cy="4800600"/>
+          </a:xfrm>
+          <a:prstGeom prst="roundRect">
+            <a:avLst/>
+          </a:prstGeom>
+          <a:solidFill>
+            <a:srgbClr val="FFFFFF"/>
+          </a:solidFill>
+          <a:ln w="9525">
+            <a:solidFill>
+              <a:srgbClr val="B2EBF2"/>
+            </a:solidFill>
+          </a:ln>
+        </p:spPr>
+        <p:style>
+          <a:lnRef idx="1">
+            <a:schemeClr val="accent1"/>
+          </a:lnRef>
+          <a:fillRef idx="3">
+            <a:schemeClr val="accent1"/>
+          </a:fillRef>
+          <a:effectRef idx="2">
+            <a:schemeClr val="accent1"/>
+          </a:effectRef>
+          <a:fontRef idx="minor">
+            <a:schemeClr val="lt1"/>
+          </a:fontRef>
+        </p:style>
+        <p:txBody>
+          <a:bodyPr rtlCol="0" anchor="ctr"/>
+          <a:lstStyle/>
+          <a:p>
+            <a:pPr algn="ctr"/>
+          </a:p>
+        </p:txBody>
+      </p:sp>
+      <p:sp>
+        <p:nvSpPr>
+          <p:cNvPr id="7" name="TextBox 6"/>
+          <p:cNvSpPr txBox="1"/>
+          <p:nvPr/>
+        </p:nvSpPr>
+        <p:spPr>
+          <a:xfrm>
+            <a:off x="777240" y="1673352"/>
+            <a:ext cx="10424160" cy="4572000"/>
+          </a:xfrm>
+          <a:prstGeom prst="rect">
+            <a:avLst/>
+          </a:prstGeom>
+          <a:noFill/>
+        </p:spPr>
+        <p:txBody>
+          <a:bodyPr wrap="square">
+            <a:spAutoFit/>
+          </a:bodyPr>
+          <a:lstStyle/>
+          <a:p>
+            <a:pPr>
+              <a:lnSpc>
+                <a:spcPct val="115000"/>
+              </a:lnSpc>
+              <a:spcAft>
+                <a:spcPts val="500"/>
+              </a:spcAft>
+              <a:defRPr sz="1600" b="0">
+                <a:solidFill>
+                  <a:srgbClr val="37474F"/>
+                </a:solidFill>
+                <a:latin typeface="Calibri"/>
+              </a:defRPr>
+            </a:pPr>
+            <a:r>
+              <a:t>▸  Ch.11 Type 4 experiments: AI/ML workflows including federated learning at edge</a:t>
+            </a:r>
+          </a:p>
+          <a:p>
+            <a:pPr>
+              <a:lnSpc>
+                <a:spcPct val="115000"/>
+              </a:lnSpc>
+              <a:spcAft>
+                <a:spcPts val="500"/>
+              </a:spcAft>
+              <a:defRPr sz="1600" b="0">
+                <a:solidFill>
+                  <a:srgbClr val="37474F"/>
+                </a:solidFill>
+                <a:latin typeface="Calibri"/>
+              </a:defRPr>
+            </a:pPr>
+            <a:r>
+              <a:t>▸  SLICES RI multi-site FL: clients on different European sites, server on cloud slice</a:t>
+            </a:r>
+          </a:p>
+          <a:p>
+            <a:pPr>
+              <a:lnSpc>
+                <a:spcPct val="115000"/>
+              </a:lnSpc>
+              <a:spcAft>
+                <a:spcPts val="500"/>
+              </a:spcAft>
+              <a:defRPr sz="1600" b="0">
+                <a:solidFill>
+                  <a:srgbClr val="37474F"/>
+                </a:solidFill>
+                <a:latin typeface="Calibri"/>
+              </a:defRPr>
+            </a:pPr>
+            <a:r>
+              <a:t>▸  S4T IoTronic inject scales FL client deployment — same pattern as Module D fleet ops</a:t>
+            </a:r>
+          </a:p>
+          <a:p>
+            <a:pPr>
+              <a:lnSpc>
+                <a:spcPct val="115000"/>
+              </a:lnSpc>
+              <a:spcAft>
+                <a:spcPts val="500"/>
+              </a:spcAft>
+              <a:defRPr sz="1600" b="0">
+                <a:solidFill>
+                  <a:srgbClr val="37474F"/>
+                </a:solidFill>
+                <a:latin typeface="Calibri"/>
+              </a:defRPr>
+            </a:pPr>
+            <a:r>
+              <a:t>▸  Crossplane Workflow CRD could declare FL experiment: server + N client plugins + datasets</a:t>
+            </a:r>
+          </a:p>
+          <a:p>
+            <a:pPr>
+              <a:lnSpc>
+                <a:spcPct val="115000"/>
+              </a:lnSpc>
+              <a:spcAft>
+                <a:spcPts val="500"/>
+              </a:spcAft>
+              <a:defRPr sz="1600" b="0">
+                <a:solidFill>
+                  <a:srgbClr val="37474F"/>
+                </a:solidFill>
+                <a:latin typeface="Calibri"/>
+              </a:defRPr>
+            </a:pPr>
+            <a:r>
+              <a:t>▸  Edge-board FL preserves data sovereignty requirements of SLICES partner institutions</a:t>
+            </a:r>
+          </a:p>
+          <a:p>
+            <a:pPr>
+              <a:lnSpc>
+                <a:spcPct val="115000"/>
+              </a:lnSpc>
+              <a:spcAft>
+                <a:spcPts val="500"/>
+              </a:spcAft>
+              <a:defRPr sz="1600" b="0">
+                <a:solidFill>
+                  <a:srgbClr val="37474F"/>
+                </a:solidFill>
+                <a:latin typeface="Calibri"/>
+              </a:defRPr>
+            </a:pPr>
+            <a:r>
+              <a:t>▸  Lab on {{VM_IP}} is minimal horizontal FL — production scales to cross-silo federation</a:t>
+            </a:r>
+          </a:p>
+        </p:txBody>
+      </p:sp>
+      <p:sp>
+        <p:nvSpPr>
+          <p:cNvPr id="8" name="Rectangle 7"/>
+          <p:cNvSpPr/>
+          <p:nvPr/>
+        </p:nvSpPr>
+        <p:spPr>
+          <a:xfrm>
+            <a:off x="457200" y="6446520"/>
+            <a:ext cx="11274552" cy="18288"/>
+          </a:xfrm>
+          <a:prstGeom prst="rect">
+            <a:avLst/>
+          </a:prstGeom>
+          <a:solidFill>
+            <a:srgbClr val="B2EBF2"/>
+          </a:solidFill>
+          <a:ln>
+            <a:noFill/>
+          </a:ln>
+        </p:spPr>
+        <p:style>
+          <a:lnRef idx="1">
+            <a:schemeClr val="accent1"/>
+          </a:lnRef>
+          <a:fillRef idx="3">
+            <a:schemeClr val="accent1"/>
+          </a:fillRef>
+          <a:effectRef idx="2">
+            <a:schemeClr val="accent1"/>
+          </a:effectRef>
+          <a:fontRef idx="minor">
+            <a:schemeClr val="lt1"/>
+          </a:fontRef>
+        </p:style>
+        <p:txBody>
+          <a:bodyPr rtlCol="0" anchor="ctr"/>
+          <a:lstStyle/>
+          <a:p>
+            <a:pPr algn="ctr"/>
+          </a:p>
+        </p:txBody>
+      </p:sp>
+      <p:sp>
+        <p:nvSpPr>
+          <p:cNvPr id="9" name="TextBox 8"/>
+          <p:cNvSpPr txBox="1"/>
+          <p:nvPr/>
+        </p:nvSpPr>
+        <p:spPr>
+          <a:xfrm>
+            <a:off x="502920" y="6473952"/>
+            <a:ext cx="7315200" cy="320040"/>
+          </a:xfrm>
+          <a:prstGeom prst="rect">
+            <a:avLst/>
+          </a:prstGeom>
+          <a:noFill/>
+        </p:spPr>
+        <p:txBody>
+          <a:bodyPr wrap="none">
+            <a:spAutoFit/>
+          </a:bodyPr>
+          <a:lstStyle/>
+          <a:p>
+            <a:pPr>
+              <a:defRPr sz="900" b="0">
+                <a:solidFill>
+                  <a:srgbClr val="90A4AE"/>
+                </a:solidFill>
+                <a:latin typeface="Calibri"/>
+              </a:defRPr>
+            </a:pPr>
+            <a:r>
+              <a:t>Assembling Smart CPS · Stack4Things Training</a:t>
+            </a:r>
+          </a:p>
+        </p:txBody>
+      </p:sp>
+      <p:sp>
+        <p:nvSpPr>
+          <p:cNvPr id="10" name="TextBox 9"/>
+          <p:cNvSpPr txBox="1"/>
+          <p:nvPr/>
+        </p:nvSpPr>
+        <p:spPr>
+          <a:xfrm>
+            <a:off x="9326880" y="6455664"/>
+            <a:ext cx="2377440" cy="320040"/>
+          </a:xfrm>
+          <a:prstGeom prst="rect">
+            <a:avLst/>
+          </a:prstGeom>
+          <a:noFill/>
+        </p:spPr>
+        <p:txBody>
+          <a:bodyPr wrap="none">
+            <a:spAutoFit/>
+          </a:bodyPr>
+          <a:lstStyle/>
+          <a:p>
+            <a:pPr algn="r">
+              <a:defRPr sz="900" b="1">
+                <a:solidFill>
+                  <a:srgbClr val="008B9A"/>
+                </a:solidFill>
+                <a:latin typeface="Calibri"/>
+              </a:defRPr>
+            </a:pPr>
+            <a:r>
+              <a:t>Theory</a:t>
+            </a:r>
+          </a:p>
+        </p:txBody>
+      </p:sp>
+    </p:spTree>
+  </p:cSld>
+  <p:clrMapOvr>
+    <a:masterClrMapping/>
+  </p:clrMapOvr>
+</p:sld>
+</file>
+
+<file path=ppt/slides/slide33.xml><?xml version="1.0" encoding="utf-8"?>
+<p:sld xmlns:a="http://schemas.openxmlformats.org/drawingml/2006/main" xmlns:p="http://schemas.openxmlformats.org/presentationml/2006/main" xmlns:r="http://schemas.openxmlformats.org/officeDocument/2006/relationships">
+  <p:cSld>
+    <p:bg>
+      <p:bgPr>
+        <a:solidFill>
           <a:srgbClr val="0D2B45"/>
         </a:solidFill>
         <a:effectLst/>
@@ -14810,7 +15883,7 @@
 </p:sld>
 </file>
 
-<file path=ppt/slides/slide31.xml><?xml version="1.0" encoding="utf-8"?>
+<file path=ppt/slides/slide34.xml><?xml version="1.0" encoding="utf-8"?>
 <p:sld xmlns:a="http://schemas.openxmlformats.org/drawingml/2006/main" xmlns:p="http://schemas.openxmlformats.org/presentationml/2006/main" xmlns:r="http://schemas.openxmlformats.org/officeDocument/2006/relationships">
   <p:cSld>
     <p:bg>
@@ -15008,7 +16081,7 @@
               </a:defRPr>
             </a:pPr>
             <a:r>
-              <a:t>▸  Watch server log for: Round 1 complete · Round 2 complete · final accuracy</a:t>
+              <a:t>▸  Live topology shows rounds completing; loss numeric (not em-dash)</a:t>
             </a:r>
           </a:p>
           <a:p>
@@ -15119,7 +16192,7 @@
 </p:sld>
 </file>
 
-<file path=ppt/slides/slide32.xml><?xml version="1.0" encoding="utf-8"?>
+<file path=ppt/slides/slide35.xml><?xml version="1.0" encoding="utf-8"?>
 <p:sld xmlns:a="http://schemas.openxmlformats.org/drawingml/2006/main" xmlns:p="http://schemas.openxmlformats.org/presentationml/2006/main" xmlns:r="http://schemas.openxmlformats.org/officeDocument/2006/relationships">
   <p:cSld>
     <p:bg>
@@ -15298,7 +16371,7 @@
               </a:defRPr>
             </a:pPr>
             <a:r>
-              <a:t>▸  □ Flower server shows 2 aggregation rounds completing with 3 clients</a:t>
+              <a:t>▸  □ Horizon FL panel: Start server + Start all clients — rounds complete in live topology</a:t>
             </a:r>
           </a:p>
           <a:p>
@@ -15317,7 +16390,7 @@
               </a:defRPr>
             </a:pPr>
             <a:r>
-              <a:t>▸  □ Three board plugins connected and contributed weight updates</a:t>
+              <a:t>▸  □ Three production lines connected via fl-client with correct machine_*.csv per board</a:t>
             </a:r>
           </a:p>
           <a:p>
@@ -15336,7 +16409,7 @@
               </a:defRPr>
             </a:pPr>
             <a:r>
-              <a:t>▸  □ validate-lab-fl.sh passes</a:t>
+              <a:t>▸  □ validate-lab-fl.sh passes (Horizon mounts + :8091 control API)</a:t>
             </a:r>
           </a:p>
           <a:p>
@@ -15829,7 +16902,7 @@
               </a:defRPr>
             </a:pPr>
             <a:r>
-              <a:t>▸  Lab demo: 3 boards, 3 CSV files, 1 Flower server — minimal horizontal FL topology</a:t>
+              <a:t>▸  Lab demo: 3 production lines, 3 CSV files, 1 Flower server — horizontal FL for failure prediction</a:t>
             </a:r>
           </a:p>
         </p:txBody>
@@ -16244,7 +17317,7 @@
               </a:defRPr>
             </a:pPr>
             <a:r>
-              <a:t>▸  Clients: local training on board-resident dataset — heart_1/2/3.csv in ch19 demo</a:t>
+              <a:t>▸  Clients: local training on board-resident telemetry — machine_1/2/3.csv (predictive maintenance)</a:t>
             </a:r>
           </a:p>
           <a:p>
@@ -17575,7 +18648,7 @@
               </a:defRPr>
             </a:pPr>
             <a:r>
-              <a:t>Ch.19 · non-IID discussion · advanced FL algorithms footnote</a:t>
+              <a:t>Ch.19 · non-IID · predictive maintenance lab extension</a:t>
             </a:r>
           </a:p>
         </p:txBody>
@@ -17698,7 +18771,7 @@
               </a:defRPr>
             </a:pPr>
             <a:r>
-              <a:t>▸  Real edge data often non-IID: each board sees different distribution of sensor readings</a:t>
+              <a:t>▸  Real edge data often non-IID: each production line has different failure signatures</a:t>
             </a:r>
           </a:p>
           <a:p>
@@ -17717,7 +18790,7 @@
               </a:defRPr>
             </a:pPr>
             <a:r>
-              <a:t>▸  Non-IID slows convergence — may require more FL_ROUNDS or specialized aggregation</a:t>
+              <a:t>▸  Lab: CNC spindle vs conveyor vs pump — distinct vibration/temperature/current patterns</a:t>
             </a:r>
           </a:p>
           <a:p>
@@ -17736,7 +18809,7 @@
               </a:defRPr>
             </a:pPr>
             <a:r>
-              <a:t>▸  Lab heart CSVs are mildly non-IID by design — demonstrates realistic edge heterogeneity</a:t>
+              <a:t>▸  target=1 = failure imminent; federated model learns global predictor without centralizing CSVs</a:t>
             </a:r>
           </a:p>
           <a:p>
@@ -17755,7 +18828,7 @@
               </a:defRPr>
             </a:pPr>
             <a:r>
-              <a:t>▸  Production mitigations: FedProx, SCAFFOLD, personalization layers — beyond lab scope</a:t>
+              <a:t>▸  Non-IID slows convergence — may require more FL_ROUNDS or specialized aggregation</a:t>
             </a:r>
           </a:p>
           <a:p>
@@ -17774,7 +18847,7 @@
               </a:defRPr>
             </a:pPr>
             <a:r>
-              <a:t>▸  Students should observe per-round accuracy variance in Flower server log output</a:t>
+              <a:t>▸  Production mitigations: FedProx, SCAFFOLD — beyond lab scope</a:t>
             </a:r>
           </a:p>
           <a:p>
@@ -17793,7 +18866,7 @@
               </a:defRPr>
             </a:pPr>
             <a:r>
-              <a:t>▸  Module D fleet heterogeneity (3 boards) mirrors cross-silo non-IID scenario</a:t>
+              <a:t>▸  Module D fleet (3 boards) mirrors cross-silo industrial FL scenario</a:t>
             </a:r>
           </a:p>
         </p:txBody>
@@ -18066,7 +19139,7 @@
               </a:defRPr>
             </a:pPr>
             <a:r>
-              <a:t>Ch.19 · ch19 repo plugin + server.py listing</a:t>
+              <a:t>Ch.19 · server on cloud VM · 3 board clients · Horizon Federated Learn</a:t>
             </a:r>
           </a:p>
         </p:txBody>
@@ -18189,7 +19262,7 @@
               </a:defRPr>
             </a:pPr>
             <a:r>
-              <a:t>▸  Async plugin Worker in client.py connects to Flower server as FL client process</a:t>
+              <a:t>▸  Each board monitors a different machine: vibration, temperature, motor current (local CSV)</a:t>
             </a:r>
           </a:p>
           <a:p>
@@ -18208,7 +19281,7 @@
               </a:defRPr>
             </a:pPr>
             <a:r>
-              <a:t>▸  Local training loop: read CSV → train epochs → send weight update via Flower gRPC</a:t>
+              <a:t>▸  Target: binary failure_imminent — raw telemetry never leaves the edge board</a:t>
             </a:r>
           </a:p>
           <a:p>
@@ -18227,7 +19300,7 @@
               </a:defRPr>
             </a:pPr>
             <a:r>
-              <a:t>▸  Server-side evaluation: centralized loss/accuracy view printed each aggregation round</a:t>
+              <a:t>▸  Plugin lifecycle: install datasets → shared fl-client in FL panel → inject → Start</a:t>
             </a:r>
           </a:p>
           <a:p>
@@ -18246,7 +19319,7 @@
               </a:defRPr>
             </a:pPr>
             <a:r>
-              <a:t>▸  Plugin lifecycle: create in IoTronic → inject per board → Start while server running</a:t>
+              <a:t>▸  board-alpha = CNC spindle, board-beta = conveyor motor, board-gamma = pump line</a:t>
             </a:r>
           </a:p>
           <a:p>
@@ -18265,7 +19338,7 @@
               </a:defRPr>
             </a:pPr>
             <a:r>
-              <a:t>▸  Different CSV per board: heart_1.csv on alpha, heart_2.csv on beta, heart_3.csv on gamma</a:t>
+              <a:t>▸  Non-IID by design: each line has different failure signatures (Ch.19 horizontal FL)</a:t>
             </a:r>
           </a:p>
           <a:p>
@@ -18284,7 +19357,7 @@
               </a:defRPr>
             </a:pPr>
             <a:r>
-              <a:t>▸  Repo: training/repos/ch19 — server.py + client.py + sample datasets</a:t>
+              <a:t>▸  Repo: ch19/server.py + fl_client_plugin.py + machine_*.csv (generate_pm_datasets.py)</a:t>
             </a:r>
           </a:p>
         </p:txBody>
